--- a/docs/CargoVerse-Presentation.pptx
+++ b/docs/CargoVerse-Presentation.pptx
@@ -22,9 +22,12 @@
     <p:sldId id="270" r:id="rId16"/>
     <p:sldId id="271" r:id="rId17"/>
     <p:sldId id="272" r:id="rId18"/>
+    <p:sldId id="273" r:id="rId19"/>
+    <p:sldId id="274" r:id="rId20"/>
+    <p:sldId id="275" r:id="rId21"/>
   </p:sldIdLst>
   <p:notesMasterIdLst>
-    <p:notesMasterId r:id="rId19"/>
+    <p:notesMasterId r:id="rId22"/>
   </p:notesMasterIdLst>
   <p:sldSz cx="12192000" cy="6858000"/>
   <p:notesSz cx="6858000" cy="12192000"/>
@@ -123,7 +126,7 @@
   <p:extLst>
     <p:ext uri="{521415D9-36F7-43E2-AB2F-B90AF26B5E84}">
       <p14:sectionLst xmlns:p14="http://schemas.microsoft.com/office/powerpoint/2010/main">
-        <p14:section name="Introduction" id="{089b512a-d66f-0e79-6da8-f2b99e4fdde7}">
+        <p14:section name="Introduction" id="{83a8dfb8-4d68-87ce-cd76-7bf0015593b5}">
           <p14:sldIdLst>
             <p14:sldId id="256"/>
             <p14:sldId id="257"/>
@@ -131,7 +134,7 @@
             <p14:sldId id="259"/>
           </p14:sldIdLst>
         </p14:section>
-        <p14:section name="Design" id="{55d38009-dc2e-ae61-8dea-576be8186d60}">
+        <p14:section name="Design" id="{4704fb23-b98c-3286-a95f-73af16be2d0e}">
           <p14:sldIdLst>
             <p14:sldId id="260"/>
             <p14:sldId id="261"/>
@@ -140,20 +143,23 @@
             <p14:sldId id="264"/>
           </p14:sldIdLst>
         </p14:section>
-        <p14:section name="Implementation" id="{392c23a3-e2f0-a092-22d6-b58a304dcf1f}">
+        <p14:section name="Implementation" id="{3a54d512-fe23-d524-f6fe-6a492543cf8a}">
           <p14:sldIdLst>
             <p14:sldId id="265"/>
             <p14:sldId id="266"/>
             <p14:sldId id="267"/>
             <p14:sldId id="268"/>
             <p14:sldId id="269"/>
-          </p14:sldIdLst>
-        </p14:section>
-        <p14:section name="Outcomes" id="{23757a13-4f8c-4bfc-2d1a-587e51a7c2f1}">
-          <p14:sldIdLst>
             <p14:sldId id="270"/>
             <p14:sldId id="271"/>
             <p14:sldId id="272"/>
+          </p14:sldIdLst>
+        </p14:section>
+        <p14:section name="Outcomes" id="{cf816dd9-9f72-54b7-f112-663f67ceca5d}">
+          <p14:sldIdLst>
+            <p14:sldId id="273"/>
+            <p14:sldId id="274"/>
+            <p14:sldId id="275"/>
           </p14:sldIdLst>
         </p14:section>
       </p14:sectionLst>
@@ -1000,7 +1006,7 @@
           <a:p>
             <a:r>
               <a:rPr lang="en-US" dirty="0"/>
-              <a:t>The project was built step by step, each part on a working base. Every SQL statement was checked automatically, the code was type-checked, and the screens were checked with automated browser screenshots.</a:t>
+              <a:t>The Database Lab answers the question: why does this need a database at all? One: an UPDATE typed in SQL Developer changes the live 3D city, because triggers queue changes that did not come from the server. Two: Oracle Flashback Query rewinds the whole city up to ten minutes using undo data, with no history tables. Three: a Virtual Private Database policy gives each operator a database account that only sees their own sites, enforced by Oracle itself. Four: a concurrency lab runs two real sessions to show a double booking being prevented, a lost update, the FOR UPDATE fix and a deadlock detected by Oracle. npm run db:selftest checks all four.</a:t>
             </a:r>
             <a:endParaRPr lang="en-US" dirty="0"/>
           </a:p>
@@ -1088,7 +1094,7 @@
           <a:p>
             <a:r>
               <a:rPr lang="en-US" dirty="0"/>
-              <a:t>What we achieved. A complete system with the rules in the database, full traceability, and data that any tool can read. The project is about 19,000 lines of code.</a:t>
+              <a:t>The Smart Warehouse adds sixteen tables for bins, lots, pallets, sensors and events, and uses ten Oracle features that a plain file or spreadsheet cannot. Analytic functions rank products so fast movers are stored next to the docks. Every pick takes the lot that expires first. A recursive query traces a lot from the ship to every store that received it. MATCH_RECOGNIZE finds three warm readings in a row and a scheduler job holds the stock on its own. Stock movements are kept in a blockchain table that even the owner cannot change. The MODEL clause forecasts demand. Pallet labels are GS1 barcodes whose check digit is enforced by a CHECK constraint. Events travel through a transactional queue, pick routes are computed with Dijkstra in PL/SQL and a property graph, and damage reports are searched by meaning with vectors.</a:t>
             </a:r>
             <a:endParaRPr lang="en-US" dirty="0"/>
           </a:p>
@@ -1176,7 +1182,7 @@
           <a:p>
             <a:r>
               <a:rPr lang="en-US" dirty="0"/>
-              <a:t>Where the project can go next: real devices in place of the simulation, billing and customs, forecasting from history, a mobile app, a cloud database and high availability.</a:t>
+              <a:t>Three of the features at work. On the left, a cold-room door is left open; within a minute the scheduler job detects the breach with MATCH_RECOGNIZE, puts the insulin lots on hold and raises an urgent task, without the application. In the middle, the ledger: an UPDATE is refused by Oracle and the hash chain verifies. On the right, the demand forecast and the replenishment table with reorder points and economic order quantities.</a:t>
             </a:r>
             <a:endParaRPr lang="en-US" dirty="0"/>
           </a:p>
@@ -1264,7 +1270,7 @@
           <a:p>
             <a:r>
               <a:rPr lang="en-US" dirty="0"/>
-              <a:t>To conclude: a well-designed relational database can be the backbone of a real logistics operation. Thank you; we are happy to take questions or show a live demo.</a:t>
+              <a:t>The project was built step by step, each part on a working base. Every SQL statement was checked automatically, the code was type-checked, and the screens were checked with automated browser screenshots.</a:t>
             </a:r>
             <a:endParaRPr lang="en-US" dirty="0"/>
           </a:p>
@@ -1288,6 +1294,182 @@
             <a:fld id="{F7021451-1387-4CA6-816F-3879F97B5CBC}" type="slidenum">
               <a:rPr lang="en-US"/>
               <a:t>17</a:t>
+            </a:fld>
+            <a:endParaRPr lang="en-US"/>
+          </a:p>
+        </p:txBody>
+      </p:sp>
+    </p:spTree>
+    <p:extLst>
+      <p:ext uri="{BB962C8B-B14F-4D97-AF65-F5344CB8AC3E}">
+        <p14:creationId xmlns:p14="http://schemas.microsoft.com/office/powerpoint/2010/main" val="1024086991"/>
+      </p:ext>
+    </p:extLst>
+  </p:cSld>
+  <p:clrMapOvr>
+    <a:masterClrMapping/>
+  </p:clrMapOvr>
+</p:notes>
+</file>
+
+<file path=ppt/notesSlides/notesSlide18.xml><?xml version="1.0" encoding="utf-8"?>
+<p:notes xmlns:a="http://schemas.openxmlformats.org/drawingml/2006/main" xmlns:r="http://schemas.openxmlformats.org/officeDocument/2006/relationships" xmlns:p="http://schemas.openxmlformats.org/presentationml/2006/main">
+  <p:cSld>
+    <p:spTree>
+      <p:nvGrpSpPr>
+        <p:cNvPr id="1" name=""/>
+        <p:cNvGrpSpPr/>
+        <p:nvPr/>
+      </p:nvGrpSpPr>
+      <p:grpSpPr>
+        <a:xfrm>
+          <a:off x="0" y="0"/>
+          <a:ext cx="0" cy="0"/>
+          <a:chOff x="0" y="0"/>
+          <a:chExt cx="0" cy="0"/>
+        </a:xfrm>
+      </p:grpSpPr>
+      <p:sp>
+        <p:nvSpPr>
+          <p:cNvPr id="2" name="Slide Image Placeholder 1"/>
+          <p:cNvSpPr>
+            <a:spLocks noGrp="1" noRot="1" noChangeAspect="1"/>
+          </p:cNvSpPr>
+          <p:nvPr>
+            <p:ph type="sldImg"/>
+          </p:nvPr>
+        </p:nvSpPr>
+        <p:spPr/>
+      </p:sp>
+      <p:sp>
+        <p:nvSpPr>
+          <p:cNvPr id="3" name="Notes Placeholder 2"/>
+          <p:cNvSpPr>
+            <a:spLocks noGrp="1"/>
+          </p:cNvSpPr>
+          <p:nvPr>
+            <p:ph type="body" idx="1"/>
+          </p:nvPr>
+        </p:nvSpPr>
+        <p:spPr/>
+        <p:txBody>
+          <a:bodyPr/>
+          <a:lstStyle/>
+          <a:p>
+            <a:r>
+              <a:rPr lang="en-US" dirty="0"/>
+              <a:t>What we achieved. A complete system with the rules in the database, full traceability, and data that any tool can read. The project is about 30,700 lines of code.</a:t>
+            </a:r>
+            <a:endParaRPr lang="en-US" dirty="0"/>
+          </a:p>
+        </p:txBody>
+      </p:sp>
+      <p:sp>
+        <p:nvSpPr>
+          <p:cNvPr id="4" name="Slide Number Placeholder 3"/>
+          <p:cNvSpPr>
+            <a:spLocks noGrp="1"/>
+          </p:cNvSpPr>
+          <p:nvPr>
+            <p:ph type="sldNum" sz="quarter" idx="10"/>
+          </p:nvPr>
+        </p:nvSpPr>
+        <p:spPr/>
+        <p:txBody>
+          <a:bodyPr/>
+          <a:lstStyle/>
+          <a:p>
+            <a:fld id="{F7021451-1387-4CA6-816F-3879F97B5CBC}" type="slidenum">
+              <a:rPr lang="en-US"/>
+              <a:t>18</a:t>
+            </a:fld>
+            <a:endParaRPr lang="en-US"/>
+          </a:p>
+        </p:txBody>
+      </p:sp>
+    </p:spTree>
+    <p:extLst>
+      <p:ext uri="{BB962C8B-B14F-4D97-AF65-F5344CB8AC3E}">
+        <p14:creationId xmlns:p14="http://schemas.microsoft.com/office/powerpoint/2010/main" val="1024086991"/>
+      </p:ext>
+    </p:extLst>
+  </p:cSld>
+  <p:clrMapOvr>
+    <a:masterClrMapping/>
+  </p:clrMapOvr>
+</p:notes>
+</file>
+
+<file path=ppt/notesSlides/notesSlide19.xml><?xml version="1.0" encoding="utf-8"?>
+<p:notes xmlns:a="http://schemas.openxmlformats.org/drawingml/2006/main" xmlns:r="http://schemas.openxmlformats.org/officeDocument/2006/relationships" xmlns:p="http://schemas.openxmlformats.org/presentationml/2006/main">
+  <p:cSld>
+    <p:spTree>
+      <p:nvGrpSpPr>
+        <p:cNvPr id="1" name=""/>
+        <p:cNvGrpSpPr/>
+        <p:nvPr/>
+      </p:nvGrpSpPr>
+      <p:grpSpPr>
+        <a:xfrm>
+          <a:off x="0" y="0"/>
+          <a:ext cx="0" cy="0"/>
+          <a:chOff x="0" y="0"/>
+          <a:chExt cx="0" cy="0"/>
+        </a:xfrm>
+      </p:grpSpPr>
+      <p:sp>
+        <p:nvSpPr>
+          <p:cNvPr id="2" name="Slide Image Placeholder 1"/>
+          <p:cNvSpPr>
+            <a:spLocks noGrp="1" noRot="1" noChangeAspect="1"/>
+          </p:cNvSpPr>
+          <p:nvPr>
+            <p:ph type="sldImg"/>
+          </p:nvPr>
+        </p:nvSpPr>
+        <p:spPr/>
+      </p:sp>
+      <p:sp>
+        <p:nvSpPr>
+          <p:cNvPr id="3" name="Notes Placeholder 2"/>
+          <p:cNvSpPr>
+            <a:spLocks noGrp="1"/>
+          </p:cNvSpPr>
+          <p:nvPr>
+            <p:ph type="body" idx="1"/>
+          </p:nvPr>
+        </p:nvSpPr>
+        <p:spPr/>
+        <p:txBody>
+          <a:bodyPr/>
+          <a:lstStyle/>
+          <a:p>
+            <a:r>
+              <a:rPr lang="en-US" dirty="0"/>
+              <a:t>Where the project can go next: real devices in place of the simulation, billing and customs, machine-learning models trained inside the database, a mobile app, a cloud database and high availability.</a:t>
+            </a:r>
+            <a:endParaRPr lang="en-US" dirty="0"/>
+          </a:p>
+        </p:txBody>
+      </p:sp>
+      <p:sp>
+        <p:nvSpPr>
+          <p:cNvPr id="4" name="Slide Number Placeholder 3"/>
+          <p:cNvSpPr>
+            <a:spLocks noGrp="1"/>
+          </p:cNvSpPr>
+          <p:nvPr>
+            <p:ph type="sldNum" sz="quarter" idx="10"/>
+          </p:nvPr>
+        </p:nvSpPr>
+        <p:spPr/>
+        <p:txBody>
+          <a:bodyPr/>
+          <a:lstStyle/>
+          <a:p>
+            <a:fld id="{F7021451-1387-4CA6-816F-3879F97B5CBC}" type="slidenum">
+              <a:rPr lang="en-US"/>
+              <a:t>19</a:t>
             </a:fld>
             <a:endParaRPr lang="en-US"/>
           </a:p>
@@ -1394,6 +1576,94 @@
 </p:notes>
 </file>
 
+<file path=ppt/notesSlides/notesSlide20.xml><?xml version="1.0" encoding="utf-8"?>
+<p:notes xmlns:a="http://schemas.openxmlformats.org/drawingml/2006/main" xmlns:r="http://schemas.openxmlformats.org/officeDocument/2006/relationships" xmlns:p="http://schemas.openxmlformats.org/presentationml/2006/main">
+  <p:cSld>
+    <p:spTree>
+      <p:nvGrpSpPr>
+        <p:cNvPr id="1" name=""/>
+        <p:cNvGrpSpPr/>
+        <p:nvPr/>
+      </p:nvGrpSpPr>
+      <p:grpSpPr>
+        <a:xfrm>
+          <a:off x="0" y="0"/>
+          <a:ext cx="0" cy="0"/>
+          <a:chOff x="0" y="0"/>
+          <a:chExt cx="0" cy="0"/>
+        </a:xfrm>
+      </p:grpSpPr>
+      <p:sp>
+        <p:nvSpPr>
+          <p:cNvPr id="2" name="Slide Image Placeholder 1"/>
+          <p:cNvSpPr>
+            <a:spLocks noGrp="1" noRot="1" noChangeAspect="1"/>
+          </p:cNvSpPr>
+          <p:nvPr>
+            <p:ph type="sldImg"/>
+          </p:nvPr>
+        </p:nvSpPr>
+        <p:spPr/>
+      </p:sp>
+      <p:sp>
+        <p:nvSpPr>
+          <p:cNvPr id="3" name="Notes Placeholder 2"/>
+          <p:cNvSpPr>
+            <a:spLocks noGrp="1"/>
+          </p:cNvSpPr>
+          <p:nvPr>
+            <p:ph type="body" idx="1"/>
+          </p:nvPr>
+        </p:nvSpPr>
+        <p:spPr/>
+        <p:txBody>
+          <a:bodyPr/>
+          <a:lstStyle/>
+          <a:p>
+            <a:r>
+              <a:rPr lang="en-US" dirty="0"/>
+              <a:t>To conclude: a well-designed relational database can be the backbone of a real logistics operation. Thank you; we are happy to take questions or show a live demo.</a:t>
+            </a:r>
+            <a:endParaRPr lang="en-US" dirty="0"/>
+          </a:p>
+        </p:txBody>
+      </p:sp>
+      <p:sp>
+        <p:nvSpPr>
+          <p:cNvPr id="4" name="Slide Number Placeholder 3"/>
+          <p:cNvSpPr>
+            <a:spLocks noGrp="1"/>
+          </p:cNvSpPr>
+          <p:nvPr>
+            <p:ph type="sldNum" sz="quarter" idx="10"/>
+          </p:nvPr>
+        </p:nvSpPr>
+        <p:spPr/>
+        <p:txBody>
+          <a:bodyPr/>
+          <a:lstStyle/>
+          <a:p>
+            <a:fld id="{F7021451-1387-4CA6-816F-3879F97B5CBC}" type="slidenum">
+              <a:rPr lang="en-US"/>
+              <a:t>20</a:t>
+            </a:fld>
+            <a:endParaRPr lang="en-US"/>
+          </a:p>
+        </p:txBody>
+      </p:sp>
+    </p:spTree>
+    <p:extLst>
+      <p:ext uri="{BB962C8B-B14F-4D97-AF65-F5344CB8AC3E}">
+        <p14:creationId xmlns:p14="http://schemas.microsoft.com/office/powerpoint/2010/main" val="1024086991"/>
+      </p:ext>
+    </p:extLst>
+  </p:cSld>
+  <p:clrMapOvr>
+    <a:masterClrMapping/>
+  </p:clrMapOvr>
+</p:notes>
+</file>
+
 <file path=ppt/notesSlides/notesSlide3.xml><?xml version="1.0" encoding="utf-8"?>
 <p:notes xmlns:a="http://schemas.openxmlformats.org/drawingml/2006/main" xmlns:r="http://schemas.openxmlformats.org/officeDocument/2006/relationships" xmlns:p="http://schemas.openxmlformats.org/presentationml/2006/main">
   <p:cSld>
@@ -1792,7 +2062,7 @@
           <a:p>
             <a:r>
               <a:rPr lang="en-US" dirty="0"/>
-              <a:t>The size of the database. 44 tables in third normal form, 17 views, 6 PL/SQL packages, 14 triggers, 102 check constraints and 26 analytical reports. In total about 19,000 lines of SQL, PL/SQL and TypeScript.</a:t>
+              <a:t>The size of the database. 64 tables in third normal form, 27 views, 10 PL/SQL packages, 26 triggers, 136 check constraints and 26 analytical reports, plus a property graph, a blockchain table and an event queue. In total about 30,700 lines of SQL, PL/SQL and TypeScript.</a:t>
             </a:r>
             <a:endParaRPr lang="en-US" dirty="0"/>
           </a:p>
@@ -1880,7 +2150,7 @@
           <a:p>
             <a:r>
               <a:rPr lang="en-US" dirty="0"/>
-              <a:t>The 44 tables group into nine areas. Security and people; the three warehouse sites and their stock; transport; work and audit; the logistics park with its gates; the container port; and the retail stores.</a:t>
+              <a:t>The 44 core tables group into nine areas; four more belong to the Database Lab and sixteen to the Smart Warehouse. Security and people; the three warehouse sites and their stock; transport; work and audit; the logistics park with its gates; the container port; and the retail stores.</a:t>
             </a:r>
             <a:endParaRPr lang="en-US" dirty="0"/>
           </a:p>
@@ -6812,7 +7082,7 @@
                 <a:ea typeface="Cambria" pitchFamily="34" charset="-122"/>
                 <a:cs typeface="Cambria" pitchFamily="34" charset="-120"/>
               </a:rPr>
-              <a:t>Built in nine steps</a:t>
+              <a:t>Database Lab: four things only a database can do</a:t>
             </a:r>
             <a:endParaRPr lang="en-US" sz="3400" dirty="0"/>
           </a:p>
@@ -6820,24 +7090,26 @@
       </p:sp>
       <p:sp>
         <p:nvSpPr>
-          <p:cNvPr id="3" name="Step 1 marker"/>
+          <p:cNvPr id="3" name="Control the city from SQL card"/>
           <p:cNvSpPr/>
           <p:nvPr/>
         </p:nvSpPr>
         <p:spPr>
           <a:xfrm>
-            <a:off x="548640" y="1508760"/>
-            <a:ext cx="548640" cy="548640"/>
-          </a:xfrm>
-          <a:prstGeom prst="ellipse">
-            <a:avLst/>
+            <a:off x="548640" y="1280160"/>
+            <a:ext cx="5440680" cy="2286000"/>
+          </a:xfrm>
+          <a:prstGeom prst="roundRect">
+            <a:avLst>
+              <a:gd name="adj" fmla="val 4800"/>
+            </a:avLst>
           </a:prstGeom>
           <a:solidFill>
-            <a:srgbClr val="E8792B"/>
+            <a:schemeClr val="bg2"/>
           </a:solidFill>
           <a:ln w="12700">
             <a:solidFill>
-              <a:srgbClr val="E8792B"/>
+              <a:schemeClr val="bg2"/>
             </a:solidFill>
             <a:prstDash val="solid"/>
           </a:ln>
@@ -6845,183 +7117,70 @@
       </p:sp>
       <p:sp>
         <p:nvSpPr>
-          <p:cNvPr id="4" name="Text 2"/>
-          <p:cNvSpPr txBox="1"/>
-          <p:nvPr/>
-        </p:nvSpPr>
-        <p:spPr>
-          <a:xfrm>
-            <a:off x="548640" y="1508760"/>
-            <a:ext cx="548640" cy="548640"/>
-          </a:xfrm>
-          <a:prstGeom prst="rect">
-            <a:avLst/>
-          </a:prstGeom>
-          <a:noFill/>
-          <a:ln/>
-        </p:spPr>
-        <p:txBody>
-          <a:bodyPr wrap="square" lIns="0" tIns="0" rIns="0" bIns="0" rtlCol="0" anchor="ctr"/>
-          <a:lstStyle/>
-          <a:p>
-            <a:pPr algn="ctr" indent="0" marL="0">
-              <a:buNone/>
-            </a:pPr>
-            <a:r>
-              <a:rPr lang="en-US" sz="1800" b="1" dirty="0">
-                <a:solidFill>
-                  <a:schemeClr val="bg1"/>
-                </a:solidFill>
-              </a:rPr>
-              <a:t>1</a:t>
-            </a:r>
-            <a:endParaRPr lang="en-US" sz="1800" dirty="0"/>
-          </a:p>
-        </p:txBody>
-      </p:sp>
-      <p:sp>
-        <p:nvSpPr>
-          <p:cNvPr id="5" name="Text 3"/>
-          <p:cNvSpPr txBox="1"/>
-          <p:nvPr/>
-        </p:nvSpPr>
-        <p:spPr>
-          <a:xfrm>
-            <a:off x="548640" y="2194560"/>
-            <a:ext cx="2057400" cy="411480"/>
-          </a:xfrm>
-          <a:prstGeom prst="rect">
-            <a:avLst/>
-          </a:prstGeom>
-          <a:noFill/>
-          <a:ln/>
-        </p:spPr>
-        <p:txBody>
-          <a:bodyPr wrap="square" lIns="0" tIns="0" rIns="0" bIns="0" rtlCol="0" anchor="t"/>
-          <a:lstStyle/>
-          <a:p>
-            <a:pPr indent="0" marL="0">
-              <a:buNone/>
-            </a:pPr>
-            <a:r>
-              <a:rPr lang="en-US" sz="1600" b="1" dirty="0">
-                <a:solidFill>
-                  <a:schemeClr val="tx2"/>
-                </a:solidFill>
-              </a:rPr>
-              <a:t>Requirements</a:t>
-            </a:r>
-            <a:endParaRPr lang="en-US" sz="1600" dirty="0"/>
-          </a:p>
-        </p:txBody>
-      </p:sp>
-      <p:sp>
-        <p:nvSpPr>
-          <p:cNvPr id="6" name="Text 4"/>
-          <p:cNvSpPr txBox="1"/>
-          <p:nvPr/>
-        </p:nvSpPr>
-        <p:spPr>
-          <a:xfrm>
-            <a:off x="548640" y="2606040"/>
-            <a:ext cx="2057400" cy="594360"/>
-          </a:xfrm>
-          <a:prstGeom prst="rect">
-            <a:avLst/>
-          </a:prstGeom>
-          <a:noFill/>
-          <a:ln/>
-        </p:spPr>
-        <p:txBody>
-          <a:bodyPr wrap="square" lIns="0" tIns="0" rIns="0" bIns="0" rtlCol="0" anchor="t"/>
-          <a:lstStyle/>
-          <a:p>
-            <a:pPr indent="0" marL="0">
-              <a:buNone/>
-            </a:pPr>
-            <a:r>
-              <a:rPr lang="en-US" sz="1350" dirty="0">
-                <a:solidFill>
-                  <a:schemeClr val="accent5"/>
-                </a:solidFill>
-              </a:rPr>
-              <a:t>entities, events, roles</a:t>
-            </a:r>
-            <a:endParaRPr lang="en-US" sz="1350" dirty="0"/>
-          </a:p>
-        </p:txBody>
-      </p:sp>
-      <p:sp>
-        <p:nvSpPr>
-          <p:cNvPr id="7" name="Step 2 marker"/>
+          <p:cNvPr id="4" name="Control the city from SQL accent"/>
           <p:cNvSpPr/>
           <p:nvPr/>
         </p:nvSpPr>
         <p:spPr>
           <a:xfrm>
-            <a:off x="2807894" y="1508760"/>
-            <a:ext cx="548640" cy="548640"/>
-          </a:xfrm>
-          <a:prstGeom prst="ellipse">
+            <a:off x="548640" y="1463040"/>
+            <a:ext cx="73152" cy="1920240"/>
+          </a:xfrm>
+          <a:prstGeom prst="rect">
             <a:avLst/>
           </a:prstGeom>
           <a:solidFill>
-            <a:srgbClr val="E8792B"/>
+            <a:schemeClr val="accent1"/>
           </a:solidFill>
           <a:ln w="12700">
             <a:solidFill>
-              <a:srgbClr val="E8792B"/>
+              <a:schemeClr val="accent1"/>
             </a:solidFill>
             <a:prstDash val="solid"/>
           </a:ln>
         </p:spPr>
       </p:sp>
-      <p:sp>
-        <p:nvSpPr>
-          <p:cNvPr id="8" name="Text 6"/>
-          <p:cNvSpPr txBox="1"/>
-          <p:nvPr/>
-        </p:nvSpPr>
-        <p:spPr>
-          <a:xfrm>
-            <a:off x="2807894" y="1508760"/>
-            <a:ext cx="548640" cy="548640"/>
-          </a:xfrm>
-          <a:prstGeom prst="rect">
-            <a:avLst/>
-          </a:prstGeom>
-          <a:noFill/>
-          <a:ln/>
-        </p:spPr>
-        <p:txBody>
-          <a:bodyPr wrap="square" lIns="0" tIns="0" rIns="0" bIns="0" rtlCol="0" anchor="ctr"/>
-          <a:lstStyle/>
-          <a:p>
-            <a:pPr algn="ctr" indent="0" marL="0">
-              <a:buNone/>
-            </a:pPr>
-            <a:r>
-              <a:rPr lang="en-US" sz="1800" b="1" dirty="0">
-                <a:solidFill>
-                  <a:schemeClr val="bg1"/>
-                </a:solidFill>
-              </a:rPr>
-              <a:t>2</a:t>
-            </a:r>
-            <a:endParaRPr lang="en-US" sz="1800" dirty="0"/>
-          </a:p>
-        </p:txBody>
-      </p:sp>
-      <p:sp>
-        <p:nvSpPr>
-          <p:cNvPr id="9" name="Text 7"/>
-          <p:cNvSpPr txBox="1"/>
-          <p:nvPr/>
-        </p:nvSpPr>
-        <p:spPr>
-          <a:xfrm>
-            <a:off x="2807894" y="2194560"/>
-            <a:ext cx="2057400" cy="411480"/>
+      <p:pic>
+        <p:nvPicPr>
+          <p:cNvPr id="5" name="Control the city from SQL screenshot" descr="preencoded.png">    </p:cNvPr>
+          <p:cNvPicPr>
+            <a:picLocks noChangeAspect="1"/>
+          </p:cNvPicPr>
+          <p:nvPr/>
+        </p:nvPicPr>
+        <p:blipFill>
+          <a:blip r:embed="rId1"/>
+          <a:stretch>
+            <a:fillRect/>
+          </a:stretch>
+        </p:blipFill>
+        <p:spPr>
+          <a:xfrm>
+            <a:off x="3566160" y="1804135"/>
+            <a:ext cx="2240280" cy="1238049"/>
+          </a:xfrm>
+          <a:prstGeom prst="rect">
+            <a:avLst/>
+          </a:prstGeom>
+          <a:effectLst>
+            <a:outerShdw sx="100000" sy="100000" kx="0" ky="0" algn="bl" rotWithShape="0" blurRad="101600" dist="25400" dir="5400000">
+              <a:srgbClr val="0B1F3A">
+                <a:alpha val="12000"/>
+              </a:srgbClr>
+            </a:outerShdw>
+          </a:effectLst>
+        </p:spPr>
+      </p:pic>
+      <p:sp>
+        <p:nvSpPr>
+          <p:cNvPr id="6" name="Text 3"/>
+          <p:cNvSpPr txBox="1"/>
+          <p:nvPr/>
+        </p:nvSpPr>
+        <p:spPr>
+          <a:xfrm>
+            <a:off x="822960" y="1463040"/>
+            <a:ext cx="2606040" cy="384048"/>
           </a:xfrm>
           <a:prstGeom prst="rect">
             <a:avLst/>
@@ -7037,27 +7196,27 @@
               <a:buNone/>
             </a:pPr>
             <a:r>
-              <a:rPr lang="en-US" sz="1600" b="1" dirty="0">
+              <a:rPr lang="en-US" sz="1700" b="1" dirty="0">
                 <a:solidFill>
                   <a:schemeClr val="tx2"/>
                 </a:solidFill>
               </a:rPr>
-              <a:t>ER model and 3NF</a:t>
-            </a:r>
-            <a:endParaRPr lang="en-US" sz="1600" dirty="0"/>
-          </a:p>
-        </p:txBody>
-      </p:sp>
-      <p:sp>
-        <p:nvSpPr>
-          <p:cNvPr id="10" name="Text 8"/>
-          <p:cNvSpPr txBox="1"/>
-          <p:nvPr/>
-        </p:nvSpPr>
-        <p:spPr>
-          <a:xfrm>
-            <a:off x="2807894" y="2606040"/>
-            <a:ext cx="2057400" cy="594360"/>
+              <a:t>Control the city from SQL</a:t>
+            </a:r>
+            <a:endParaRPr lang="en-US" sz="1700" dirty="0"/>
+          </a:p>
+        </p:txBody>
+      </p:sp>
+      <p:sp>
+        <p:nvSpPr>
+          <p:cNvPr id="7" name="Text 4"/>
+          <p:cNvSpPr txBox="1"/>
+          <p:nvPr/>
+        </p:nvSpPr>
+        <p:spPr>
+          <a:xfrm>
+            <a:off x="822960" y="1901952"/>
+            <a:ext cx="2606040" cy="457200"/>
           </a:xfrm>
           <a:prstGeom prst="rect">
             <a:avLst/>
@@ -7073,37 +7232,78 @@
               <a:buNone/>
             </a:pPr>
             <a:r>
-              <a:rPr lang="en-US" sz="1350" dirty="0">
-                <a:solidFill>
-                  <a:schemeClr val="accent5"/>
-                </a:solidFill>
-              </a:rPr>
-              <a:t>normalised design</a:t>
-            </a:r>
-            <a:endParaRPr lang="en-US" sz="1350" dirty="0"/>
-          </a:p>
-        </p:txBody>
-      </p:sp>
-      <p:sp>
-        <p:nvSpPr>
-          <p:cNvPr id="11" name="Step 3 marker"/>
+              <a:rPr lang="en-US" sz="1000" b="1" dirty="0">
+                <a:solidFill>
+                  <a:schemeClr val="accent2"/>
+                </a:solidFill>
+                <a:latin typeface="Courier New" pitchFamily="34" charset="0"/>
+                <a:ea typeface="Courier New" pitchFamily="34" charset="-122"/>
+                <a:cs typeface="Courier New" pitchFamily="34" charset="-120"/>
+              </a:rPr>
+              <a:t>UPDATE port_berths SET is_open = 'N' …</a:t>
+            </a:r>
+            <a:endParaRPr lang="en-US" sz="1000" dirty="0"/>
+          </a:p>
+        </p:txBody>
+      </p:sp>
+      <p:sp>
+        <p:nvSpPr>
+          <p:cNvPr id="8" name="Text 5"/>
+          <p:cNvSpPr txBox="1"/>
+          <p:nvPr/>
+        </p:nvSpPr>
+        <p:spPr>
+          <a:xfrm>
+            <a:off x="822960" y="2377440"/>
+            <a:ext cx="2606040" cy="1051560"/>
+          </a:xfrm>
+          <a:prstGeom prst="rect">
+            <a:avLst/>
+          </a:prstGeom>
+          <a:noFill/>
+          <a:ln/>
+        </p:spPr>
+        <p:txBody>
+          <a:bodyPr wrap="square" lIns="0" tIns="0" rIns="0" bIns="0" rtlCol="0" anchor="t"/>
+          <a:lstStyle/>
+          <a:p>
+            <a:pPr indent="0" marL="0">
+              <a:buNone/>
+            </a:pPr>
+            <a:r>
+              <a:rPr lang="en-US" sz="1250" dirty="0">
+                <a:solidFill>
+                  <a:schemeClr val="tx1"/>
+                </a:solidFill>
+              </a:rPr>
+              <a:t>Row triggers spot changes made outside the app and queue them; the berth closes in 3D within a second.</a:t>
+            </a:r>
+            <a:endParaRPr lang="en-US" sz="1250" dirty="0"/>
+          </a:p>
+        </p:txBody>
+      </p:sp>
+      <p:sp>
+        <p:nvSpPr>
+          <p:cNvPr id="9" name="Time machine card"/>
           <p:cNvSpPr/>
           <p:nvPr/>
         </p:nvSpPr>
         <p:spPr>
           <a:xfrm>
-            <a:off x="5067148" y="1508760"/>
-            <a:ext cx="548640" cy="548640"/>
-          </a:xfrm>
-          <a:prstGeom prst="ellipse">
-            <a:avLst/>
+            <a:off x="6199632" y="1280160"/>
+            <a:ext cx="5440680" cy="2286000"/>
+          </a:xfrm>
+          <a:prstGeom prst="roundRect">
+            <a:avLst>
+              <a:gd name="adj" fmla="val 4800"/>
+            </a:avLst>
           </a:prstGeom>
           <a:solidFill>
-            <a:srgbClr val="E8792B"/>
+            <a:schemeClr val="bg2"/>
           </a:solidFill>
           <a:ln w="12700">
             <a:solidFill>
-              <a:srgbClr val="E8792B"/>
+              <a:schemeClr val="bg2"/>
             </a:solidFill>
             <a:prstDash val="solid"/>
           </a:ln>
@@ -7111,183 +7311,70 @@
       </p:sp>
       <p:sp>
         <p:nvSpPr>
-          <p:cNvPr id="12" name="Text 10"/>
-          <p:cNvSpPr txBox="1"/>
-          <p:nvPr/>
-        </p:nvSpPr>
-        <p:spPr>
-          <a:xfrm>
-            <a:off x="5067148" y="1508760"/>
-            <a:ext cx="548640" cy="548640"/>
-          </a:xfrm>
-          <a:prstGeom prst="rect">
-            <a:avLst/>
-          </a:prstGeom>
-          <a:noFill/>
-          <a:ln/>
-        </p:spPr>
-        <p:txBody>
-          <a:bodyPr wrap="square" lIns="0" tIns="0" rIns="0" bIns="0" rtlCol="0" anchor="ctr"/>
-          <a:lstStyle/>
-          <a:p>
-            <a:pPr algn="ctr" indent="0" marL="0">
-              <a:buNone/>
-            </a:pPr>
-            <a:r>
-              <a:rPr lang="en-US" sz="1800" b="1" dirty="0">
-                <a:solidFill>
-                  <a:schemeClr val="bg1"/>
-                </a:solidFill>
-              </a:rPr>
-              <a:t>3</a:t>
-            </a:r>
-            <a:endParaRPr lang="en-US" sz="1800" dirty="0"/>
-          </a:p>
-        </p:txBody>
-      </p:sp>
-      <p:sp>
-        <p:nvSpPr>
-          <p:cNvPr id="13" name="Text 11"/>
-          <p:cNvSpPr txBox="1"/>
-          <p:nvPr/>
-        </p:nvSpPr>
-        <p:spPr>
-          <a:xfrm>
-            <a:off x="5067148" y="2194560"/>
-            <a:ext cx="2057400" cy="411480"/>
-          </a:xfrm>
-          <a:prstGeom prst="rect">
-            <a:avLst/>
-          </a:prstGeom>
-          <a:noFill/>
-          <a:ln/>
-        </p:spPr>
-        <p:txBody>
-          <a:bodyPr wrap="square" lIns="0" tIns="0" rIns="0" bIns="0" rtlCol="0" anchor="t"/>
-          <a:lstStyle/>
-          <a:p>
-            <a:pPr indent="0" marL="0">
-              <a:buNone/>
-            </a:pPr>
-            <a:r>
-              <a:rPr lang="en-US" sz="1600" b="1" dirty="0">
-                <a:solidFill>
-                  <a:schemeClr val="tx2"/>
-                </a:solidFill>
-              </a:rPr>
-              <a:t>Schema DDL</a:t>
-            </a:r>
-            <a:endParaRPr lang="en-US" sz="1600" dirty="0"/>
-          </a:p>
-        </p:txBody>
-      </p:sp>
-      <p:sp>
-        <p:nvSpPr>
-          <p:cNvPr id="14" name="Text 12"/>
-          <p:cNvSpPr txBox="1"/>
-          <p:nvPr/>
-        </p:nvSpPr>
-        <p:spPr>
-          <a:xfrm>
-            <a:off x="5067148" y="2606040"/>
-            <a:ext cx="2057400" cy="594360"/>
-          </a:xfrm>
-          <a:prstGeom prst="rect">
-            <a:avLst/>
-          </a:prstGeom>
-          <a:noFill/>
-          <a:ln/>
-        </p:spPr>
-        <p:txBody>
-          <a:bodyPr wrap="square" lIns="0" tIns="0" rIns="0" bIns="0" rtlCol="0" anchor="t"/>
-          <a:lstStyle/>
-          <a:p>
-            <a:pPr indent="0" marL="0">
-              <a:buNone/>
-            </a:pPr>
-            <a:r>
-              <a:rPr lang="en-US" sz="1350" dirty="0">
-                <a:solidFill>
-                  <a:schemeClr val="accent5"/>
-                </a:solidFill>
-              </a:rPr>
-              <a:t>keys, constraints, comments</a:t>
-            </a:r>
-            <a:endParaRPr lang="en-US" sz="1350" dirty="0"/>
-          </a:p>
-        </p:txBody>
-      </p:sp>
-      <p:sp>
-        <p:nvSpPr>
-          <p:cNvPr id="15" name="Step 4 marker"/>
+          <p:cNvPr id="10" name="Time machine accent"/>
           <p:cNvSpPr/>
           <p:nvPr/>
         </p:nvSpPr>
         <p:spPr>
           <a:xfrm>
-            <a:off x="7326401" y="1508760"/>
-            <a:ext cx="548640" cy="548640"/>
-          </a:xfrm>
-          <a:prstGeom prst="ellipse">
+            <a:off x="6199632" y="1463040"/>
+            <a:ext cx="73152" cy="1920240"/>
+          </a:xfrm>
+          <a:prstGeom prst="rect">
             <a:avLst/>
           </a:prstGeom>
           <a:solidFill>
-            <a:srgbClr val="E8792B"/>
+            <a:schemeClr val="accent2"/>
           </a:solidFill>
           <a:ln w="12700">
             <a:solidFill>
-              <a:srgbClr val="E8792B"/>
+              <a:schemeClr val="accent2"/>
             </a:solidFill>
             <a:prstDash val="solid"/>
           </a:ln>
         </p:spPr>
       </p:sp>
-      <p:sp>
-        <p:nvSpPr>
-          <p:cNvPr id="16" name="Text 14"/>
-          <p:cNvSpPr txBox="1"/>
-          <p:nvPr/>
-        </p:nvSpPr>
-        <p:spPr>
-          <a:xfrm>
-            <a:off x="7326401" y="1508760"/>
-            <a:ext cx="548640" cy="548640"/>
-          </a:xfrm>
-          <a:prstGeom prst="rect">
-            <a:avLst/>
-          </a:prstGeom>
-          <a:noFill/>
-          <a:ln/>
-        </p:spPr>
-        <p:txBody>
-          <a:bodyPr wrap="square" lIns="0" tIns="0" rIns="0" bIns="0" rtlCol="0" anchor="ctr"/>
-          <a:lstStyle/>
-          <a:p>
-            <a:pPr algn="ctr" indent="0" marL="0">
-              <a:buNone/>
-            </a:pPr>
-            <a:r>
-              <a:rPr lang="en-US" sz="1800" b="1" dirty="0">
-                <a:solidFill>
-                  <a:schemeClr val="bg1"/>
-                </a:solidFill>
-              </a:rPr>
-              <a:t>4</a:t>
-            </a:r>
-            <a:endParaRPr lang="en-US" sz="1800" dirty="0"/>
-          </a:p>
-        </p:txBody>
-      </p:sp>
-      <p:sp>
-        <p:nvSpPr>
-          <p:cNvPr id="17" name="Text 15"/>
-          <p:cNvSpPr txBox="1"/>
-          <p:nvPr/>
-        </p:nvSpPr>
-        <p:spPr>
-          <a:xfrm>
-            <a:off x="7326401" y="2194560"/>
-            <a:ext cx="2057400" cy="411480"/>
+      <p:pic>
+        <p:nvPicPr>
+          <p:cNvPr id="11" name="Time machine screenshot" descr="preencoded.png">    </p:cNvPr>
+          <p:cNvPicPr>
+            <a:picLocks noChangeAspect="1"/>
+          </p:cNvPicPr>
+          <p:nvPr/>
+        </p:nvPicPr>
+        <p:blipFill>
+          <a:blip r:embed="rId2"/>
+          <a:stretch>
+            <a:fillRect/>
+          </a:stretch>
+        </p:blipFill>
+        <p:spPr>
+          <a:xfrm>
+            <a:off x="9217152" y="1801419"/>
+            <a:ext cx="2240280" cy="1243481"/>
+          </a:xfrm>
+          <a:prstGeom prst="rect">
+            <a:avLst/>
+          </a:prstGeom>
+          <a:effectLst>
+            <a:outerShdw sx="100000" sy="100000" kx="0" ky="0" algn="bl" rotWithShape="0" blurRad="101600" dist="25400" dir="5400000">
+              <a:srgbClr val="0B1F3A">
+                <a:alpha val="12000"/>
+              </a:srgbClr>
+            </a:outerShdw>
+          </a:effectLst>
+        </p:spPr>
+      </p:pic>
+      <p:sp>
+        <p:nvSpPr>
+          <p:cNvPr id="12" name="Text 8"/>
+          <p:cNvSpPr txBox="1"/>
+          <p:nvPr/>
+        </p:nvSpPr>
+        <p:spPr>
+          <a:xfrm>
+            <a:off x="6473952" y="1463040"/>
+            <a:ext cx="2606040" cy="384048"/>
           </a:xfrm>
           <a:prstGeom prst="rect">
             <a:avLst/>
@@ -7303,27 +7390,27 @@
               <a:buNone/>
             </a:pPr>
             <a:r>
-              <a:rPr lang="en-US" sz="1600" b="1" dirty="0">
+              <a:rPr lang="en-US" sz="1700" b="1" dirty="0">
                 <a:solidFill>
                   <a:schemeClr val="tx2"/>
                 </a:solidFill>
               </a:rPr>
-              <a:t>PL/SQL and triggers</a:t>
-            </a:r>
-            <a:endParaRPr lang="en-US" sz="1600" dirty="0"/>
-          </a:p>
-        </p:txBody>
-      </p:sp>
-      <p:sp>
-        <p:nvSpPr>
-          <p:cNvPr id="18" name="Text 16"/>
-          <p:cNvSpPr txBox="1"/>
-          <p:nvPr/>
-        </p:nvSpPr>
-        <p:spPr>
-          <a:xfrm>
-            <a:off x="7326401" y="2606040"/>
-            <a:ext cx="2057400" cy="594360"/>
+              <a:t>Time machine</a:t>
+            </a:r>
+            <a:endParaRPr lang="en-US" sz="1700" dirty="0"/>
+          </a:p>
+        </p:txBody>
+      </p:sp>
+      <p:sp>
+        <p:nvSpPr>
+          <p:cNvPr id="13" name="Text 9"/>
+          <p:cNvSpPr txBox="1"/>
+          <p:nvPr/>
+        </p:nvSpPr>
+        <p:spPr>
+          <a:xfrm>
+            <a:off x="6473952" y="1901952"/>
+            <a:ext cx="2606040" cy="457200"/>
           </a:xfrm>
           <a:prstGeom prst="rect">
             <a:avLst/>
@@ -7339,37 +7426,78 @@
               <a:buNone/>
             </a:pPr>
             <a:r>
-              <a:rPr lang="en-US" sz="1350" dirty="0">
-                <a:solidFill>
-                  <a:schemeClr val="accent5"/>
-                </a:solidFill>
-              </a:rPr>
-              <a:t>rules in the database</a:t>
-            </a:r>
-            <a:endParaRPr lang="en-US" sz="1350" dirty="0"/>
-          </a:p>
-        </p:txBody>
-      </p:sp>
-      <p:sp>
-        <p:nvSpPr>
-          <p:cNvPr id="19" name="Step 5 marker"/>
+              <a:rPr lang="en-US" sz="1000" b="1" dirty="0">
+                <a:solidFill>
+                  <a:schemeClr val="accent2"/>
+                </a:solidFill>
+                <a:latin typeface="Courier New" pitchFamily="34" charset="0"/>
+                <a:ea typeface="Courier New" pitchFamily="34" charset="-122"/>
+                <a:cs typeface="Courier New" pitchFamily="34" charset="-120"/>
+              </a:rPr>
+              <a:t>SELECT … FROM trucks AS OF SCN :scn</a:t>
+            </a:r>
+            <a:endParaRPr lang="en-US" sz="1000" dirty="0"/>
+          </a:p>
+        </p:txBody>
+      </p:sp>
+      <p:sp>
+        <p:nvSpPr>
+          <p:cNvPr id="14" name="Text 10"/>
+          <p:cNvSpPr txBox="1"/>
+          <p:nvPr/>
+        </p:nvSpPr>
+        <p:spPr>
+          <a:xfrm>
+            <a:off x="6473952" y="2377440"/>
+            <a:ext cx="2606040" cy="1051560"/>
+          </a:xfrm>
+          <a:prstGeom prst="rect">
+            <a:avLst/>
+          </a:prstGeom>
+          <a:noFill/>
+          <a:ln/>
+        </p:spPr>
+        <p:txBody>
+          <a:bodyPr wrap="square" lIns="0" tIns="0" rIns="0" bIns="0" rtlCol="0" anchor="t"/>
+          <a:lstStyle/>
+          <a:p>
+            <a:pPr indent="0" marL="0">
+              <a:buNone/>
+            </a:pPr>
+            <a:r>
+              <a:rPr lang="en-US" sz="1250" dirty="0">
+                <a:solidFill>
+                  <a:schemeClr val="tx1"/>
+                </a:solidFill>
+              </a:rPr>
+              <a:t>Oracle Flashback rewinds every ship, truck and pallet up to 10 minutes, with no history tables.</a:t>
+            </a:r>
+            <a:endParaRPr lang="en-US" sz="1250" dirty="0"/>
+          </a:p>
+        </p:txBody>
+      </p:sp>
+      <p:sp>
+        <p:nvSpPr>
+          <p:cNvPr id="15" name="Row-level security card"/>
           <p:cNvSpPr/>
           <p:nvPr/>
         </p:nvSpPr>
         <p:spPr>
           <a:xfrm>
-            <a:off x="9585655" y="1508760"/>
-            <a:ext cx="548640" cy="548640"/>
-          </a:xfrm>
-          <a:prstGeom prst="ellipse">
-            <a:avLst/>
+            <a:off x="548640" y="3749040"/>
+            <a:ext cx="5440680" cy="2286000"/>
+          </a:xfrm>
+          <a:prstGeom prst="roundRect">
+            <a:avLst>
+              <a:gd name="adj" fmla="val 4800"/>
+            </a:avLst>
           </a:prstGeom>
           <a:solidFill>
-            <a:srgbClr val="E8792B"/>
+            <a:schemeClr val="bg2"/>
           </a:solidFill>
           <a:ln w="12700">
             <a:solidFill>
-              <a:srgbClr val="E8792B"/>
+              <a:schemeClr val="bg2"/>
             </a:solidFill>
             <a:prstDash val="solid"/>
           </a:ln>
@@ -7377,183 +7505,70 @@
       </p:sp>
       <p:sp>
         <p:nvSpPr>
-          <p:cNvPr id="20" name="Text 18"/>
-          <p:cNvSpPr txBox="1"/>
-          <p:nvPr/>
-        </p:nvSpPr>
-        <p:spPr>
-          <a:xfrm>
-            <a:off x="9585655" y="1508760"/>
-            <a:ext cx="548640" cy="548640"/>
-          </a:xfrm>
-          <a:prstGeom prst="rect">
-            <a:avLst/>
-          </a:prstGeom>
-          <a:noFill/>
-          <a:ln/>
-        </p:spPr>
-        <p:txBody>
-          <a:bodyPr wrap="square" lIns="0" tIns="0" rIns="0" bIns="0" rtlCol="0" anchor="ctr"/>
-          <a:lstStyle/>
-          <a:p>
-            <a:pPr algn="ctr" indent="0" marL="0">
-              <a:buNone/>
-            </a:pPr>
-            <a:r>
-              <a:rPr lang="en-US" sz="1800" b="1" dirty="0">
-                <a:solidFill>
-                  <a:schemeClr val="bg1"/>
-                </a:solidFill>
-              </a:rPr>
-              <a:t>5</a:t>
-            </a:r>
-            <a:endParaRPr lang="en-US" sz="1800" dirty="0"/>
-          </a:p>
-        </p:txBody>
-      </p:sp>
-      <p:sp>
-        <p:nvSpPr>
-          <p:cNvPr id="21" name="Text 19"/>
-          <p:cNvSpPr txBox="1"/>
-          <p:nvPr/>
-        </p:nvSpPr>
-        <p:spPr>
-          <a:xfrm>
-            <a:off x="9585655" y="2194560"/>
-            <a:ext cx="2057400" cy="411480"/>
-          </a:xfrm>
-          <a:prstGeom prst="rect">
-            <a:avLst/>
-          </a:prstGeom>
-          <a:noFill/>
-          <a:ln/>
-        </p:spPr>
-        <p:txBody>
-          <a:bodyPr wrap="square" lIns="0" tIns="0" rIns="0" bIns="0" rtlCol="0" anchor="t"/>
-          <a:lstStyle/>
-          <a:p>
-            <a:pPr indent="0" marL="0">
-              <a:buNone/>
-            </a:pPr>
-            <a:r>
-              <a:rPr lang="en-US" sz="1600" b="1" dirty="0">
-                <a:solidFill>
-                  <a:schemeClr val="tx2"/>
-                </a:solidFill>
-              </a:rPr>
-              <a:t>Views and reports</a:t>
-            </a:r>
-            <a:endParaRPr lang="en-US" sz="1600" dirty="0"/>
-          </a:p>
-        </p:txBody>
-      </p:sp>
-      <p:sp>
-        <p:nvSpPr>
-          <p:cNvPr id="22" name="Text 20"/>
-          <p:cNvSpPr txBox="1"/>
-          <p:nvPr/>
-        </p:nvSpPr>
-        <p:spPr>
-          <a:xfrm>
-            <a:off x="9585655" y="2606040"/>
-            <a:ext cx="2057400" cy="594360"/>
-          </a:xfrm>
-          <a:prstGeom prst="rect">
-            <a:avLst/>
-          </a:prstGeom>
-          <a:noFill/>
-          <a:ln/>
-        </p:spPr>
-        <p:txBody>
-          <a:bodyPr wrap="square" lIns="0" tIns="0" rIns="0" bIns="0" rtlCol="0" anchor="t"/>
-          <a:lstStyle/>
-          <a:p>
-            <a:pPr indent="0" marL="0">
-              <a:buNone/>
-            </a:pPr>
-            <a:r>
-              <a:rPr lang="en-US" sz="1350" dirty="0">
-                <a:solidFill>
-                  <a:schemeClr val="accent5"/>
-                </a:solidFill>
-              </a:rPr>
-              <a:t>17 views, 26 queries</a:t>
-            </a:r>
-            <a:endParaRPr lang="en-US" sz="1350" dirty="0"/>
-          </a:p>
-        </p:txBody>
-      </p:sp>
-      <p:sp>
-        <p:nvSpPr>
-          <p:cNvPr id="23" name="Step 6 marker"/>
+          <p:cNvPr id="16" name="Row-level security accent"/>
           <p:cNvSpPr/>
           <p:nvPr/>
         </p:nvSpPr>
         <p:spPr>
           <a:xfrm>
-            <a:off x="1678267" y="3703320"/>
-            <a:ext cx="548640" cy="548640"/>
-          </a:xfrm>
-          <a:prstGeom prst="ellipse">
+            <a:off x="548640" y="3931920"/>
+            <a:ext cx="73152" cy="1920240"/>
+          </a:xfrm>
+          <a:prstGeom prst="rect">
             <a:avLst/>
           </a:prstGeom>
           <a:solidFill>
-            <a:srgbClr val="E8792B"/>
+            <a:schemeClr val="accent3"/>
           </a:solidFill>
           <a:ln w="12700">
             <a:solidFill>
-              <a:srgbClr val="E8792B"/>
+              <a:schemeClr val="accent3"/>
             </a:solidFill>
             <a:prstDash val="solid"/>
           </a:ln>
         </p:spPr>
       </p:sp>
-      <p:sp>
-        <p:nvSpPr>
-          <p:cNvPr id="24" name="Text 22"/>
-          <p:cNvSpPr txBox="1"/>
-          <p:nvPr/>
-        </p:nvSpPr>
-        <p:spPr>
-          <a:xfrm>
-            <a:off x="1678267" y="3703320"/>
-            <a:ext cx="548640" cy="548640"/>
-          </a:xfrm>
-          <a:prstGeom prst="rect">
-            <a:avLst/>
-          </a:prstGeom>
-          <a:noFill/>
-          <a:ln/>
-        </p:spPr>
-        <p:txBody>
-          <a:bodyPr wrap="square" lIns="0" tIns="0" rIns="0" bIns="0" rtlCol="0" anchor="ctr"/>
-          <a:lstStyle/>
-          <a:p>
-            <a:pPr algn="ctr" indent="0" marL="0">
-              <a:buNone/>
-            </a:pPr>
-            <a:r>
-              <a:rPr lang="en-US" sz="1800" b="1" dirty="0">
-                <a:solidFill>
-                  <a:schemeClr val="bg1"/>
-                </a:solidFill>
-              </a:rPr>
-              <a:t>6</a:t>
-            </a:r>
-            <a:endParaRPr lang="en-US" sz="1800" dirty="0"/>
-          </a:p>
-        </p:txBody>
-      </p:sp>
-      <p:sp>
-        <p:nvSpPr>
-          <p:cNvPr id="25" name="Text 23"/>
-          <p:cNvSpPr txBox="1"/>
-          <p:nvPr/>
-        </p:nvSpPr>
-        <p:spPr>
-          <a:xfrm>
-            <a:off x="1678267" y="4389120"/>
-            <a:ext cx="2057400" cy="411480"/>
+      <p:pic>
+        <p:nvPicPr>
+          <p:cNvPr id="17" name="Row-level security screenshot" descr="preencoded.png">    </p:cNvPr>
+          <p:cNvPicPr>
+            <a:picLocks noChangeAspect="1"/>
+          </p:cNvPicPr>
+          <p:nvPr/>
+        </p:nvPicPr>
+        <p:blipFill>
+          <a:blip r:embed="rId3"/>
+          <a:stretch>
+            <a:fillRect/>
+          </a:stretch>
+        </p:blipFill>
+        <p:spPr>
+          <a:xfrm>
+            <a:off x="3566160" y="4270736"/>
+            <a:ext cx="2240280" cy="1242609"/>
+          </a:xfrm>
+          <a:prstGeom prst="rect">
+            <a:avLst/>
+          </a:prstGeom>
+          <a:effectLst>
+            <a:outerShdw sx="100000" sy="100000" kx="0" ky="0" algn="bl" rotWithShape="0" blurRad="101600" dist="25400" dir="5400000">
+              <a:srgbClr val="0B1F3A">
+                <a:alpha val="12000"/>
+              </a:srgbClr>
+            </a:outerShdw>
+          </a:effectLst>
+        </p:spPr>
+      </p:pic>
+      <p:sp>
+        <p:nvSpPr>
+          <p:cNvPr id="18" name="Text 13"/>
+          <p:cNvSpPr txBox="1"/>
+          <p:nvPr/>
+        </p:nvSpPr>
+        <p:spPr>
+          <a:xfrm>
+            <a:off x="822960" y="3931920"/>
+            <a:ext cx="2606040" cy="384048"/>
           </a:xfrm>
           <a:prstGeom prst="rect">
             <a:avLst/>
@@ -7569,27 +7584,27 @@
               <a:buNone/>
             </a:pPr>
             <a:r>
-              <a:rPr lang="en-US" sz="1600" b="1" dirty="0">
+              <a:rPr lang="en-US" sz="1700" b="1" dirty="0">
                 <a:solidFill>
                   <a:schemeClr val="tx2"/>
                 </a:solidFill>
               </a:rPr>
-              <a:t>Seed data</a:t>
-            </a:r>
-            <a:endParaRPr lang="en-US" sz="1600" dirty="0"/>
-          </a:p>
-        </p:txBody>
-      </p:sp>
-      <p:sp>
-        <p:nvSpPr>
-          <p:cNvPr id="26" name="Text 24"/>
-          <p:cNvSpPr txBox="1"/>
-          <p:nvPr/>
-        </p:nvSpPr>
-        <p:spPr>
-          <a:xfrm>
-            <a:off x="1678267" y="4800600"/>
-            <a:ext cx="2057400" cy="594360"/>
+              <a:t>Row-level security</a:t>
+            </a:r>
+            <a:endParaRPr lang="en-US" sz="1700" dirty="0"/>
+          </a:p>
+        </p:txBody>
+      </p:sp>
+      <p:sp>
+        <p:nvSpPr>
+          <p:cNvPr id="19" name="Text 14"/>
+          <p:cNvSpPr txBox="1"/>
+          <p:nvPr/>
+        </p:nvSpPr>
+        <p:spPr>
+          <a:xfrm>
+            <a:off x="822960" y="4370832"/>
+            <a:ext cx="2606040" cy="457200"/>
           </a:xfrm>
           <a:prstGeom prst="rect">
             <a:avLst/>
@@ -7605,37 +7620,78 @@
               <a:buNone/>
             </a:pPr>
             <a:r>
-              <a:rPr lang="en-US" sz="1350" dirty="0">
-                <a:solidFill>
-                  <a:schemeClr val="accent5"/>
-                </a:solidFill>
-              </a:rPr>
-              <a:t>realistic starting data</a:t>
-            </a:r>
-            <a:endParaRPr lang="en-US" sz="1350" dirty="0"/>
-          </a:p>
-        </p:txBody>
-      </p:sp>
-      <p:sp>
-        <p:nvSpPr>
-          <p:cNvPr id="27" name="Step 7 marker"/>
+              <a:rPr lang="en-US" sz="1000" b="1" dirty="0">
+                <a:solidFill>
+                  <a:schemeClr val="accent2"/>
+                </a:solidFill>
+                <a:latin typeface="Courier New" pitchFamily="34" charset="0"/>
+                <a:ea typeface="Courier New" pitchFamily="34" charset="-122"/>
+                <a:cs typeface="Courier New" pitchFamily="34" charset="-120"/>
+              </a:rPr>
+              <a:t>WHERE facility_id IN ('WH-04')</a:t>
+            </a:r>
+            <a:endParaRPr lang="en-US" sz="1000" dirty="0"/>
+          </a:p>
+        </p:txBody>
+      </p:sp>
+      <p:sp>
+        <p:nvSpPr>
+          <p:cNvPr id="20" name="Text 15"/>
+          <p:cNvSpPr txBox="1"/>
+          <p:nvPr/>
+        </p:nvSpPr>
+        <p:spPr>
+          <a:xfrm>
+            <a:off x="822960" y="4846320"/>
+            <a:ext cx="2606040" cy="1051560"/>
+          </a:xfrm>
+          <a:prstGeom prst="rect">
+            <a:avLst/>
+          </a:prstGeom>
+          <a:noFill/>
+          <a:ln/>
+        </p:spPr>
+        <p:txBody>
+          <a:bodyPr wrap="square" lIns="0" tIns="0" rIns="0" bIns="0" rtlCol="0" anchor="t"/>
+          <a:lstStyle/>
+          <a:p>
+            <a:pPr indent="0" marL="0">
+              <a:buNone/>
+            </a:pPr>
+            <a:r>
+              <a:rPr lang="en-US" sz="1250" dirty="0">
+                <a:solidFill>
+                  <a:schemeClr val="tx1"/>
+                </a:solidFill>
+              </a:rPr>
+              <a:t>A Virtual Private Database policy: each SQL Developer account sees only its own sites.</a:t>
+            </a:r>
+            <a:endParaRPr lang="en-US" sz="1250" dirty="0"/>
+          </a:p>
+        </p:txBody>
+      </p:sp>
+      <p:sp>
+        <p:nvSpPr>
+          <p:cNvPr id="21" name="Concurrency lab card"/>
           <p:cNvSpPr/>
           <p:nvPr/>
         </p:nvSpPr>
         <p:spPr>
           <a:xfrm>
-            <a:off x="3937521" y="3703320"/>
-            <a:ext cx="548640" cy="548640"/>
-          </a:xfrm>
-          <a:prstGeom prst="ellipse">
-            <a:avLst/>
+            <a:off x="6199632" y="3749040"/>
+            <a:ext cx="5440680" cy="2286000"/>
+          </a:xfrm>
+          <a:prstGeom prst="roundRect">
+            <a:avLst>
+              <a:gd name="adj" fmla="val 4800"/>
+            </a:avLst>
           </a:prstGeom>
           <a:solidFill>
-            <a:srgbClr val="E8792B"/>
+            <a:schemeClr val="bg2"/>
           </a:solidFill>
           <a:ln w="12700">
             <a:solidFill>
-              <a:srgbClr val="E8792B"/>
+              <a:schemeClr val="bg2"/>
             </a:solidFill>
             <a:prstDash val="solid"/>
           </a:ln>
@@ -7643,183 +7699,70 @@
       </p:sp>
       <p:sp>
         <p:nvSpPr>
-          <p:cNvPr id="28" name="Text 26"/>
-          <p:cNvSpPr txBox="1"/>
-          <p:nvPr/>
-        </p:nvSpPr>
-        <p:spPr>
-          <a:xfrm>
-            <a:off x="3937521" y="3703320"/>
-            <a:ext cx="548640" cy="548640"/>
-          </a:xfrm>
-          <a:prstGeom prst="rect">
-            <a:avLst/>
-          </a:prstGeom>
-          <a:noFill/>
-          <a:ln/>
-        </p:spPr>
-        <p:txBody>
-          <a:bodyPr wrap="square" lIns="0" tIns="0" rIns="0" bIns="0" rtlCol="0" anchor="ctr"/>
-          <a:lstStyle/>
-          <a:p>
-            <a:pPr algn="ctr" indent="0" marL="0">
-              <a:buNone/>
-            </a:pPr>
-            <a:r>
-              <a:rPr lang="en-US" sz="1800" b="1" dirty="0">
-                <a:solidFill>
-                  <a:schemeClr val="bg1"/>
-                </a:solidFill>
-              </a:rPr>
-              <a:t>7</a:t>
-            </a:r>
-            <a:endParaRPr lang="en-US" sz="1800" dirty="0"/>
-          </a:p>
-        </p:txBody>
-      </p:sp>
-      <p:sp>
-        <p:nvSpPr>
-          <p:cNvPr id="29" name="Text 27"/>
-          <p:cNvSpPr txBox="1"/>
-          <p:nvPr/>
-        </p:nvSpPr>
-        <p:spPr>
-          <a:xfrm>
-            <a:off x="3937521" y="4389120"/>
-            <a:ext cx="2057400" cy="411480"/>
-          </a:xfrm>
-          <a:prstGeom prst="rect">
-            <a:avLst/>
-          </a:prstGeom>
-          <a:noFill/>
-          <a:ln/>
-        </p:spPr>
-        <p:txBody>
-          <a:bodyPr wrap="square" lIns="0" tIns="0" rIns="0" bIns="0" rtlCol="0" anchor="t"/>
-          <a:lstStyle/>
-          <a:p>
-            <a:pPr indent="0" marL="0">
-              <a:buNone/>
-            </a:pPr>
-            <a:r>
-              <a:rPr lang="en-US" sz="1600" b="1" dirty="0">
-                <a:solidFill>
-                  <a:schemeClr val="tx2"/>
-                </a:solidFill>
-              </a:rPr>
-              <a:t>Server and 3D interface</a:t>
-            </a:r>
-            <a:endParaRPr lang="en-US" sz="1600" dirty="0"/>
-          </a:p>
-        </p:txBody>
-      </p:sp>
-      <p:sp>
-        <p:nvSpPr>
-          <p:cNvPr id="30" name="Text 28"/>
-          <p:cNvSpPr txBox="1"/>
-          <p:nvPr/>
-        </p:nvSpPr>
-        <p:spPr>
-          <a:xfrm>
-            <a:off x="3937521" y="4800600"/>
-            <a:ext cx="2057400" cy="594360"/>
-          </a:xfrm>
-          <a:prstGeom prst="rect">
-            <a:avLst/>
-          </a:prstGeom>
-          <a:noFill/>
-          <a:ln/>
-        </p:spPr>
-        <p:txBody>
-          <a:bodyPr wrap="square" lIns="0" tIns="0" rIns="0" bIns="0" rtlCol="0" anchor="t"/>
-          <a:lstStyle/>
-          <a:p>
-            <a:pPr indent="0" marL="0">
-              <a:buNone/>
-            </a:pPr>
-            <a:r>
-              <a:rPr lang="en-US" sz="1350" dirty="0">
-                <a:solidFill>
-                  <a:schemeClr val="accent5"/>
-                </a:solidFill>
-              </a:rPr>
-              <a:t>Node.js, React, Three.js</a:t>
-            </a:r>
-            <a:endParaRPr lang="en-US" sz="1350" dirty="0"/>
-          </a:p>
-        </p:txBody>
-      </p:sp>
-      <p:sp>
-        <p:nvSpPr>
-          <p:cNvPr id="31" name="Step 8 marker"/>
+          <p:cNvPr id="22" name="Concurrency lab accent"/>
           <p:cNvSpPr/>
           <p:nvPr/>
         </p:nvSpPr>
         <p:spPr>
           <a:xfrm>
-            <a:off x="6196775" y="3703320"/>
-            <a:ext cx="548640" cy="548640"/>
-          </a:xfrm>
-          <a:prstGeom prst="ellipse">
+            <a:off x="6199632" y="3931920"/>
+            <a:ext cx="73152" cy="1920240"/>
+          </a:xfrm>
+          <a:prstGeom prst="rect">
             <a:avLst/>
           </a:prstGeom>
           <a:solidFill>
-            <a:srgbClr val="E8792B"/>
+            <a:schemeClr val="accent4"/>
           </a:solidFill>
           <a:ln w="12700">
             <a:solidFill>
-              <a:srgbClr val="E8792B"/>
+              <a:schemeClr val="accent4"/>
             </a:solidFill>
             <a:prstDash val="solid"/>
           </a:ln>
         </p:spPr>
       </p:sp>
-      <p:sp>
-        <p:nvSpPr>
-          <p:cNvPr id="32" name="Text 30"/>
-          <p:cNvSpPr txBox="1"/>
-          <p:nvPr/>
-        </p:nvSpPr>
-        <p:spPr>
-          <a:xfrm>
-            <a:off x="6196775" y="3703320"/>
-            <a:ext cx="548640" cy="548640"/>
-          </a:xfrm>
-          <a:prstGeom prst="rect">
-            <a:avLst/>
-          </a:prstGeom>
-          <a:noFill/>
-          <a:ln/>
-        </p:spPr>
-        <p:txBody>
-          <a:bodyPr wrap="square" lIns="0" tIns="0" rIns="0" bIns="0" rtlCol="0" anchor="ctr"/>
-          <a:lstStyle/>
-          <a:p>
-            <a:pPr algn="ctr" indent="0" marL="0">
-              <a:buNone/>
-            </a:pPr>
-            <a:r>
-              <a:rPr lang="en-US" sz="1800" b="1" dirty="0">
-                <a:solidFill>
-                  <a:schemeClr val="bg1"/>
-                </a:solidFill>
-              </a:rPr>
-              <a:t>8</a:t>
-            </a:r>
-            <a:endParaRPr lang="en-US" sz="1800" dirty="0"/>
-          </a:p>
-        </p:txBody>
-      </p:sp>
-      <p:sp>
-        <p:nvSpPr>
-          <p:cNvPr id="33" name="Text 31"/>
-          <p:cNvSpPr txBox="1"/>
-          <p:nvPr/>
-        </p:nvSpPr>
-        <p:spPr>
-          <a:xfrm>
-            <a:off x="6196775" y="4389120"/>
-            <a:ext cx="2057400" cy="411480"/>
+      <p:pic>
+        <p:nvPicPr>
+          <p:cNvPr id="23" name="Concurrency lab screenshot" descr="preencoded.png">    </p:cNvPr>
+          <p:cNvPicPr>
+            <a:picLocks noChangeAspect="1"/>
+          </p:cNvPicPr>
+          <p:nvPr/>
+        </p:nvPicPr>
+        <p:blipFill>
+          <a:blip r:embed="rId4"/>
+          <a:stretch>
+            <a:fillRect/>
+          </a:stretch>
+        </p:blipFill>
+        <p:spPr>
+          <a:xfrm>
+            <a:off x="9217152" y="4270736"/>
+            <a:ext cx="2240280" cy="1242609"/>
+          </a:xfrm>
+          <a:prstGeom prst="rect">
+            <a:avLst/>
+          </a:prstGeom>
+          <a:effectLst>
+            <a:outerShdw sx="100000" sy="100000" kx="0" ky="0" algn="bl" rotWithShape="0" blurRad="101600" dist="25400" dir="5400000">
+              <a:srgbClr val="0B1F3A">
+                <a:alpha val="12000"/>
+              </a:srgbClr>
+            </a:outerShdw>
+          </a:effectLst>
+        </p:spPr>
+      </p:pic>
+      <p:sp>
+        <p:nvSpPr>
+          <p:cNvPr id="24" name="Text 18"/>
+          <p:cNvSpPr txBox="1"/>
+          <p:nvPr/>
+        </p:nvSpPr>
+        <p:spPr>
+          <a:xfrm>
+            <a:off x="6473952" y="3931920"/>
+            <a:ext cx="2606040" cy="384048"/>
           </a:xfrm>
           <a:prstGeom prst="rect">
             <a:avLst/>
@@ -7835,27 +7778,27 @@
               <a:buNone/>
             </a:pPr>
             <a:r>
-              <a:rPr lang="en-US" sz="1600" b="1" dirty="0">
+              <a:rPr lang="en-US" sz="1700" b="1" dirty="0">
                 <a:solidFill>
                   <a:schemeClr val="tx2"/>
                 </a:solidFill>
               </a:rPr>
-              <a:t>Simulation</a:t>
-            </a:r>
-            <a:endParaRPr lang="en-US" sz="1600" dirty="0"/>
-          </a:p>
-        </p:txBody>
-      </p:sp>
-      <p:sp>
-        <p:nvSpPr>
-          <p:cNvPr id="34" name="Text 32"/>
-          <p:cNvSpPr txBox="1"/>
-          <p:nvPr/>
-        </p:nvSpPr>
-        <p:spPr>
-          <a:xfrm>
-            <a:off x="6196775" y="4800600"/>
-            <a:ext cx="2057400" cy="594360"/>
+              <a:t>Concurrency lab</a:t>
+            </a:r>
+            <a:endParaRPr lang="en-US" sz="1700" dirty="0"/>
+          </a:p>
+        </p:txBody>
+      </p:sp>
+      <p:sp>
+        <p:nvSpPr>
+          <p:cNvPr id="25" name="Text 19"/>
+          <p:cNvSpPr txBox="1"/>
+          <p:nvPr/>
+        </p:nvSpPr>
+        <p:spPr>
+          <a:xfrm>
+            <a:off x="6473952" y="4370832"/>
+            <a:ext cx="2606040" cy="457200"/>
           </a:xfrm>
           <a:prstGeom prst="rect">
             <a:avLst/>
@@ -7871,258 +7814,53 @@
               <a:buNone/>
             </a:pPr>
             <a:r>
-              <a:rPr lang="en-US" sz="1350" dirty="0">
-                <a:solidFill>
-                  <a:schemeClr val="accent5"/>
-                </a:solidFill>
-              </a:rPr>
-              <a:t>saves to Oracle every 2 s</a:t>
-            </a:r>
-            <a:endParaRPr lang="en-US" sz="1350" dirty="0"/>
-          </a:p>
-        </p:txBody>
-      </p:sp>
-      <p:sp>
-        <p:nvSpPr>
-          <p:cNvPr id="35" name="Step 9 marker"/>
-          <p:cNvSpPr/>
-          <p:nvPr/>
-        </p:nvSpPr>
-        <p:spPr>
-          <a:xfrm>
-            <a:off x="8456028" y="3703320"/>
-            <a:ext cx="548640" cy="548640"/>
-          </a:xfrm>
-          <a:prstGeom prst="ellipse">
-            <a:avLst/>
-          </a:prstGeom>
-          <a:solidFill>
-            <a:srgbClr val="0E7C7B"/>
-          </a:solidFill>
-          <a:ln w="12700">
-            <a:solidFill>
-              <a:srgbClr val="0E7C7B"/>
-            </a:solidFill>
-            <a:prstDash val="solid"/>
-          </a:ln>
-        </p:spPr>
-      </p:sp>
-      <p:sp>
-        <p:nvSpPr>
-          <p:cNvPr id="36" name="Text 34"/>
-          <p:cNvSpPr txBox="1"/>
-          <p:nvPr/>
-        </p:nvSpPr>
-        <p:spPr>
-          <a:xfrm>
-            <a:off x="8456028" y="3703320"/>
-            <a:ext cx="548640" cy="548640"/>
-          </a:xfrm>
-          <a:prstGeom prst="rect">
-            <a:avLst/>
-          </a:prstGeom>
-          <a:noFill/>
-          <a:ln/>
-        </p:spPr>
-        <p:txBody>
-          <a:bodyPr wrap="square" lIns="0" tIns="0" rIns="0" bIns="0" rtlCol="0" anchor="ctr"/>
-          <a:lstStyle/>
-          <a:p>
-            <a:pPr algn="ctr" indent="0" marL="0">
-              <a:buNone/>
-            </a:pPr>
-            <a:r>
-              <a:rPr lang="en-US" sz="1800" b="1" dirty="0">
-                <a:solidFill>
-                  <a:schemeClr val="bg1"/>
-                </a:solidFill>
-              </a:rPr>
-              <a:t>9</a:t>
-            </a:r>
-            <a:endParaRPr lang="en-US" sz="1800" dirty="0"/>
-          </a:p>
-        </p:txBody>
-      </p:sp>
-      <p:sp>
-        <p:nvSpPr>
-          <p:cNvPr id="37" name="Text 35"/>
-          <p:cNvSpPr txBox="1"/>
-          <p:nvPr/>
-        </p:nvSpPr>
-        <p:spPr>
-          <a:xfrm>
-            <a:off x="8456028" y="4389120"/>
-            <a:ext cx="2057400" cy="411480"/>
-          </a:xfrm>
-          <a:prstGeom prst="rect">
-            <a:avLst/>
-          </a:prstGeom>
-          <a:noFill/>
-          <a:ln/>
-        </p:spPr>
-        <p:txBody>
-          <a:bodyPr wrap="square" lIns="0" tIns="0" rIns="0" bIns="0" rtlCol="0" anchor="t"/>
-          <a:lstStyle/>
-          <a:p>
-            <a:pPr indent="0" marL="0">
-              <a:buNone/>
-            </a:pPr>
-            <a:r>
-              <a:rPr lang="en-US" sz="1600" b="1" dirty="0">
-                <a:solidFill>
-                  <a:schemeClr val="tx2"/>
-                </a:solidFill>
-              </a:rPr>
-              <a:t>Testing</a:t>
-            </a:r>
-            <a:endParaRPr lang="en-US" sz="1600" dirty="0"/>
-          </a:p>
-        </p:txBody>
-      </p:sp>
-      <p:sp>
-        <p:nvSpPr>
-          <p:cNvPr id="38" name="Text 36"/>
-          <p:cNvSpPr txBox="1"/>
-          <p:nvPr/>
-        </p:nvSpPr>
-        <p:spPr>
-          <a:xfrm>
-            <a:off x="8456028" y="4800600"/>
-            <a:ext cx="2057400" cy="594360"/>
-          </a:xfrm>
-          <a:prstGeom prst="rect">
-            <a:avLst/>
-          </a:prstGeom>
-          <a:noFill/>
-          <a:ln/>
-        </p:spPr>
-        <p:txBody>
-          <a:bodyPr wrap="square" lIns="0" tIns="0" rIns="0" bIns="0" rtlCol="0" anchor="t"/>
-          <a:lstStyle/>
-          <a:p>
-            <a:pPr indent="0" marL="0">
-              <a:buNone/>
-            </a:pPr>
-            <a:r>
-              <a:rPr lang="en-US" sz="1350" dirty="0">
-                <a:solidFill>
-                  <a:schemeClr val="accent5"/>
-                </a:solidFill>
-              </a:rPr>
-              <a:t>SQL checks, type checks, screenshots</a:t>
-            </a:r>
-            <a:endParaRPr lang="en-US" sz="1350" dirty="0"/>
-          </a:p>
-        </p:txBody>
-      </p:sp>
-      <p:sp>
-        <p:nvSpPr>
-          <p:cNvPr id="39" name="Text 37"/>
-          <p:cNvSpPr txBox="1"/>
-          <p:nvPr/>
-        </p:nvSpPr>
-        <p:spPr>
-          <a:xfrm>
-            <a:off x="548640" y="5760720"/>
-            <a:ext cx="11094415" cy="411480"/>
-          </a:xfrm>
-          <a:prstGeom prst="rect">
-            <a:avLst/>
-          </a:prstGeom>
-          <a:noFill/>
-          <a:ln/>
-        </p:spPr>
-        <p:txBody>
-          <a:bodyPr wrap="square" lIns="0" tIns="0" rIns="0" bIns="0" rtlCol="0" anchor="t"/>
-          <a:lstStyle/>
-          <a:p>
-            <a:pPr indent="0" marL="0">
-              <a:buNone/>
-            </a:pPr>
-            <a:r>
-              <a:rPr lang="en-US" sz="1500" b="1" dirty="0">
-                <a:solidFill>
-                  <a:schemeClr val="tx2"/>
-                </a:solidFill>
-              </a:rPr>
-              <a:t>Setup is scripted: </a:t>
-            </a:r>
-            <a:pPr indent="0" marL="0">
-              <a:buNone/>
-            </a:pPr>
-            <a:r>
-              <a:rPr lang="en-US" sz="1500" dirty="0">
-                <a:solidFill>
-                  <a:schemeClr val="tx1"/>
+              <a:rPr lang="en-US" sz="1000" b="1" dirty="0">
+                <a:solidFill>
+                  <a:schemeClr val="accent2"/>
                 </a:solidFill>
                 <a:latin typeface="Courier New" pitchFamily="34" charset="0"/>
                 <a:ea typeface="Courier New" pitchFamily="34" charset="-122"/>
                 <a:cs typeface="Courier New" pitchFamily="34" charset="-120"/>
               </a:rPr>
-              <a:t>npm run db:up</a:t>
-            </a:r>
-            <a:pPr indent="0" marL="0">
-              <a:buNone/>
-            </a:pPr>
-            <a:r>
-              <a:rPr lang="en-US" sz="1500" dirty="0">
+              <a:t>ORA-00060: deadlock detected</a:t>
+            </a:r>
+            <a:endParaRPr lang="en-US" sz="1000" dirty="0"/>
+          </a:p>
+        </p:txBody>
+      </p:sp>
+      <p:sp>
+        <p:nvSpPr>
+          <p:cNvPr id="26" name="Text 20"/>
+          <p:cNvSpPr txBox="1"/>
+          <p:nvPr/>
+        </p:nvSpPr>
+        <p:spPr>
+          <a:xfrm>
+            <a:off x="6473952" y="4846320"/>
+            <a:ext cx="2606040" cy="1051560"/>
+          </a:xfrm>
+          <a:prstGeom prst="rect">
+            <a:avLst/>
+          </a:prstGeom>
+          <a:noFill/>
+          <a:ln/>
+        </p:spPr>
+        <p:txBody>
+          <a:bodyPr wrap="square" lIns="0" tIns="0" rIns="0" bIns="0" rtlCol="0" anchor="t"/>
+          <a:lstStyle/>
+          <a:p>
+            <a:pPr indent="0" marL="0">
+              <a:buNone/>
+            </a:pPr>
+            <a:r>
+              <a:rPr lang="en-US" sz="1250" dirty="0">
                 <a:solidFill>
                   <a:schemeClr val="tx1"/>
                 </a:solidFill>
               </a:rPr>
-              <a:t> starts Oracle, </a:t>
-            </a:r>
-            <a:pPr indent="0" marL="0">
-              <a:buNone/>
-            </a:pPr>
-            <a:r>
-              <a:rPr lang="en-US" sz="1500" dirty="0">
-                <a:solidFill>
-                  <a:schemeClr val="tx1"/>
-                </a:solidFill>
-                <a:latin typeface="Courier New" pitchFamily="34" charset="0"/>
-                <a:ea typeface="Courier New" pitchFamily="34" charset="-122"/>
-                <a:cs typeface="Courier New" pitchFamily="34" charset="-120"/>
-              </a:rPr>
-              <a:t>npm run db:reset</a:t>
-            </a:r>
-            <a:pPr indent="0" marL="0">
-              <a:buNone/>
-            </a:pPr>
-            <a:r>
-              <a:rPr lang="en-US" sz="1500" dirty="0">
-                <a:solidFill>
-                  <a:schemeClr val="tx1"/>
-                </a:solidFill>
-              </a:rPr>
-              <a:t> loads the schema, </a:t>
-            </a:r>
-            <a:pPr indent="0" marL="0">
-              <a:buNone/>
-            </a:pPr>
-            <a:r>
-              <a:rPr lang="en-US" sz="1500" dirty="0">
-                <a:solidFill>
-                  <a:schemeClr val="tx1"/>
-                </a:solidFill>
-                <a:latin typeface="Courier New" pitchFamily="34" charset="0"/>
-                <a:ea typeface="Courier New" pitchFamily="34" charset="-122"/>
-                <a:cs typeface="Courier New" pitchFamily="34" charset="-120"/>
-              </a:rPr>
-              <a:t>npm run dev</a:t>
-            </a:r>
-            <a:pPr indent="0" marL="0">
-              <a:buNone/>
-            </a:pPr>
-            <a:r>
-              <a:rPr lang="en-US" sz="1500" dirty="0">
-                <a:solidFill>
-                  <a:schemeClr val="tx1"/>
-                </a:solidFill>
-              </a:rPr>
-              <a:t> starts the app.</a:t>
-            </a:r>
-            <a:endParaRPr lang="en-US" sz="1500" dirty="0"/>
+              <a:t>Two real sessions: double booking prevented, lost update shown and fixed with FOR UPDATE.</a:t>
+            </a:r>
+            <a:endParaRPr lang="en-US" sz="1250" dirty="0"/>
           </a:p>
         </p:txBody>
       </p:sp>
@@ -8231,40 +7969,15 @@
                 <a:ea typeface="Cambria" pitchFamily="34" charset="-122"/>
                 <a:cs typeface="Cambria" pitchFamily="34" charset="-120"/>
               </a:rPr>
-              <a:t>Results</a:t>
+              <a:t>Smart Warehouse: the database runs the building</a:t>
             </a:r>
             <a:endParaRPr lang="en-US" sz="3400" dirty="0"/>
           </a:p>
         </p:txBody>
-      </p:sp>
-      <p:sp>
-        <p:nvSpPr>
-          <p:cNvPr id="3" name="Complete working system circle"/>
-          <p:cNvSpPr/>
-          <p:nvPr/>
-        </p:nvSpPr>
-        <p:spPr>
-          <a:xfrm>
-            <a:off x="548640" y="1417320"/>
-            <a:ext cx="658368" cy="658368"/>
-          </a:xfrm>
-          <a:prstGeom prst="ellipse">
-            <a:avLst/>
-          </a:prstGeom>
-          <a:solidFill>
-            <a:schemeClr val="accent3"/>
-          </a:solidFill>
-          <a:ln w="12700">
-            <a:solidFill>
-              <a:schemeClr val="accent3"/>
-            </a:solidFill>
-            <a:prstDash val="solid"/>
-          </a:ln>
-        </p:spPr>
       </p:sp>
       <p:pic>
         <p:nvPicPr>
-          <p:cNvPr id="4" name="Complete working system icon" descr="preencoded.png">    </p:cNvPr>
+          <p:cNvPr id="3" name="X-ray view screenshot" descr="preencoded.png">    </p:cNvPr>
           <p:cNvPicPr>
             <a:picLocks noChangeAspect="1"/>
           </p:cNvPicPr>
@@ -8278,24 +7991,31 @@
         </p:blipFill>
         <p:spPr>
           <a:xfrm>
-            <a:off x="713232" y="1581912"/>
-            <a:ext cx="329184" cy="329184"/>
-          </a:xfrm>
-          <a:prstGeom prst="rect">
-            <a:avLst/>
-          </a:prstGeom>
+            <a:off x="548640" y="1325880"/>
+            <a:ext cx="4892040" cy="3818178"/>
+          </a:xfrm>
+          <a:prstGeom prst="rect">
+            <a:avLst/>
+          </a:prstGeom>
+          <a:effectLst>
+            <a:outerShdw sx="100000" sy="100000" kx="0" ky="0" algn="bl" rotWithShape="0" blurRad="101600" dist="25400" dir="5400000">
+              <a:srgbClr val="0B1F3A">
+                <a:alpha val="12000"/>
+              </a:srgbClr>
+            </a:outerShdw>
+          </a:effectLst>
         </p:spPr>
       </p:pic>
       <p:sp>
         <p:nvSpPr>
-          <p:cNvPr id="5" name="Text 2"/>
-          <p:cNvSpPr txBox="1"/>
-          <p:nvPr/>
-        </p:nvSpPr>
-        <p:spPr>
-          <a:xfrm>
-            <a:off x="1417320" y="1399032"/>
-            <a:ext cx="5669280" cy="384048"/>
+          <p:cNvPr id="4" name="Text 1"/>
+          <p:cNvSpPr txBox="1"/>
+          <p:nvPr/>
+        </p:nvSpPr>
+        <p:spPr>
+          <a:xfrm>
+            <a:off x="548640" y="5253786"/>
+            <a:ext cx="4892040" cy="457200"/>
           </a:xfrm>
           <a:prstGeom prst="rect">
             <a:avLst/>
@@ -8311,233 +8031,79 @@
               <a:buNone/>
             </a:pPr>
             <a:r>
-              <a:rPr lang="en-US" sz="1800" b="1" dirty="0">
-                <a:solidFill>
-                  <a:schemeClr val="tx2"/>
-                </a:solidFill>
-              </a:rPr>
-              <a:t>Complete working system</a:t>
-            </a:r>
-            <a:endParaRPr lang="en-US" sz="1800" dirty="0"/>
-          </a:p>
-        </p:txBody>
-      </p:sp>
-      <p:sp>
-        <p:nvSpPr>
-          <p:cNvPr id="6" name="Text 3"/>
-          <p:cNvSpPr txBox="1"/>
-          <p:nvPr/>
-        </p:nvSpPr>
-        <p:spPr>
-          <a:xfrm>
-            <a:off x="1417320" y="1783080"/>
-            <a:ext cx="5669280" cy="411480"/>
-          </a:xfrm>
-          <a:prstGeom prst="rect">
-            <a:avLst/>
-          </a:prstGeom>
-          <a:noFill/>
-          <a:ln/>
-        </p:spPr>
-        <p:txBody>
-          <a:bodyPr wrap="square" lIns="0" tIns="0" rIns="0" bIns="0" rtlCol="0" anchor="t"/>
-          <a:lstStyle/>
-          <a:p>
-            <a:pPr indent="0" marL="0">
-              <a:buNone/>
-            </a:pPr>
-            <a:r>
-              <a:rPr lang="en-US" sz="1500" dirty="0">
-                <a:solidFill>
-                  <a:schemeClr val="tx1"/>
-                </a:solidFill>
-              </a:rPr>
-              <a:t>Ship to shelf, stored in one Oracle schema and running live</a:t>
-            </a:r>
-            <a:endParaRPr lang="en-US" sz="1500" dirty="0"/>
-          </a:p>
-        </p:txBody>
-      </p:sp>
-      <p:sp>
-        <p:nvSpPr>
-          <p:cNvPr id="7" name="Integrity enforced in the database circle"/>
+              <a:rPr lang="en-US" sz="1200" i="1" dirty="0">
+                <a:solidFill>
+                  <a:schemeClr val="accent5"/>
+                </a:solidFill>
+              </a:rPr>
+              <a:t>X-ray: every pallet in its rack bin, coloured by product, ABC class, expiry or hold</a:t>
+            </a:r>
+            <a:endParaRPr lang="en-US" sz="1200" dirty="0"/>
+          </a:p>
+        </p:txBody>
+      </p:sp>
+      <p:sp>
+        <p:nvSpPr>
+          <p:cNvPr id="5" name="ABC slotting card"/>
           <p:cNvSpPr/>
           <p:nvPr/>
         </p:nvSpPr>
         <p:spPr>
           <a:xfrm>
-            <a:off x="548640" y="2496312"/>
-            <a:ext cx="658368" cy="658368"/>
-          </a:xfrm>
-          <a:prstGeom prst="ellipse">
-            <a:avLst/>
+            <a:off x="5806440" y="1325880"/>
+            <a:ext cx="2826868" cy="822960"/>
+          </a:xfrm>
+          <a:prstGeom prst="roundRect">
+            <a:avLst>
+              <a:gd name="adj" fmla="val 13333"/>
+            </a:avLst>
           </a:prstGeom>
           <a:solidFill>
-            <a:schemeClr val="accent3"/>
+            <a:schemeClr val="bg2"/>
           </a:solidFill>
           <a:ln w="12700">
             <a:solidFill>
-              <a:schemeClr val="accent3"/>
+              <a:schemeClr val="bg2"/>
             </a:solidFill>
             <a:prstDash val="solid"/>
           </a:ln>
         </p:spPr>
       </p:sp>
-      <p:pic>
-        <p:nvPicPr>
-          <p:cNvPr id="8" name="Integrity enforced in the database icon" descr="preencoded.png">    </p:cNvPr>
-          <p:cNvPicPr>
-            <a:picLocks noChangeAspect="1"/>
-          </p:cNvPicPr>
-          <p:nvPr/>
-        </p:nvPicPr>
-        <p:blipFill>
-          <a:blip r:embed="rId2"/>
-          <a:stretch>
-            <a:fillRect/>
-          </a:stretch>
-        </p:blipFill>
-        <p:spPr>
-          <a:xfrm>
-            <a:off x="713232" y="2660904"/>
-            <a:ext cx="329184" cy="329184"/>
-          </a:xfrm>
-          <a:prstGeom prst="rect">
-            <a:avLst/>
-          </a:prstGeom>
-        </p:spPr>
-      </p:pic>
-      <p:sp>
-        <p:nvSpPr>
-          <p:cNvPr id="9" name="Text 5"/>
-          <p:cNvSpPr txBox="1"/>
-          <p:nvPr/>
-        </p:nvSpPr>
-        <p:spPr>
-          <a:xfrm>
-            <a:off x="1417320" y="2478024"/>
-            <a:ext cx="5669280" cy="384048"/>
-          </a:xfrm>
-          <a:prstGeom prst="rect">
-            <a:avLst/>
-          </a:prstGeom>
-          <a:noFill/>
-          <a:ln/>
-        </p:spPr>
-        <p:txBody>
-          <a:bodyPr wrap="square" lIns="0" tIns="0" rIns="0" bIns="0" rtlCol="0" anchor="t"/>
-          <a:lstStyle/>
-          <a:p>
-            <a:pPr indent="0" marL="0">
-              <a:buNone/>
-            </a:pPr>
-            <a:r>
-              <a:rPr lang="en-US" sz="1800" b="1" dirty="0">
-                <a:solidFill>
-                  <a:schemeClr val="tx2"/>
-                </a:solidFill>
-              </a:rPr>
-              <a:t>Integrity enforced in the database</a:t>
-            </a:r>
-            <a:endParaRPr lang="en-US" sz="1800" dirty="0"/>
-          </a:p>
-        </p:txBody>
-      </p:sp>
-      <p:sp>
-        <p:nvSpPr>
-          <p:cNvPr id="10" name="Text 6"/>
-          <p:cNvSpPr txBox="1"/>
-          <p:nvPr/>
-        </p:nvSpPr>
-        <p:spPr>
-          <a:xfrm>
-            <a:off x="1417320" y="2862072"/>
-            <a:ext cx="5669280" cy="411480"/>
-          </a:xfrm>
-          <a:prstGeom prst="rect">
-            <a:avLst/>
-          </a:prstGeom>
-          <a:noFill/>
-          <a:ln/>
-        </p:spPr>
-        <p:txBody>
-          <a:bodyPr wrap="square" lIns="0" tIns="0" rIns="0" bIns="0" rtlCol="0" anchor="t"/>
-          <a:lstStyle/>
-          <a:p>
-            <a:pPr indent="0" marL="0">
-              <a:buNone/>
-            </a:pPr>
-            <a:r>
-              <a:rPr lang="en-US" sz="1500" dirty="0">
-                <a:solidFill>
-                  <a:schemeClr val="tx1"/>
-                </a:solidFill>
-              </a:rPr>
-              <a:t>Invalid data is refused, whatever program sends it</a:t>
-            </a:r>
-            <a:endParaRPr lang="en-US" sz="1500" dirty="0"/>
-          </a:p>
-        </p:txBody>
-      </p:sp>
-      <p:sp>
-        <p:nvSpPr>
-          <p:cNvPr id="11" name="Full traceability circle"/>
+      <p:sp>
+        <p:nvSpPr>
+          <p:cNvPr id="6" name="ABC slotting accent"/>
           <p:cNvSpPr/>
           <p:nvPr/>
         </p:nvSpPr>
         <p:spPr>
           <a:xfrm>
-            <a:off x="548640" y="3575304"/>
-            <a:ext cx="658368" cy="658368"/>
-          </a:xfrm>
-          <a:prstGeom prst="ellipse">
+            <a:off x="5806440" y="1463040"/>
+            <a:ext cx="64008" cy="548640"/>
+          </a:xfrm>
+          <a:prstGeom prst="rect">
             <a:avLst/>
           </a:prstGeom>
           <a:solidFill>
-            <a:schemeClr val="accent3"/>
+            <a:srgbClr val="E8792B"/>
           </a:solidFill>
           <a:ln w="12700">
             <a:solidFill>
-              <a:schemeClr val="accent3"/>
+              <a:srgbClr val="E8792B"/>
             </a:solidFill>
             <a:prstDash val="solid"/>
           </a:ln>
         </p:spPr>
       </p:sp>
-      <p:pic>
-        <p:nvPicPr>
-          <p:cNvPr id="12" name="Full traceability icon" descr="preencoded.png">    </p:cNvPr>
-          <p:cNvPicPr>
-            <a:picLocks noChangeAspect="1"/>
-          </p:cNvPicPr>
-          <p:nvPr/>
-        </p:nvPicPr>
-        <p:blipFill>
-          <a:blip r:embed="rId3"/>
-          <a:stretch>
-            <a:fillRect/>
-          </a:stretch>
-        </p:blipFill>
-        <p:spPr>
-          <a:xfrm>
-            <a:off x="713232" y="3739896"/>
-            <a:ext cx="329184" cy="329184"/>
-          </a:xfrm>
-          <a:prstGeom prst="rect">
-            <a:avLst/>
-          </a:prstGeom>
-        </p:spPr>
-      </p:pic>
-      <p:sp>
-        <p:nvSpPr>
-          <p:cNvPr id="13" name="Text 8"/>
-          <p:cNvSpPr txBox="1"/>
-          <p:nvPr/>
-        </p:nvSpPr>
-        <p:spPr>
-          <a:xfrm>
-            <a:off x="1417320" y="3557016"/>
-            <a:ext cx="5669280" cy="384048"/>
+      <p:sp>
+        <p:nvSpPr>
+          <p:cNvPr id="7" name="Text 4"/>
+          <p:cNvSpPr txBox="1"/>
+          <p:nvPr/>
+        </p:nvSpPr>
+        <p:spPr>
+          <a:xfrm>
+            <a:off x="6035040" y="1435608"/>
+            <a:ext cx="2461108" cy="329184"/>
           </a:xfrm>
           <a:prstGeom prst="rect">
             <a:avLst/>
@@ -8553,27 +8119,27 @@
               <a:buNone/>
             </a:pPr>
             <a:r>
-              <a:rPr lang="en-US" sz="1800" b="1" dirty="0">
+              <a:rPr lang="en-US" sz="1500" b="1" dirty="0">
                 <a:solidFill>
                   <a:schemeClr val="tx2"/>
                 </a:solidFill>
               </a:rPr>
-              <a:t>Full traceability</a:t>
-            </a:r>
-            <a:endParaRPr lang="en-US" sz="1800" dirty="0"/>
-          </a:p>
-        </p:txBody>
-      </p:sp>
-      <p:sp>
-        <p:nvSpPr>
-          <p:cNvPr id="14" name="Text 9"/>
-          <p:cNvSpPr txBox="1"/>
-          <p:nvPr/>
-        </p:nvSpPr>
-        <p:spPr>
-          <a:xfrm>
-            <a:off x="1417320" y="3941064"/>
-            <a:ext cx="5669280" cy="411480"/>
+              <a:t>ABC slotting</a:t>
+            </a:r>
+            <a:endParaRPr lang="en-US" sz="1500" dirty="0"/>
+          </a:p>
+        </p:txBody>
+      </p:sp>
+      <p:sp>
+        <p:nvSpPr>
+          <p:cNvPr id="8" name="Text 5"/>
+          <p:cNvSpPr txBox="1"/>
+          <p:nvPr/>
+        </p:nvSpPr>
+        <p:spPr>
+          <a:xfrm>
+            <a:off x="6035040" y="1783080"/>
+            <a:ext cx="2461108" cy="274320"/>
           </a:xfrm>
           <a:prstGeom prst="rect">
             <a:avLst/>
@@ -8589,160 +8155,67 @@
               <a:buNone/>
             </a:pPr>
             <a:r>
-              <a:rPr lang="en-US" sz="1500" dirty="0">
-                <a:solidFill>
-                  <a:schemeClr val="tx1"/>
-                </a:solidFill>
-              </a:rPr>
-              <a:t>Any container, any change, back to a user and a time</a:t>
-            </a:r>
-            <a:endParaRPr lang="en-US" sz="1500" dirty="0"/>
-          </a:p>
-        </p:txBody>
-      </p:sp>
-      <p:sp>
-        <p:nvSpPr>
-          <p:cNvPr id="15" name="Open to other tools circle"/>
+              <a:rPr lang="en-US" sz="1050" b="1" dirty="0">
+                <a:solidFill>
+                  <a:schemeClr val="accent2"/>
+                </a:solidFill>
+                <a:latin typeface="Courier New" pitchFamily="34" charset="0"/>
+                <a:ea typeface="Courier New" pitchFamily="34" charset="-122"/>
+                <a:cs typeface="Courier New" pitchFamily="34" charset="-120"/>
+              </a:rPr>
+              <a:t>RATIO_TO_REPORT · running SUM() OVER</a:t>
+            </a:r>
+            <a:endParaRPr lang="en-US" sz="1050" dirty="0"/>
+          </a:p>
+        </p:txBody>
+      </p:sp>
+      <p:sp>
+        <p:nvSpPr>
+          <p:cNvPr id="9" name="FEFO picking card"/>
           <p:cNvSpPr/>
           <p:nvPr/>
         </p:nvSpPr>
         <p:spPr>
           <a:xfrm>
-            <a:off x="548640" y="4654296"/>
-            <a:ext cx="658368" cy="658368"/>
-          </a:xfrm>
-          <a:prstGeom prst="ellipse">
-            <a:avLst/>
+            <a:off x="8816188" y="1325880"/>
+            <a:ext cx="2826868" cy="822960"/>
+          </a:xfrm>
+          <a:prstGeom prst="roundRect">
+            <a:avLst>
+              <a:gd name="adj" fmla="val 13333"/>
+            </a:avLst>
           </a:prstGeom>
           <a:solidFill>
-            <a:schemeClr val="accent3"/>
+            <a:schemeClr val="bg2"/>
           </a:solidFill>
           <a:ln w="12700">
             <a:solidFill>
-              <a:schemeClr val="accent3"/>
+              <a:schemeClr val="bg2"/>
             </a:solidFill>
             <a:prstDash val="solid"/>
           </a:ln>
         </p:spPr>
       </p:sp>
-      <p:pic>
-        <p:nvPicPr>
-          <p:cNvPr id="16" name="Open to other tools icon" descr="preencoded.png">    </p:cNvPr>
-          <p:cNvPicPr>
-            <a:picLocks noChangeAspect="1"/>
-          </p:cNvPicPr>
-          <p:nvPr/>
-        </p:nvPicPr>
-        <p:blipFill>
-          <a:blip r:embed="rId4"/>
-          <a:stretch>
-            <a:fillRect/>
-          </a:stretch>
-        </p:blipFill>
-        <p:spPr>
-          <a:xfrm>
-            <a:off x="713232" y="4818888"/>
-            <a:ext cx="329184" cy="329184"/>
-          </a:xfrm>
-          <a:prstGeom prst="rect">
-            <a:avLst/>
-          </a:prstGeom>
-        </p:spPr>
-      </p:pic>
-      <p:sp>
-        <p:nvSpPr>
-          <p:cNvPr id="17" name="Text 11"/>
-          <p:cNvSpPr txBox="1"/>
-          <p:nvPr/>
-        </p:nvSpPr>
-        <p:spPr>
-          <a:xfrm>
-            <a:off x="1417320" y="4636008"/>
-            <a:ext cx="5669280" cy="384048"/>
-          </a:xfrm>
-          <a:prstGeom prst="rect">
-            <a:avLst/>
-          </a:prstGeom>
-          <a:noFill/>
-          <a:ln/>
-        </p:spPr>
-        <p:txBody>
-          <a:bodyPr wrap="square" lIns="0" tIns="0" rIns="0" bIns="0" rtlCol="0" anchor="t"/>
-          <a:lstStyle/>
-          <a:p>
-            <a:pPr indent="0" marL="0">
-              <a:buNone/>
-            </a:pPr>
-            <a:r>
-              <a:rPr lang="en-US" sz="1800" b="1" dirty="0">
-                <a:solidFill>
-                  <a:schemeClr val="tx2"/>
-                </a:solidFill>
-              </a:rPr>
-              <a:t>Open to other tools</a:t>
-            </a:r>
-            <a:endParaRPr lang="en-US" sz="1800" dirty="0"/>
-          </a:p>
-        </p:txBody>
-      </p:sp>
-      <p:sp>
-        <p:nvSpPr>
-          <p:cNvPr id="18" name="Text 12"/>
-          <p:cNvSpPr txBox="1"/>
-          <p:nvPr/>
-        </p:nvSpPr>
-        <p:spPr>
-          <a:xfrm>
-            <a:off x="1417320" y="5020056"/>
-            <a:ext cx="5669280" cy="411480"/>
-          </a:xfrm>
-          <a:prstGeom prst="rect">
-            <a:avLst/>
-          </a:prstGeom>
-          <a:noFill/>
-          <a:ln/>
-        </p:spPr>
-        <p:txBody>
-          <a:bodyPr wrap="square" lIns="0" tIns="0" rIns="0" bIns="0" rtlCol="0" anchor="t"/>
-          <a:lstStyle/>
-          <a:p>
-            <a:pPr indent="0" marL="0">
-              <a:buNone/>
-            </a:pPr>
-            <a:r>
-              <a:rPr lang="en-US" sz="1500" dirty="0">
-                <a:solidFill>
-                  <a:schemeClr val="tx1"/>
-                </a:solidFill>
-              </a:rPr>
-              <a:t>SQL Developer and other apps read the same data live</a:t>
-            </a:r>
-            <a:endParaRPr lang="en-US" sz="1500" dirty="0"/>
-          </a:p>
-        </p:txBody>
-      </p:sp>
-      <p:sp>
-        <p:nvSpPr>
-          <p:cNvPr id="19" name="Size stat card"/>
+      <p:sp>
+        <p:nvSpPr>
+          <p:cNvPr id="10" name="FEFO picking accent"/>
           <p:cNvSpPr/>
           <p:nvPr/>
         </p:nvSpPr>
         <p:spPr>
           <a:xfrm>
-            <a:off x="7452360" y="1417320"/>
-            <a:ext cx="4187952" cy="4160520"/>
-          </a:xfrm>
-          <a:prstGeom prst="roundRect">
-            <a:avLst>
-              <a:gd name="adj" fmla="val 2637"/>
-            </a:avLst>
+            <a:off x="8816188" y="1463040"/>
+            <a:ext cx="64008" cy="548640"/>
+          </a:xfrm>
+          <a:prstGeom prst="rect">
+            <a:avLst/>
           </a:prstGeom>
           <a:solidFill>
-            <a:srgbClr val="0B1F3A"/>
+            <a:srgbClr val="1F5FA8"/>
           </a:solidFill>
           <a:ln w="12700">
             <a:solidFill>
-              <a:srgbClr val="0B1F3A"/>
+              <a:srgbClr val="1F5FA8"/>
             </a:solidFill>
             <a:prstDash val="solid"/>
           </a:ln>
@@ -8750,14 +8223,14 @@
       </p:sp>
       <p:sp>
         <p:nvSpPr>
-          <p:cNvPr id="20" name="Text 14"/>
-          <p:cNvSpPr txBox="1"/>
-          <p:nvPr/>
-        </p:nvSpPr>
-        <p:spPr>
-          <a:xfrm>
-            <a:off x="7772400" y="1874520"/>
-            <a:ext cx="3657600" cy="1097280"/>
+          <p:cNvPr id="11" name="Text 8"/>
+          <p:cNvSpPr txBox="1"/>
+          <p:nvPr/>
+        </p:nvSpPr>
+        <p:spPr>
+          <a:xfrm>
+            <a:off x="9044788" y="1435608"/>
+            <a:ext cx="2461108" cy="329184"/>
           </a:xfrm>
           <a:prstGeom prst="rect">
             <a:avLst/>
@@ -8773,30 +8246,27 @@
               <a:buNone/>
             </a:pPr>
             <a:r>
-              <a:rPr lang="en-US" sz="6000" b="1" dirty="0">
-                <a:solidFill>
-                  <a:schemeClr val="accent1"/>
-                </a:solidFill>
-                <a:latin typeface="Cambria" pitchFamily="34" charset="0"/>
-                <a:ea typeface="Cambria" pitchFamily="34" charset="-122"/>
-                <a:cs typeface="Cambria" pitchFamily="34" charset="-120"/>
-              </a:rPr>
-              <a:t>~19,000</a:t>
-            </a:r>
-            <a:endParaRPr lang="en-US" sz="6000" dirty="0"/>
-          </a:p>
-        </p:txBody>
-      </p:sp>
-      <p:sp>
-        <p:nvSpPr>
-          <p:cNvPr id="21" name="Text 15"/>
-          <p:cNvSpPr txBox="1"/>
-          <p:nvPr/>
-        </p:nvSpPr>
-        <p:spPr>
-          <a:xfrm>
-            <a:off x="7772400" y="2971800"/>
-            <a:ext cx="3566160" cy="731520"/>
+              <a:rPr lang="en-US" sz="1500" b="1" dirty="0">
+                <a:solidFill>
+                  <a:schemeClr val="tx2"/>
+                </a:solidFill>
+              </a:rPr>
+              <a:t>FEFO picking</a:t>
+            </a:r>
+            <a:endParaRPr lang="en-US" sz="1500" dirty="0"/>
+          </a:p>
+        </p:txBody>
+      </p:sp>
+      <p:sp>
+        <p:nvSpPr>
+          <p:cNvPr id="12" name="Text 9"/>
+          <p:cNvSpPr txBox="1"/>
+          <p:nvPr/>
+        </p:nvSpPr>
+        <p:spPr>
+          <a:xfrm>
+            <a:off x="9044788" y="1783080"/>
+            <a:ext cx="2461108" cy="274320"/>
           </a:xfrm>
           <a:prstGeom prst="rect">
             <a:avLst/>
@@ -8812,27 +8282,82 @@
               <a:buNone/>
             </a:pPr>
             <a:r>
-              <a:rPr lang="en-US" sz="1800" dirty="0">
-                <a:solidFill>
-                  <a:schemeClr val="bg1"/>
-                </a:solidFill>
-              </a:rPr>
-              <a:t>lines of SQL, PL/SQL and TypeScript</a:t>
-            </a:r>
-            <a:endParaRPr lang="en-US" sz="1800" dirty="0"/>
-          </a:p>
-        </p:txBody>
-      </p:sp>
-      <p:sp>
-        <p:nvSpPr>
-          <p:cNvPr id="22" name="Text 16"/>
-          <p:cNvSpPr txBox="1"/>
-          <p:nvPr/>
-        </p:nvSpPr>
-        <p:spPr>
-          <a:xfrm>
-            <a:off x="7772400" y="4023360"/>
-            <a:ext cx="3566160" cy="1097280"/>
+              <a:rPr lang="en-US" sz="1050" b="1" dirty="0">
+                <a:solidFill>
+                  <a:schemeClr val="accent2"/>
+                </a:solidFill>
+                <a:latin typeface="Courier New" pitchFamily="34" charset="0"/>
+                <a:ea typeface="Courier New" pitchFamily="34" charset="-122"/>
+                <a:cs typeface="Courier New" pitchFamily="34" charset="-120"/>
+              </a:rPr>
+              <a:t>RANK() OVER · audit of every pick</a:t>
+            </a:r>
+            <a:endParaRPr lang="en-US" sz="1050" dirty="0"/>
+          </a:p>
+        </p:txBody>
+      </p:sp>
+      <p:sp>
+        <p:nvSpPr>
+          <p:cNvPr id="13" name="Recall trace card"/>
+          <p:cNvSpPr/>
+          <p:nvPr/>
+        </p:nvSpPr>
+        <p:spPr>
+          <a:xfrm>
+            <a:off x="5806440" y="2267712"/>
+            <a:ext cx="2826868" cy="822960"/>
+          </a:xfrm>
+          <a:prstGeom prst="roundRect">
+            <a:avLst>
+              <a:gd name="adj" fmla="val 13333"/>
+            </a:avLst>
+          </a:prstGeom>
+          <a:solidFill>
+            <a:schemeClr val="bg2"/>
+          </a:solidFill>
+          <a:ln w="12700">
+            <a:solidFill>
+              <a:schemeClr val="bg2"/>
+            </a:solidFill>
+            <a:prstDash val="solid"/>
+          </a:ln>
+        </p:spPr>
+      </p:sp>
+      <p:sp>
+        <p:nvSpPr>
+          <p:cNvPr id="14" name="Recall trace accent"/>
+          <p:cNvSpPr/>
+          <p:nvPr/>
+        </p:nvSpPr>
+        <p:spPr>
+          <a:xfrm>
+            <a:off x="5806440" y="2404872"/>
+            <a:ext cx="64008" cy="548640"/>
+          </a:xfrm>
+          <a:prstGeom prst="rect">
+            <a:avLst/>
+          </a:prstGeom>
+          <a:solidFill>
+            <a:srgbClr val="E8792B"/>
+          </a:solidFill>
+          <a:ln w="12700">
+            <a:solidFill>
+              <a:srgbClr val="E8792B"/>
+            </a:solidFill>
+            <a:prstDash val="solid"/>
+          </a:ln>
+        </p:spPr>
+      </p:sp>
+      <p:sp>
+        <p:nvSpPr>
+          <p:cNvPr id="15" name="Text 12"/>
+          <p:cNvSpPr txBox="1"/>
+          <p:nvPr/>
+        </p:nvSpPr>
+        <p:spPr>
+          <a:xfrm>
+            <a:off x="6035040" y="2377440"/>
+            <a:ext cx="2461108" cy="329184"/>
           </a:xfrm>
           <a:prstGeom prst="rect">
             <a:avLst/>
@@ -8848,14 +8373,942 @@
               <a:buNone/>
             </a:pPr>
             <a:r>
-              <a:rPr lang="en-US" sz="1500" dirty="0">
-                <a:solidFill>
-                  <a:schemeClr val="bg2"/>
-                </a:solidFill>
-              </a:rPr>
-              <a:t>44 tables · 17 views · 6 packages · 14 triggers · 26 reports</a:t>
+              <a:rPr lang="en-US" sz="1500" b="1" dirty="0">
+                <a:solidFill>
+                  <a:schemeClr val="tx2"/>
+                </a:solidFill>
+              </a:rPr>
+              <a:t>Recall trace</a:t>
             </a:r>
             <a:endParaRPr lang="en-US" sz="1500" dirty="0"/>
+          </a:p>
+        </p:txBody>
+      </p:sp>
+      <p:sp>
+        <p:nvSpPr>
+          <p:cNvPr id="16" name="Text 13"/>
+          <p:cNvSpPr txBox="1"/>
+          <p:nvPr/>
+        </p:nvSpPr>
+        <p:spPr>
+          <a:xfrm>
+            <a:off x="6035040" y="2724912"/>
+            <a:ext cx="2461108" cy="274320"/>
+          </a:xfrm>
+          <a:prstGeom prst="rect">
+            <a:avLst/>
+          </a:prstGeom>
+          <a:noFill/>
+          <a:ln/>
+        </p:spPr>
+        <p:txBody>
+          <a:bodyPr wrap="square" lIns="0" tIns="0" rIns="0" bIns="0" rtlCol="0" anchor="t"/>
+          <a:lstStyle/>
+          <a:p>
+            <a:pPr indent="0" marL="0">
+              <a:buNone/>
+            </a:pPr>
+            <a:r>
+              <a:rPr lang="en-US" sz="1050" b="1" dirty="0">
+                <a:solidFill>
+                  <a:schemeClr val="accent2"/>
+                </a:solidFill>
+                <a:latin typeface="Courier New" pitchFamily="34" charset="0"/>
+                <a:ea typeface="Courier New" pitchFamily="34" charset="-122"/>
+                <a:cs typeface="Courier New" pitchFamily="34" charset="-120"/>
+              </a:rPr>
+              <a:t>recursive WITH … SEARCH DEPTH FIRST</a:t>
+            </a:r>
+            <a:endParaRPr lang="en-US" sz="1050" dirty="0"/>
+          </a:p>
+        </p:txBody>
+      </p:sp>
+      <p:sp>
+        <p:nvSpPr>
+          <p:cNvPr id="17" name="Cold chain card"/>
+          <p:cNvSpPr/>
+          <p:nvPr/>
+        </p:nvSpPr>
+        <p:spPr>
+          <a:xfrm>
+            <a:off x="8816188" y="2267712"/>
+            <a:ext cx="2826868" cy="822960"/>
+          </a:xfrm>
+          <a:prstGeom prst="roundRect">
+            <a:avLst>
+              <a:gd name="adj" fmla="val 13333"/>
+            </a:avLst>
+          </a:prstGeom>
+          <a:solidFill>
+            <a:schemeClr val="bg2"/>
+          </a:solidFill>
+          <a:ln w="12700">
+            <a:solidFill>
+              <a:schemeClr val="bg2"/>
+            </a:solidFill>
+            <a:prstDash val="solid"/>
+          </a:ln>
+        </p:spPr>
+      </p:sp>
+      <p:sp>
+        <p:nvSpPr>
+          <p:cNvPr id="18" name="Cold chain accent"/>
+          <p:cNvSpPr/>
+          <p:nvPr/>
+        </p:nvSpPr>
+        <p:spPr>
+          <a:xfrm>
+            <a:off x="8816188" y="2404872"/>
+            <a:ext cx="64008" cy="548640"/>
+          </a:xfrm>
+          <a:prstGeom prst="rect">
+            <a:avLst/>
+          </a:prstGeom>
+          <a:solidFill>
+            <a:srgbClr val="1F5FA8"/>
+          </a:solidFill>
+          <a:ln w="12700">
+            <a:solidFill>
+              <a:srgbClr val="1F5FA8"/>
+            </a:solidFill>
+            <a:prstDash val="solid"/>
+          </a:ln>
+        </p:spPr>
+      </p:sp>
+      <p:sp>
+        <p:nvSpPr>
+          <p:cNvPr id="19" name="Text 16"/>
+          <p:cNvSpPr txBox="1"/>
+          <p:nvPr/>
+        </p:nvSpPr>
+        <p:spPr>
+          <a:xfrm>
+            <a:off x="9044788" y="2377440"/>
+            <a:ext cx="2461108" cy="329184"/>
+          </a:xfrm>
+          <a:prstGeom prst="rect">
+            <a:avLst/>
+          </a:prstGeom>
+          <a:noFill/>
+          <a:ln/>
+        </p:spPr>
+        <p:txBody>
+          <a:bodyPr wrap="square" lIns="0" tIns="0" rIns="0" bIns="0" rtlCol="0" anchor="t"/>
+          <a:lstStyle/>
+          <a:p>
+            <a:pPr indent="0" marL="0">
+              <a:buNone/>
+            </a:pPr>
+            <a:r>
+              <a:rPr lang="en-US" sz="1500" b="1" dirty="0">
+                <a:solidFill>
+                  <a:schemeClr val="tx2"/>
+                </a:solidFill>
+              </a:rPr>
+              <a:t>Cold chain</a:t>
+            </a:r>
+            <a:endParaRPr lang="en-US" sz="1500" dirty="0"/>
+          </a:p>
+        </p:txBody>
+      </p:sp>
+      <p:sp>
+        <p:nvSpPr>
+          <p:cNvPr id="20" name="Text 17"/>
+          <p:cNvSpPr txBox="1"/>
+          <p:nvPr/>
+        </p:nvSpPr>
+        <p:spPr>
+          <a:xfrm>
+            <a:off x="9044788" y="2724912"/>
+            <a:ext cx="2461108" cy="274320"/>
+          </a:xfrm>
+          <a:prstGeom prst="rect">
+            <a:avLst/>
+          </a:prstGeom>
+          <a:noFill/>
+          <a:ln/>
+        </p:spPr>
+        <p:txBody>
+          <a:bodyPr wrap="square" lIns="0" tIns="0" rIns="0" bIns="0" rtlCol="0" anchor="t"/>
+          <a:lstStyle/>
+          <a:p>
+            <a:pPr indent="0" marL="0">
+              <a:buNone/>
+            </a:pPr>
+            <a:r>
+              <a:rPr lang="en-US" sz="1050" b="1" dirty="0">
+                <a:solidFill>
+                  <a:schemeClr val="accent2"/>
+                </a:solidFill>
+                <a:latin typeface="Courier New" pitchFamily="34" charset="0"/>
+                <a:ea typeface="Courier New" pitchFamily="34" charset="-122"/>
+                <a:cs typeface="Courier New" pitchFamily="34" charset="-120"/>
+              </a:rPr>
+              <a:t>MATCH_RECOGNIZE on sensor readings</a:t>
+            </a:r>
+            <a:endParaRPr lang="en-US" sz="1050" dirty="0"/>
+          </a:p>
+        </p:txBody>
+      </p:sp>
+      <p:sp>
+        <p:nvSpPr>
+          <p:cNvPr id="21" name="Tamper-proof ledger card"/>
+          <p:cNvSpPr/>
+          <p:nvPr/>
+        </p:nvSpPr>
+        <p:spPr>
+          <a:xfrm>
+            <a:off x="5806440" y="3209544"/>
+            <a:ext cx="2826868" cy="822960"/>
+          </a:xfrm>
+          <a:prstGeom prst="roundRect">
+            <a:avLst>
+              <a:gd name="adj" fmla="val 13333"/>
+            </a:avLst>
+          </a:prstGeom>
+          <a:solidFill>
+            <a:schemeClr val="bg2"/>
+          </a:solidFill>
+          <a:ln w="12700">
+            <a:solidFill>
+              <a:schemeClr val="bg2"/>
+            </a:solidFill>
+            <a:prstDash val="solid"/>
+          </a:ln>
+        </p:spPr>
+      </p:sp>
+      <p:sp>
+        <p:nvSpPr>
+          <p:cNvPr id="22" name="Tamper-proof ledger accent"/>
+          <p:cNvSpPr/>
+          <p:nvPr/>
+        </p:nvSpPr>
+        <p:spPr>
+          <a:xfrm>
+            <a:off x="5806440" y="3346704"/>
+            <a:ext cx="64008" cy="548640"/>
+          </a:xfrm>
+          <a:prstGeom prst="rect">
+            <a:avLst/>
+          </a:prstGeom>
+          <a:solidFill>
+            <a:srgbClr val="E8792B"/>
+          </a:solidFill>
+          <a:ln w="12700">
+            <a:solidFill>
+              <a:srgbClr val="E8792B"/>
+            </a:solidFill>
+            <a:prstDash val="solid"/>
+          </a:ln>
+        </p:spPr>
+      </p:sp>
+      <p:sp>
+        <p:nvSpPr>
+          <p:cNvPr id="23" name="Text 20"/>
+          <p:cNvSpPr txBox="1"/>
+          <p:nvPr/>
+        </p:nvSpPr>
+        <p:spPr>
+          <a:xfrm>
+            <a:off x="6035040" y="3319272"/>
+            <a:ext cx="2461108" cy="329184"/>
+          </a:xfrm>
+          <a:prstGeom prst="rect">
+            <a:avLst/>
+          </a:prstGeom>
+          <a:noFill/>
+          <a:ln/>
+        </p:spPr>
+        <p:txBody>
+          <a:bodyPr wrap="square" lIns="0" tIns="0" rIns="0" bIns="0" rtlCol="0" anchor="t"/>
+          <a:lstStyle/>
+          <a:p>
+            <a:pPr indent="0" marL="0">
+              <a:buNone/>
+            </a:pPr>
+            <a:r>
+              <a:rPr lang="en-US" sz="1500" b="1" dirty="0">
+                <a:solidFill>
+                  <a:schemeClr val="tx2"/>
+                </a:solidFill>
+              </a:rPr>
+              <a:t>Tamper-proof ledger</a:t>
+            </a:r>
+            <a:endParaRPr lang="en-US" sz="1500" dirty="0"/>
+          </a:p>
+        </p:txBody>
+      </p:sp>
+      <p:sp>
+        <p:nvSpPr>
+          <p:cNvPr id="24" name="Text 21"/>
+          <p:cNvSpPr txBox="1"/>
+          <p:nvPr/>
+        </p:nvSpPr>
+        <p:spPr>
+          <a:xfrm>
+            <a:off x="6035040" y="3666744"/>
+            <a:ext cx="2461108" cy="274320"/>
+          </a:xfrm>
+          <a:prstGeom prst="rect">
+            <a:avLst/>
+          </a:prstGeom>
+          <a:noFill/>
+          <a:ln/>
+        </p:spPr>
+        <p:txBody>
+          <a:bodyPr wrap="square" lIns="0" tIns="0" rIns="0" bIns="0" rtlCol="0" anchor="t"/>
+          <a:lstStyle/>
+          <a:p>
+            <a:pPr indent="0" marL="0">
+              <a:buNone/>
+            </a:pPr>
+            <a:r>
+              <a:rPr lang="en-US" sz="1050" b="1" dirty="0">
+                <a:solidFill>
+                  <a:schemeClr val="accent2"/>
+                </a:solidFill>
+                <a:latin typeface="Courier New" pitchFamily="34" charset="0"/>
+                <a:ea typeface="Courier New" pitchFamily="34" charset="-122"/>
+                <a:cs typeface="Courier New" pitchFamily="34" charset="-120"/>
+              </a:rPr>
+              <a:t>BLOCKCHAIN TABLE · VERIFY_ROWS</a:t>
+            </a:r>
+            <a:endParaRPr lang="en-US" sz="1050" dirty="0"/>
+          </a:p>
+        </p:txBody>
+      </p:sp>
+      <p:sp>
+        <p:nvSpPr>
+          <p:cNvPr id="25" name="Forecast and reorder card"/>
+          <p:cNvSpPr/>
+          <p:nvPr/>
+        </p:nvSpPr>
+        <p:spPr>
+          <a:xfrm>
+            <a:off x="8816188" y="3209544"/>
+            <a:ext cx="2826868" cy="822960"/>
+          </a:xfrm>
+          <a:prstGeom prst="roundRect">
+            <a:avLst>
+              <a:gd name="adj" fmla="val 13333"/>
+            </a:avLst>
+          </a:prstGeom>
+          <a:solidFill>
+            <a:schemeClr val="bg2"/>
+          </a:solidFill>
+          <a:ln w="12700">
+            <a:solidFill>
+              <a:schemeClr val="bg2"/>
+            </a:solidFill>
+            <a:prstDash val="solid"/>
+          </a:ln>
+        </p:spPr>
+      </p:sp>
+      <p:sp>
+        <p:nvSpPr>
+          <p:cNvPr id="26" name="Forecast and reorder accent"/>
+          <p:cNvSpPr/>
+          <p:nvPr/>
+        </p:nvSpPr>
+        <p:spPr>
+          <a:xfrm>
+            <a:off x="8816188" y="3346704"/>
+            <a:ext cx="64008" cy="548640"/>
+          </a:xfrm>
+          <a:prstGeom prst="rect">
+            <a:avLst/>
+          </a:prstGeom>
+          <a:solidFill>
+            <a:srgbClr val="1F5FA8"/>
+          </a:solidFill>
+          <a:ln w="12700">
+            <a:solidFill>
+              <a:srgbClr val="1F5FA8"/>
+            </a:solidFill>
+            <a:prstDash val="solid"/>
+          </a:ln>
+        </p:spPr>
+      </p:sp>
+      <p:sp>
+        <p:nvSpPr>
+          <p:cNvPr id="27" name="Text 24"/>
+          <p:cNvSpPr txBox="1"/>
+          <p:nvPr/>
+        </p:nvSpPr>
+        <p:spPr>
+          <a:xfrm>
+            <a:off x="9044788" y="3319272"/>
+            <a:ext cx="2461108" cy="329184"/>
+          </a:xfrm>
+          <a:prstGeom prst="rect">
+            <a:avLst/>
+          </a:prstGeom>
+          <a:noFill/>
+          <a:ln/>
+        </p:spPr>
+        <p:txBody>
+          <a:bodyPr wrap="square" lIns="0" tIns="0" rIns="0" bIns="0" rtlCol="0" anchor="t"/>
+          <a:lstStyle/>
+          <a:p>
+            <a:pPr indent="0" marL="0">
+              <a:buNone/>
+            </a:pPr>
+            <a:r>
+              <a:rPr lang="en-US" sz="1500" b="1" dirty="0">
+                <a:solidFill>
+                  <a:schemeClr val="tx2"/>
+                </a:solidFill>
+              </a:rPr>
+              <a:t>Forecast and reorder</a:t>
+            </a:r>
+            <a:endParaRPr lang="en-US" sz="1500" dirty="0"/>
+          </a:p>
+        </p:txBody>
+      </p:sp>
+      <p:sp>
+        <p:nvSpPr>
+          <p:cNvPr id="28" name="Text 25"/>
+          <p:cNvSpPr txBox="1"/>
+          <p:nvPr/>
+        </p:nvSpPr>
+        <p:spPr>
+          <a:xfrm>
+            <a:off x="9044788" y="3666744"/>
+            <a:ext cx="2461108" cy="274320"/>
+          </a:xfrm>
+          <a:prstGeom prst="rect">
+            <a:avLst/>
+          </a:prstGeom>
+          <a:noFill/>
+          <a:ln/>
+        </p:spPr>
+        <p:txBody>
+          <a:bodyPr wrap="square" lIns="0" tIns="0" rIns="0" bIns="0" rtlCol="0" anchor="t"/>
+          <a:lstStyle/>
+          <a:p>
+            <a:pPr indent="0" marL="0">
+              <a:buNone/>
+            </a:pPr>
+            <a:r>
+              <a:rPr lang="en-US" sz="1050" b="1" dirty="0">
+                <a:solidFill>
+                  <a:schemeClr val="accent2"/>
+                </a:solidFill>
+                <a:latin typeface="Courier New" pitchFamily="34" charset="0"/>
+                <a:ea typeface="Courier New" pitchFamily="34" charset="-122"/>
+                <a:cs typeface="Courier New" pitchFamily="34" charset="-120"/>
+              </a:rPr>
+              <a:t>MODEL clause · REGR_SLOPE · EOQ</a:t>
+            </a:r>
+            <a:endParaRPr lang="en-US" sz="1050" dirty="0"/>
+          </a:p>
+        </p:txBody>
+      </p:sp>
+      <p:sp>
+        <p:nvSpPr>
+          <p:cNvPr id="29" name="GS1 pallet labels card"/>
+          <p:cNvSpPr/>
+          <p:nvPr/>
+        </p:nvSpPr>
+        <p:spPr>
+          <a:xfrm>
+            <a:off x="5806440" y="4151376"/>
+            <a:ext cx="2826868" cy="822960"/>
+          </a:xfrm>
+          <a:prstGeom prst="roundRect">
+            <a:avLst>
+              <a:gd name="adj" fmla="val 13333"/>
+            </a:avLst>
+          </a:prstGeom>
+          <a:solidFill>
+            <a:schemeClr val="bg2"/>
+          </a:solidFill>
+          <a:ln w="12700">
+            <a:solidFill>
+              <a:schemeClr val="bg2"/>
+            </a:solidFill>
+            <a:prstDash val="solid"/>
+          </a:ln>
+        </p:spPr>
+      </p:sp>
+      <p:sp>
+        <p:nvSpPr>
+          <p:cNvPr id="30" name="GS1 pallet labels accent"/>
+          <p:cNvSpPr/>
+          <p:nvPr/>
+        </p:nvSpPr>
+        <p:spPr>
+          <a:xfrm>
+            <a:off x="5806440" y="4288536"/>
+            <a:ext cx="64008" cy="548640"/>
+          </a:xfrm>
+          <a:prstGeom prst="rect">
+            <a:avLst/>
+          </a:prstGeom>
+          <a:solidFill>
+            <a:srgbClr val="E8792B"/>
+          </a:solidFill>
+          <a:ln w="12700">
+            <a:solidFill>
+              <a:srgbClr val="E8792B"/>
+            </a:solidFill>
+            <a:prstDash val="solid"/>
+          </a:ln>
+        </p:spPr>
+      </p:sp>
+      <p:sp>
+        <p:nvSpPr>
+          <p:cNvPr id="31" name="Text 28"/>
+          <p:cNvSpPr txBox="1"/>
+          <p:nvPr/>
+        </p:nvSpPr>
+        <p:spPr>
+          <a:xfrm>
+            <a:off x="6035040" y="4261104"/>
+            <a:ext cx="2461108" cy="329184"/>
+          </a:xfrm>
+          <a:prstGeom prst="rect">
+            <a:avLst/>
+          </a:prstGeom>
+          <a:noFill/>
+          <a:ln/>
+        </p:spPr>
+        <p:txBody>
+          <a:bodyPr wrap="square" lIns="0" tIns="0" rIns="0" bIns="0" rtlCol="0" anchor="t"/>
+          <a:lstStyle/>
+          <a:p>
+            <a:pPr indent="0" marL="0">
+              <a:buNone/>
+            </a:pPr>
+            <a:r>
+              <a:rPr lang="en-US" sz="1500" b="1" dirty="0">
+                <a:solidFill>
+                  <a:schemeClr val="tx2"/>
+                </a:solidFill>
+              </a:rPr>
+              <a:t>GS1 pallet labels</a:t>
+            </a:r>
+            <a:endParaRPr lang="en-US" sz="1500" dirty="0"/>
+          </a:p>
+        </p:txBody>
+      </p:sp>
+      <p:sp>
+        <p:nvSpPr>
+          <p:cNvPr id="32" name="Text 29"/>
+          <p:cNvSpPr txBox="1"/>
+          <p:nvPr/>
+        </p:nvSpPr>
+        <p:spPr>
+          <a:xfrm>
+            <a:off x="6035040" y="4608576"/>
+            <a:ext cx="2461108" cy="274320"/>
+          </a:xfrm>
+          <a:prstGeom prst="rect">
+            <a:avLst/>
+          </a:prstGeom>
+          <a:noFill/>
+          <a:ln/>
+        </p:spPr>
+        <p:txBody>
+          <a:bodyPr wrap="square" lIns="0" tIns="0" rIns="0" bIns="0" rtlCol="0" anchor="t"/>
+          <a:lstStyle/>
+          <a:p>
+            <a:pPr indent="0" marL="0">
+              <a:buNone/>
+            </a:pPr>
+            <a:r>
+              <a:rPr lang="en-US" sz="1050" b="1" dirty="0">
+                <a:solidFill>
+                  <a:schemeClr val="accent2"/>
+                </a:solidFill>
+                <a:latin typeface="Courier New" pitchFamily="34" charset="0"/>
+                <a:ea typeface="Courier New" pitchFamily="34" charset="-122"/>
+                <a:cs typeface="Courier New" pitchFamily="34" charset="-120"/>
+              </a:rPr>
+              <a:t>SSCC check digit as a CHECK constraint</a:t>
+            </a:r>
+            <a:endParaRPr lang="en-US" sz="1050" dirty="0"/>
+          </a:p>
+        </p:txBody>
+      </p:sp>
+      <p:sp>
+        <p:nvSpPr>
+          <p:cNvPr id="33" name="Event stream card"/>
+          <p:cNvSpPr/>
+          <p:nvPr/>
+        </p:nvSpPr>
+        <p:spPr>
+          <a:xfrm>
+            <a:off x="8816188" y="4151376"/>
+            <a:ext cx="2826868" cy="822960"/>
+          </a:xfrm>
+          <a:prstGeom prst="roundRect">
+            <a:avLst>
+              <a:gd name="adj" fmla="val 13333"/>
+            </a:avLst>
+          </a:prstGeom>
+          <a:solidFill>
+            <a:schemeClr val="bg2"/>
+          </a:solidFill>
+          <a:ln w="12700">
+            <a:solidFill>
+              <a:schemeClr val="bg2"/>
+            </a:solidFill>
+            <a:prstDash val="solid"/>
+          </a:ln>
+        </p:spPr>
+      </p:sp>
+      <p:sp>
+        <p:nvSpPr>
+          <p:cNvPr id="34" name="Event stream accent"/>
+          <p:cNvSpPr/>
+          <p:nvPr/>
+        </p:nvSpPr>
+        <p:spPr>
+          <a:xfrm>
+            <a:off x="8816188" y="4288536"/>
+            <a:ext cx="64008" cy="548640"/>
+          </a:xfrm>
+          <a:prstGeom prst="rect">
+            <a:avLst/>
+          </a:prstGeom>
+          <a:solidFill>
+            <a:srgbClr val="1F5FA8"/>
+          </a:solidFill>
+          <a:ln w="12700">
+            <a:solidFill>
+              <a:srgbClr val="1F5FA8"/>
+            </a:solidFill>
+            <a:prstDash val="solid"/>
+          </a:ln>
+        </p:spPr>
+      </p:sp>
+      <p:sp>
+        <p:nvSpPr>
+          <p:cNvPr id="35" name="Text 32"/>
+          <p:cNvSpPr txBox="1"/>
+          <p:nvPr/>
+        </p:nvSpPr>
+        <p:spPr>
+          <a:xfrm>
+            <a:off x="9044788" y="4261104"/>
+            <a:ext cx="2461108" cy="329184"/>
+          </a:xfrm>
+          <a:prstGeom prst="rect">
+            <a:avLst/>
+          </a:prstGeom>
+          <a:noFill/>
+          <a:ln/>
+        </p:spPr>
+        <p:txBody>
+          <a:bodyPr wrap="square" lIns="0" tIns="0" rIns="0" bIns="0" rtlCol="0" anchor="t"/>
+          <a:lstStyle/>
+          <a:p>
+            <a:pPr indent="0" marL="0">
+              <a:buNone/>
+            </a:pPr>
+            <a:r>
+              <a:rPr lang="en-US" sz="1500" b="1" dirty="0">
+                <a:solidFill>
+                  <a:schemeClr val="tx2"/>
+                </a:solidFill>
+              </a:rPr>
+              <a:t>Event stream</a:t>
+            </a:r>
+            <a:endParaRPr lang="en-US" sz="1500" dirty="0"/>
+          </a:p>
+        </p:txBody>
+      </p:sp>
+      <p:sp>
+        <p:nvSpPr>
+          <p:cNvPr id="36" name="Text 33"/>
+          <p:cNvSpPr txBox="1"/>
+          <p:nvPr/>
+        </p:nvSpPr>
+        <p:spPr>
+          <a:xfrm>
+            <a:off x="9044788" y="4608576"/>
+            <a:ext cx="2461108" cy="274320"/>
+          </a:xfrm>
+          <a:prstGeom prst="rect">
+            <a:avLst/>
+          </a:prstGeom>
+          <a:noFill/>
+          <a:ln/>
+        </p:spPr>
+        <p:txBody>
+          <a:bodyPr wrap="square" lIns="0" tIns="0" rIns="0" bIns="0" rtlCol="0" anchor="t"/>
+          <a:lstStyle/>
+          <a:p>
+            <a:pPr indent="0" marL="0">
+              <a:buNone/>
+            </a:pPr>
+            <a:r>
+              <a:rPr lang="en-US" sz="1050" b="1" dirty="0">
+                <a:solidFill>
+                  <a:schemeClr val="accent2"/>
+                </a:solidFill>
+                <a:latin typeface="Courier New" pitchFamily="34" charset="0"/>
+                <a:ea typeface="Courier New" pitchFamily="34" charset="-122"/>
+                <a:cs typeface="Courier New" pitchFamily="34" charset="-120"/>
+              </a:rPr>
+              <a:t>Transactional Event Queue</a:t>
+            </a:r>
+            <a:endParaRPr lang="en-US" sz="1050" dirty="0"/>
+          </a:p>
+        </p:txBody>
+      </p:sp>
+      <p:sp>
+        <p:nvSpPr>
+          <p:cNvPr id="37" name="Shortest pick route card"/>
+          <p:cNvSpPr/>
+          <p:nvPr/>
+        </p:nvSpPr>
+        <p:spPr>
+          <a:xfrm>
+            <a:off x="5806440" y="5093208"/>
+            <a:ext cx="2826868" cy="822960"/>
+          </a:xfrm>
+          <a:prstGeom prst="roundRect">
+            <a:avLst>
+              <a:gd name="adj" fmla="val 13333"/>
+            </a:avLst>
+          </a:prstGeom>
+          <a:solidFill>
+            <a:schemeClr val="bg2"/>
+          </a:solidFill>
+          <a:ln w="12700">
+            <a:solidFill>
+              <a:schemeClr val="bg2"/>
+            </a:solidFill>
+            <a:prstDash val="solid"/>
+          </a:ln>
+        </p:spPr>
+      </p:sp>
+      <p:sp>
+        <p:nvSpPr>
+          <p:cNvPr id="38" name="Shortest pick route accent"/>
+          <p:cNvSpPr/>
+          <p:nvPr/>
+        </p:nvSpPr>
+        <p:spPr>
+          <a:xfrm>
+            <a:off x="5806440" y="5230368"/>
+            <a:ext cx="64008" cy="548640"/>
+          </a:xfrm>
+          <a:prstGeom prst="rect">
+            <a:avLst/>
+          </a:prstGeom>
+          <a:solidFill>
+            <a:srgbClr val="E8792B"/>
+          </a:solidFill>
+          <a:ln w="12700">
+            <a:solidFill>
+              <a:srgbClr val="E8792B"/>
+            </a:solidFill>
+            <a:prstDash val="solid"/>
+          </a:ln>
+        </p:spPr>
+      </p:sp>
+      <p:sp>
+        <p:nvSpPr>
+          <p:cNvPr id="39" name="Text 36"/>
+          <p:cNvSpPr txBox="1"/>
+          <p:nvPr/>
+        </p:nvSpPr>
+        <p:spPr>
+          <a:xfrm>
+            <a:off x="6035040" y="5202936"/>
+            <a:ext cx="2461108" cy="329184"/>
+          </a:xfrm>
+          <a:prstGeom prst="rect">
+            <a:avLst/>
+          </a:prstGeom>
+          <a:noFill/>
+          <a:ln/>
+        </p:spPr>
+        <p:txBody>
+          <a:bodyPr wrap="square" lIns="0" tIns="0" rIns="0" bIns="0" rtlCol="0" anchor="t"/>
+          <a:lstStyle/>
+          <a:p>
+            <a:pPr indent="0" marL="0">
+              <a:buNone/>
+            </a:pPr>
+            <a:r>
+              <a:rPr lang="en-US" sz="1500" b="1" dirty="0">
+                <a:solidFill>
+                  <a:schemeClr val="tx2"/>
+                </a:solidFill>
+              </a:rPr>
+              <a:t>Shortest pick route</a:t>
+            </a:r>
+            <a:endParaRPr lang="en-US" sz="1500" dirty="0"/>
+          </a:p>
+        </p:txBody>
+      </p:sp>
+      <p:sp>
+        <p:nvSpPr>
+          <p:cNvPr id="40" name="Text 37"/>
+          <p:cNvSpPr txBox="1"/>
+          <p:nvPr/>
+        </p:nvSpPr>
+        <p:spPr>
+          <a:xfrm>
+            <a:off x="6035040" y="5550408"/>
+            <a:ext cx="2461108" cy="274320"/>
+          </a:xfrm>
+          <a:prstGeom prst="rect">
+            <a:avLst/>
+          </a:prstGeom>
+          <a:noFill/>
+          <a:ln/>
+        </p:spPr>
+        <p:txBody>
+          <a:bodyPr wrap="square" lIns="0" tIns="0" rIns="0" bIns="0" rtlCol="0" anchor="t"/>
+          <a:lstStyle/>
+          <a:p>
+            <a:pPr indent="0" marL="0">
+              <a:buNone/>
+            </a:pPr>
+            <a:r>
+              <a:rPr lang="en-US" sz="1050" b="1" dirty="0">
+                <a:solidFill>
+                  <a:schemeClr val="accent2"/>
+                </a:solidFill>
+                <a:latin typeface="Courier New" pitchFamily="34" charset="0"/>
+                <a:ea typeface="Courier New" pitchFamily="34" charset="-122"/>
+                <a:cs typeface="Courier New" pitchFamily="34" charset="-120"/>
+              </a:rPr>
+              <a:t>Dijkstra in PL/SQL · GRAPH_TABLE</a:t>
+            </a:r>
+            <a:endParaRPr lang="en-US" sz="1050" dirty="0"/>
+          </a:p>
+        </p:txBody>
+      </p:sp>
+      <p:sp>
+        <p:nvSpPr>
+          <p:cNvPr id="41" name="Semantic search card"/>
+          <p:cNvSpPr/>
+          <p:nvPr/>
+        </p:nvSpPr>
+        <p:spPr>
+          <a:xfrm>
+            <a:off x="8816188" y="5093208"/>
+            <a:ext cx="2826868" cy="822960"/>
+          </a:xfrm>
+          <a:prstGeom prst="roundRect">
+            <a:avLst>
+              <a:gd name="adj" fmla="val 13333"/>
+            </a:avLst>
+          </a:prstGeom>
+          <a:solidFill>
+            <a:schemeClr val="bg2"/>
+          </a:solidFill>
+          <a:ln w="12700">
+            <a:solidFill>
+              <a:schemeClr val="bg2"/>
+            </a:solidFill>
+            <a:prstDash val="solid"/>
+          </a:ln>
+        </p:spPr>
+      </p:sp>
+      <p:sp>
+        <p:nvSpPr>
+          <p:cNvPr id="42" name="Semantic search accent"/>
+          <p:cNvSpPr/>
+          <p:nvPr/>
+        </p:nvSpPr>
+        <p:spPr>
+          <a:xfrm>
+            <a:off x="8816188" y="5230368"/>
+            <a:ext cx="64008" cy="548640"/>
+          </a:xfrm>
+          <a:prstGeom prst="rect">
+            <a:avLst/>
+          </a:prstGeom>
+          <a:solidFill>
+            <a:srgbClr val="1F5FA8"/>
+          </a:solidFill>
+          <a:ln w="12700">
+            <a:solidFill>
+              <a:srgbClr val="1F5FA8"/>
+            </a:solidFill>
+            <a:prstDash val="solid"/>
+          </a:ln>
+        </p:spPr>
+      </p:sp>
+      <p:sp>
+        <p:nvSpPr>
+          <p:cNvPr id="43" name="Text 40"/>
+          <p:cNvSpPr txBox="1"/>
+          <p:nvPr/>
+        </p:nvSpPr>
+        <p:spPr>
+          <a:xfrm>
+            <a:off x="9044788" y="5202936"/>
+            <a:ext cx="2461108" cy="329184"/>
+          </a:xfrm>
+          <a:prstGeom prst="rect">
+            <a:avLst/>
+          </a:prstGeom>
+          <a:noFill/>
+          <a:ln/>
+        </p:spPr>
+        <p:txBody>
+          <a:bodyPr wrap="square" lIns="0" tIns="0" rIns="0" bIns="0" rtlCol="0" anchor="t"/>
+          <a:lstStyle/>
+          <a:p>
+            <a:pPr indent="0" marL="0">
+              <a:buNone/>
+            </a:pPr>
+            <a:r>
+              <a:rPr lang="en-US" sz="1500" b="1" dirty="0">
+                <a:solidFill>
+                  <a:schemeClr val="tx2"/>
+                </a:solidFill>
+              </a:rPr>
+              <a:t>Semantic search</a:t>
+            </a:r>
+            <a:endParaRPr lang="en-US" sz="1500" dirty="0"/>
+          </a:p>
+        </p:txBody>
+      </p:sp>
+      <p:sp>
+        <p:nvSpPr>
+          <p:cNvPr id="44" name="Text 41"/>
+          <p:cNvSpPr txBox="1"/>
+          <p:nvPr/>
+        </p:nvSpPr>
+        <p:spPr>
+          <a:xfrm>
+            <a:off x="9044788" y="5550408"/>
+            <a:ext cx="2461108" cy="274320"/>
+          </a:xfrm>
+          <a:prstGeom prst="rect">
+            <a:avLst/>
+          </a:prstGeom>
+          <a:noFill/>
+          <a:ln/>
+        </p:spPr>
+        <p:txBody>
+          <a:bodyPr wrap="square" lIns="0" tIns="0" rIns="0" bIns="0" rtlCol="0" anchor="t"/>
+          <a:lstStyle/>
+          <a:p>
+            <a:pPr indent="0" marL="0">
+              <a:buNone/>
+            </a:pPr>
+            <a:r>
+              <a:rPr lang="en-US" sz="1050" b="1" dirty="0">
+                <a:solidFill>
+                  <a:schemeClr val="accent2"/>
+                </a:solidFill>
+                <a:latin typeface="Courier New" pitchFamily="34" charset="0"/>
+                <a:ea typeface="Courier New" pitchFamily="34" charset="-122"/>
+                <a:cs typeface="Courier New" pitchFamily="34" charset="-120"/>
+              </a:rPr>
+              <a:t>VECTOR(384) · VECTOR_DISTANCE</a:t>
+            </a:r>
+            <a:endParaRPr lang="en-US" sz="1050" dirty="0"/>
           </a:p>
         </p:txBody>
       </p:sp>
@@ -8964,7 +9417,7 @@
                 <a:ea typeface="Cambria" pitchFamily="34" charset="-122"/>
                 <a:cs typeface="Cambria" pitchFamily="34" charset="-120"/>
               </a:rPr>
-              <a:t>Future scope</a:t>
+              <a:t>Smart Warehouse in action</a:t>
             </a:r>
             <a:endParaRPr lang="en-US" sz="3400" dirty="0"/>
           </a:p>
@@ -8972,18 +9425,18 @@
       </p:sp>
       <p:sp>
         <p:nvSpPr>
-          <p:cNvPr id="3" name="Real devices card"/>
+          <p:cNvPr id="3" name="Cold chain card"/>
           <p:cNvSpPr/>
           <p:nvPr/>
         </p:nvSpPr>
         <p:spPr>
           <a:xfrm>
-            <a:off x="548640" y="1417320"/>
-            <a:ext cx="3520440" cy="2011680"/>
+            <a:off x="548640" y="1325880"/>
+            <a:ext cx="3520440" cy="3928488"/>
           </a:xfrm>
           <a:prstGeom prst="roundRect">
             <a:avLst>
-              <a:gd name="adj" fmla="val 5455"/>
+              <a:gd name="adj" fmla="val 3117"/>
             </a:avLst>
           </a:prstGeom>
           <a:solidFill>
@@ -8999,32 +9452,43 @@
       </p:sp>
       <p:sp>
         <p:nvSpPr>
-          <p:cNvPr id="4" name="Real devices circle"/>
-          <p:cNvSpPr/>
-          <p:nvPr/>
-        </p:nvSpPr>
-        <p:spPr>
-          <a:xfrm>
-            <a:off x="822960" y="1691640"/>
-            <a:ext cx="640080" cy="640080"/>
-          </a:xfrm>
-          <a:prstGeom prst="ellipse">
-            <a:avLst/>
-          </a:prstGeom>
-          <a:solidFill>
-            <a:schemeClr val="accent1"/>
-          </a:solidFill>
-          <a:ln w="12700">
-            <a:solidFill>
-              <a:schemeClr val="accent1"/>
-            </a:solidFill>
-            <a:prstDash val="solid"/>
-          </a:ln>
-        </p:spPr>
+          <p:cNvPr id="4" name="Text 2"/>
+          <p:cNvSpPr txBox="1"/>
+          <p:nvPr/>
+        </p:nvSpPr>
+        <p:spPr>
+          <a:xfrm>
+            <a:off x="777240" y="1508760"/>
+            <a:ext cx="3063240" cy="365760"/>
+          </a:xfrm>
+          <a:prstGeom prst="rect">
+            <a:avLst/>
+          </a:prstGeom>
+          <a:noFill/>
+          <a:ln/>
+        </p:spPr>
+        <p:txBody>
+          <a:bodyPr wrap="square" lIns="0" tIns="0" rIns="0" bIns="0" rtlCol="0" anchor="t"/>
+          <a:lstStyle/>
+          <a:p>
+            <a:pPr indent="0" marL="0">
+              <a:buNone/>
+            </a:pPr>
+            <a:r>
+              <a:rPr lang="en-US" sz="1700" b="1" dirty="0">
+                <a:solidFill>
+                  <a:schemeClr val="tx2"/>
+                </a:solidFill>
+              </a:rPr>
+              <a:t>Cold chain</a:t>
+            </a:r>
+            <a:endParaRPr lang="en-US" sz="1700" dirty="0"/>
+          </a:p>
+        </p:txBody>
       </p:sp>
       <p:pic>
         <p:nvPicPr>
-          <p:cNvPr id="5" name="Real devices icon" descr="preencoded.png">    </p:cNvPr>
+          <p:cNvPr id="5" name="Cold chain screenshot" descr="preencoded.png">    </p:cNvPr>
           <p:cNvPicPr>
             <a:picLocks noChangeAspect="1"/>
           </p:cNvPicPr>
@@ -9038,12 +9502,19 @@
         </p:blipFill>
         <p:spPr>
           <a:xfrm>
-            <a:off x="982980" y="1851660"/>
-            <a:ext cx="320040" cy="320040"/>
-          </a:xfrm>
-          <a:prstGeom prst="rect">
-            <a:avLst/>
-          </a:prstGeom>
+            <a:off x="777240" y="1984248"/>
+            <a:ext cx="3063240" cy="1642488"/>
+          </a:xfrm>
+          <a:prstGeom prst="rect">
+            <a:avLst/>
+          </a:prstGeom>
+          <a:effectLst>
+            <a:outerShdw sx="100000" sy="100000" kx="0" ky="0" algn="bl" rotWithShape="0" blurRad="101600" dist="25400" dir="5400000">
+              <a:srgbClr val="0B1F3A">
+                <a:alpha val="12000"/>
+              </a:srgbClr>
+            </a:outerShdw>
+          </a:effectLst>
         </p:spPr>
       </p:pic>
       <p:sp>
@@ -9054,31 +9525,34 @@
         </p:nvSpPr>
         <p:spPr>
           <a:xfrm>
-            <a:off x="1600200" y="1737360"/>
-            <a:ext cx="2286000" cy="548640"/>
-          </a:xfrm>
-          <a:prstGeom prst="rect">
-            <a:avLst/>
-          </a:prstGeom>
-          <a:noFill/>
-          <a:ln/>
-        </p:spPr>
-        <p:txBody>
-          <a:bodyPr wrap="square" lIns="0" tIns="0" rIns="0" bIns="0" rtlCol="0" anchor="ctr"/>
-          <a:lstStyle/>
-          <a:p>
-            <a:pPr indent="0" marL="0">
-              <a:buNone/>
-            </a:pPr>
-            <a:r>
-              <a:rPr lang="en-US" sz="1800" b="1" dirty="0">
-                <a:solidFill>
-                  <a:schemeClr val="tx2"/>
-                </a:solidFill>
-              </a:rPr>
-              <a:t>Real devices</a:t>
-            </a:r>
-            <a:endParaRPr lang="en-US" sz="1800" dirty="0"/>
+            <a:off x="777240" y="3809616"/>
+            <a:ext cx="3063240" cy="411480"/>
+          </a:xfrm>
+          <a:prstGeom prst="rect">
+            <a:avLst/>
+          </a:prstGeom>
+          <a:noFill/>
+          <a:ln/>
+        </p:spPr>
+        <p:txBody>
+          <a:bodyPr wrap="square" lIns="0" tIns="0" rIns="0" bIns="0" rtlCol="0" anchor="t"/>
+          <a:lstStyle/>
+          <a:p>
+            <a:pPr indent="0" marL="0">
+              <a:buNone/>
+            </a:pPr>
+            <a:r>
+              <a:rPr lang="en-US" sz="1050" b="1" dirty="0">
+                <a:solidFill>
+                  <a:schemeClr val="accent2"/>
+                </a:solidFill>
+                <a:latin typeface="Courier New" pitchFamily="34" charset="0"/>
+                <a:ea typeface="Courier New" pitchFamily="34" charset="-122"/>
+                <a:cs typeface="Courier New" pitchFamily="34" charset="-120"/>
+              </a:rPr>
+              <a:t>PATTERN (out_of_range{3,})</a:t>
+            </a:r>
+            <a:endParaRPr lang="en-US" sz="1050" dirty="0"/>
           </a:p>
         </p:txBody>
       </p:sp>
@@ -9090,8 +9564,8 @@
         </p:nvSpPr>
         <p:spPr>
           <a:xfrm>
-            <a:off x="822960" y="2514600"/>
-            <a:ext cx="2971800" cy="777240"/>
+            <a:off x="777240" y="4248528"/>
+            <a:ext cx="3063240" cy="868680"/>
           </a:xfrm>
           <a:prstGeom prst="rect">
             <a:avLst/>
@@ -9107,31 +9581,31 @@
               <a:buNone/>
             </a:pPr>
             <a:r>
-              <a:rPr lang="en-US" sz="1500" dirty="0">
+              <a:rPr lang="en-US" sz="1300" dirty="0">
                 <a:solidFill>
                   <a:schemeClr val="tx1"/>
                 </a:solidFill>
               </a:rPr>
-              <a:t>Barcode/RFID scanners and GPS trackers instead of the simulation</a:t>
-            </a:r>
-            <a:endParaRPr lang="en-US" sz="1500" dirty="0"/>
-          </a:p>
-        </p:txBody>
-      </p:sp>
-      <p:sp>
-        <p:nvSpPr>
-          <p:cNvPr id="8" name="Billing and customs card"/>
+              <a:t>A door left open: three warm readings in a row → insulin lots on hold and an urgent task, raised by the database itself</a:t>
+            </a:r>
+            <a:endParaRPr lang="en-US" sz="1300" dirty="0"/>
+          </a:p>
+        </p:txBody>
+      </p:sp>
+      <p:sp>
+        <p:nvSpPr>
+          <p:cNvPr id="8" name="Tamper-proof ledger card"/>
           <p:cNvSpPr/>
           <p:nvPr/>
         </p:nvSpPr>
         <p:spPr>
           <a:xfrm>
-            <a:off x="4425696" y="1417320"/>
-            <a:ext cx="3520440" cy="2011680"/>
+            <a:off x="4425696" y="1325880"/>
+            <a:ext cx="3520440" cy="3928488"/>
           </a:xfrm>
           <a:prstGeom prst="roundRect">
             <a:avLst>
-              <a:gd name="adj" fmla="val 5455"/>
+              <a:gd name="adj" fmla="val 3117"/>
             </a:avLst>
           </a:prstGeom>
           <a:solidFill>
@@ -9147,32 +9621,43 @@
       </p:sp>
       <p:sp>
         <p:nvSpPr>
-          <p:cNvPr id="9" name="Billing and customs circle"/>
-          <p:cNvSpPr/>
-          <p:nvPr/>
-        </p:nvSpPr>
-        <p:spPr>
-          <a:xfrm>
-            <a:off x="4700016" y="1691640"/>
-            <a:ext cx="640080" cy="640080"/>
-          </a:xfrm>
-          <a:prstGeom prst="ellipse">
-            <a:avLst/>
-          </a:prstGeom>
-          <a:solidFill>
-            <a:schemeClr val="accent2"/>
-          </a:solidFill>
-          <a:ln w="12700">
-            <a:solidFill>
-              <a:schemeClr val="accent2"/>
-            </a:solidFill>
-            <a:prstDash val="solid"/>
-          </a:ln>
-        </p:spPr>
+          <p:cNvPr id="9" name="Text 6"/>
+          <p:cNvSpPr txBox="1"/>
+          <p:nvPr/>
+        </p:nvSpPr>
+        <p:spPr>
+          <a:xfrm>
+            <a:off x="4654296" y="1508760"/>
+            <a:ext cx="3063240" cy="365760"/>
+          </a:xfrm>
+          <a:prstGeom prst="rect">
+            <a:avLst/>
+          </a:prstGeom>
+          <a:noFill/>
+          <a:ln/>
+        </p:spPr>
+        <p:txBody>
+          <a:bodyPr wrap="square" lIns="0" tIns="0" rIns="0" bIns="0" rtlCol="0" anchor="t"/>
+          <a:lstStyle/>
+          <a:p>
+            <a:pPr indent="0" marL="0">
+              <a:buNone/>
+            </a:pPr>
+            <a:r>
+              <a:rPr lang="en-US" sz="1700" b="1" dirty="0">
+                <a:solidFill>
+                  <a:schemeClr val="tx2"/>
+                </a:solidFill>
+              </a:rPr>
+              <a:t>Tamper-proof ledger</a:t>
+            </a:r>
+            <a:endParaRPr lang="en-US" sz="1700" dirty="0"/>
+          </a:p>
+        </p:txBody>
       </p:sp>
       <p:pic>
         <p:nvPicPr>
-          <p:cNvPr id="10" name="Billing and customs icon" descr="preencoded.png">    </p:cNvPr>
+          <p:cNvPr id="10" name="Tamper-proof ledger screenshot" descr="preencoded.png">    </p:cNvPr>
           <p:cNvPicPr>
             <a:picLocks noChangeAspect="1"/>
           </p:cNvPicPr>
@@ -9186,12 +9671,19 @@
         </p:blipFill>
         <p:spPr>
           <a:xfrm>
-            <a:off x="4860036" y="1851660"/>
-            <a:ext cx="320040" cy="320040"/>
-          </a:xfrm>
-          <a:prstGeom prst="rect">
-            <a:avLst/>
-          </a:prstGeom>
+            <a:off x="4654296" y="1984248"/>
+            <a:ext cx="3063240" cy="1642488"/>
+          </a:xfrm>
+          <a:prstGeom prst="rect">
+            <a:avLst/>
+          </a:prstGeom>
+          <a:effectLst>
+            <a:outerShdw sx="100000" sy="100000" kx="0" ky="0" algn="bl" rotWithShape="0" blurRad="101600" dist="25400" dir="5400000">
+              <a:srgbClr val="0B1F3A">
+                <a:alpha val="12000"/>
+              </a:srgbClr>
+            </a:outerShdw>
+          </a:effectLst>
         </p:spPr>
       </p:pic>
       <p:sp>
@@ -9202,31 +9694,34 @@
         </p:nvSpPr>
         <p:spPr>
           <a:xfrm>
-            <a:off x="5477256" y="1737360"/>
-            <a:ext cx="2286000" cy="548640"/>
-          </a:xfrm>
-          <a:prstGeom prst="rect">
-            <a:avLst/>
-          </a:prstGeom>
-          <a:noFill/>
-          <a:ln/>
-        </p:spPr>
-        <p:txBody>
-          <a:bodyPr wrap="square" lIns="0" tIns="0" rIns="0" bIns="0" rtlCol="0" anchor="ctr"/>
-          <a:lstStyle/>
-          <a:p>
-            <a:pPr indent="0" marL="0">
-              <a:buNone/>
-            </a:pPr>
-            <a:r>
-              <a:rPr lang="en-US" sz="1800" b="1" dirty="0">
-                <a:solidFill>
-                  <a:schemeClr val="tx2"/>
-                </a:solidFill>
-              </a:rPr>
-              <a:t>Billing and customs</a:t>
-            </a:r>
-            <a:endParaRPr lang="en-US" sz="1800" dirty="0"/>
+            <a:off x="4654296" y="3809616"/>
+            <a:ext cx="3063240" cy="411480"/>
+          </a:xfrm>
+          <a:prstGeom prst="rect">
+            <a:avLst/>
+          </a:prstGeom>
+          <a:noFill/>
+          <a:ln/>
+        </p:spPr>
+        <p:txBody>
+          <a:bodyPr wrap="square" lIns="0" tIns="0" rIns="0" bIns="0" rtlCol="0" anchor="t"/>
+          <a:lstStyle/>
+          <a:p>
+            <a:pPr indent="0" marL="0">
+              <a:buNone/>
+            </a:pPr>
+            <a:r>
+              <a:rPr lang="en-US" sz="1050" b="1" dirty="0">
+                <a:solidFill>
+                  <a:schemeClr val="accent2"/>
+                </a:solidFill>
+                <a:latin typeface="Courier New" pitchFamily="34" charset="0"/>
+                <a:ea typeface="Courier New" pitchFamily="34" charset="-122"/>
+                <a:cs typeface="Courier New" pitchFamily="34" charset="-120"/>
+              </a:rPr>
+              <a:t>ORA-05715: operation not allowed on the blockchain table</a:t>
+            </a:r>
+            <a:endParaRPr lang="en-US" sz="1050" dirty="0"/>
           </a:p>
         </p:txBody>
       </p:sp>
@@ -9238,8 +9733,8 @@
         </p:nvSpPr>
         <p:spPr>
           <a:xfrm>
-            <a:off x="4700016" y="2514600"/>
-            <a:ext cx="2971800" cy="777240"/>
+            <a:off x="4654296" y="4248528"/>
+            <a:ext cx="3063240" cy="868680"/>
           </a:xfrm>
           <a:prstGeom prst="rect">
             <a:avLst/>
@@ -9255,31 +9750,31 @@
               <a:buNone/>
             </a:pPr>
             <a:r>
-              <a:rPr lang="en-US" sz="1500" dirty="0">
+              <a:rPr lang="en-US" sz="1300" dirty="0">
                 <a:solidFill>
                   <a:schemeClr val="tx1"/>
                 </a:solidFill>
               </a:rPr>
-              <a:t>Invoices, payments and customs documents</a:t>
-            </a:r>
-            <a:endParaRPr lang="en-US" sz="1500" dirty="0"/>
-          </a:p>
-        </p:txBody>
-      </p:sp>
-      <p:sp>
-        <p:nvSpPr>
-          <p:cNvPr id="13" name="Forecasting card"/>
+              <a:t>Any UPDATE of the stock ledger is refused; the chain of hashes is verified on demand</a:t>
+            </a:r>
+            <a:endParaRPr lang="en-US" sz="1300" dirty="0"/>
+          </a:p>
+        </p:txBody>
+      </p:sp>
+      <p:sp>
+        <p:nvSpPr>
+          <p:cNvPr id="13" name="Forecast and reorder card"/>
           <p:cNvSpPr/>
           <p:nvPr/>
         </p:nvSpPr>
         <p:spPr>
           <a:xfrm>
-            <a:off x="8302752" y="1417320"/>
-            <a:ext cx="3520440" cy="2011680"/>
+            <a:off x="8302752" y="1325880"/>
+            <a:ext cx="3520440" cy="3928488"/>
           </a:xfrm>
           <a:prstGeom prst="roundRect">
             <a:avLst>
-              <a:gd name="adj" fmla="val 5455"/>
+              <a:gd name="adj" fmla="val 3117"/>
             </a:avLst>
           </a:prstGeom>
           <a:solidFill>
@@ -9295,32 +9790,43 @@
       </p:sp>
       <p:sp>
         <p:nvSpPr>
-          <p:cNvPr id="14" name="Forecasting circle"/>
-          <p:cNvSpPr/>
-          <p:nvPr/>
-        </p:nvSpPr>
-        <p:spPr>
-          <a:xfrm>
-            <a:off x="8577072" y="1691640"/>
-            <a:ext cx="640080" cy="640080"/>
-          </a:xfrm>
-          <a:prstGeom prst="ellipse">
-            <a:avLst/>
-          </a:prstGeom>
-          <a:solidFill>
-            <a:schemeClr val="accent1"/>
-          </a:solidFill>
-          <a:ln w="12700">
-            <a:solidFill>
-              <a:schemeClr val="accent1"/>
-            </a:solidFill>
-            <a:prstDash val="solid"/>
-          </a:ln>
-        </p:spPr>
+          <p:cNvPr id="14" name="Text 10"/>
+          <p:cNvSpPr txBox="1"/>
+          <p:nvPr/>
+        </p:nvSpPr>
+        <p:spPr>
+          <a:xfrm>
+            <a:off x="8531352" y="1508760"/>
+            <a:ext cx="3063240" cy="365760"/>
+          </a:xfrm>
+          <a:prstGeom prst="rect">
+            <a:avLst/>
+          </a:prstGeom>
+          <a:noFill/>
+          <a:ln/>
+        </p:spPr>
+        <p:txBody>
+          <a:bodyPr wrap="square" lIns="0" tIns="0" rIns="0" bIns="0" rtlCol="0" anchor="t"/>
+          <a:lstStyle/>
+          <a:p>
+            <a:pPr indent="0" marL="0">
+              <a:buNone/>
+            </a:pPr>
+            <a:r>
+              <a:rPr lang="en-US" sz="1700" b="1" dirty="0">
+                <a:solidFill>
+                  <a:schemeClr val="tx2"/>
+                </a:solidFill>
+              </a:rPr>
+              <a:t>Forecast and reorder</a:t>
+            </a:r>
+            <a:endParaRPr lang="en-US" sz="1700" dirty="0"/>
+          </a:p>
+        </p:txBody>
       </p:sp>
       <p:pic>
         <p:nvPicPr>
-          <p:cNvPr id="15" name="Forecasting icon" descr="preencoded.png">    </p:cNvPr>
+          <p:cNvPr id="15" name="Forecast and reorder screenshot" descr="preencoded.png">    </p:cNvPr>
           <p:cNvPicPr>
             <a:picLocks noChangeAspect="1"/>
           </p:cNvPicPr>
@@ -9334,12 +9840,19 @@
         </p:blipFill>
         <p:spPr>
           <a:xfrm>
-            <a:off x="8737092" y="1851660"/>
-            <a:ext cx="320040" cy="320040"/>
-          </a:xfrm>
-          <a:prstGeom prst="rect">
-            <a:avLst/>
-          </a:prstGeom>
+            <a:off x="8531352" y="1984248"/>
+            <a:ext cx="3063240" cy="1642488"/>
+          </a:xfrm>
+          <a:prstGeom prst="rect">
+            <a:avLst/>
+          </a:prstGeom>
+          <a:effectLst>
+            <a:outerShdw sx="100000" sy="100000" kx="0" ky="0" algn="bl" rotWithShape="0" blurRad="101600" dist="25400" dir="5400000">
+              <a:srgbClr val="0B1F3A">
+                <a:alpha val="12000"/>
+              </a:srgbClr>
+            </a:outerShdw>
+          </a:effectLst>
         </p:spPr>
       </p:pic>
       <p:sp>
@@ -9350,31 +9863,34 @@
         </p:nvSpPr>
         <p:spPr>
           <a:xfrm>
-            <a:off x="9354312" y="1737360"/>
-            <a:ext cx="2286000" cy="548640"/>
-          </a:xfrm>
-          <a:prstGeom prst="rect">
-            <a:avLst/>
-          </a:prstGeom>
-          <a:noFill/>
-          <a:ln/>
-        </p:spPr>
-        <p:txBody>
-          <a:bodyPr wrap="square" lIns="0" tIns="0" rIns="0" bIns="0" rtlCol="0" anchor="ctr"/>
-          <a:lstStyle/>
-          <a:p>
-            <a:pPr indent="0" marL="0">
-              <a:buNone/>
-            </a:pPr>
-            <a:r>
-              <a:rPr lang="en-US" sz="1800" b="1" dirty="0">
-                <a:solidFill>
-                  <a:schemeClr val="tx2"/>
-                </a:solidFill>
-              </a:rPr>
-              <a:t>Forecasting</a:t>
-            </a:r>
-            <a:endParaRPr lang="en-US" sz="1800" dirty="0"/>
+            <a:off x="8531352" y="3809616"/>
+            <a:ext cx="3063240" cy="411480"/>
+          </a:xfrm>
+          <a:prstGeom prst="rect">
+            <a:avLst/>
+          </a:prstGeom>
+          <a:noFill/>
+          <a:ln/>
+        </p:spPr>
+        <p:txBody>
+          <a:bodyPr wrap="square" lIns="0" tIns="0" rIns="0" bIns="0" rtlCol="0" anchor="t"/>
+          <a:lstStyle/>
+          <a:p>
+            <a:pPr indent="0" marL="0">
+              <a:buNone/>
+            </a:pPr>
+            <a:r>
+              <a:rPr lang="en-US" sz="1050" b="1" dirty="0">
+                <a:solidFill>
+                  <a:schemeClr val="accent2"/>
+                </a:solidFill>
+                <a:latin typeface="Courier New" pitchFamily="34" charset="0"/>
+                <a:ea typeface="Courier New" pitchFamily="34" charset="-122"/>
+                <a:cs typeface="Courier New" pitchFamily="34" charset="-120"/>
+              </a:rPr>
+              <a:t>MODEL … RULES (trend[ANY] = …)</a:t>
+            </a:r>
+            <a:endParaRPr lang="en-US" sz="1050" dirty="0"/>
           </a:p>
         </p:txBody>
       </p:sp>
@@ -9386,8 +9902,8 @@
         </p:nvSpPr>
         <p:spPr>
           <a:xfrm>
-            <a:off x="8577072" y="2514600"/>
-            <a:ext cx="2971800" cy="777240"/>
+            <a:off x="8531352" y="4248528"/>
+            <a:ext cx="3063240" cy="868680"/>
           </a:xfrm>
           <a:prstGeom prst="rect">
             <a:avLst/>
@@ -9403,458 +9919,14 @@
               <a:buNone/>
             </a:pPr>
             <a:r>
-              <a:rPr lang="en-US" sz="1500" dirty="0">
+              <a:rPr lang="en-US" sz="1300" dirty="0">
                 <a:solidFill>
                   <a:schemeClr val="tx1"/>
                 </a:solidFill>
               </a:rPr>
-              <a:t>Predict demand and stock from the stored history</a:t>
-            </a:r>
-            <a:endParaRPr lang="en-US" sz="1500" dirty="0"/>
-          </a:p>
-        </p:txBody>
-      </p:sp>
-      <p:sp>
-        <p:nvSpPr>
-          <p:cNvPr id="18" name="Mobile app card"/>
-          <p:cNvSpPr/>
-          <p:nvPr/>
-        </p:nvSpPr>
-        <p:spPr>
-          <a:xfrm>
-            <a:off x="548640" y="3749040"/>
-            <a:ext cx="3520440" cy="2011680"/>
-          </a:xfrm>
-          <a:prstGeom prst="roundRect">
-            <a:avLst>
-              <a:gd name="adj" fmla="val 5455"/>
-            </a:avLst>
-          </a:prstGeom>
-          <a:solidFill>
-            <a:schemeClr val="bg2"/>
-          </a:solidFill>
-          <a:ln w="12700">
-            <a:solidFill>
-              <a:schemeClr val="bg2"/>
-            </a:solidFill>
-            <a:prstDash val="solid"/>
-          </a:ln>
-        </p:spPr>
-      </p:sp>
-      <p:sp>
-        <p:nvSpPr>
-          <p:cNvPr id="19" name="Mobile app circle"/>
-          <p:cNvSpPr/>
-          <p:nvPr/>
-        </p:nvSpPr>
-        <p:spPr>
-          <a:xfrm>
-            <a:off x="822960" y="4023360"/>
-            <a:ext cx="640080" cy="640080"/>
-          </a:xfrm>
-          <a:prstGeom prst="ellipse">
-            <a:avLst/>
-          </a:prstGeom>
-          <a:solidFill>
-            <a:schemeClr val="accent2"/>
-          </a:solidFill>
-          <a:ln w="12700">
-            <a:solidFill>
-              <a:schemeClr val="accent2"/>
-            </a:solidFill>
-            <a:prstDash val="solid"/>
-          </a:ln>
-        </p:spPr>
-      </p:sp>
-      <p:pic>
-        <p:nvPicPr>
-          <p:cNvPr id="20" name="Mobile app icon" descr="preencoded.png">    </p:cNvPr>
-          <p:cNvPicPr>
-            <a:picLocks noChangeAspect="1"/>
-          </p:cNvPicPr>
-          <p:nvPr/>
-        </p:nvPicPr>
-        <p:blipFill>
-          <a:blip r:embed="rId4"/>
-          <a:stretch>
-            <a:fillRect/>
-          </a:stretch>
-        </p:blipFill>
-        <p:spPr>
-          <a:xfrm>
-            <a:off x="982980" y="4183380"/>
-            <a:ext cx="320040" cy="320040"/>
-          </a:xfrm>
-          <a:prstGeom prst="rect">
-            <a:avLst/>
-          </a:prstGeom>
-        </p:spPr>
-      </p:pic>
-      <p:sp>
-        <p:nvSpPr>
-          <p:cNvPr id="21" name="Text 15"/>
-          <p:cNvSpPr txBox="1"/>
-          <p:nvPr/>
-        </p:nvSpPr>
-        <p:spPr>
-          <a:xfrm>
-            <a:off x="1600200" y="4069080"/>
-            <a:ext cx="2286000" cy="548640"/>
-          </a:xfrm>
-          <a:prstGeom prst="rect">
-            <a:avLst/>
-          </a:prstGeom>
-          <a:noFill/>
-          <a:ln/>
-        </p:spPr>
-        <p:txBody>
-          <a:bodyPr wrap="square" lIns="0" tIns="0" rIns="0" bIns="0" rtlCol="0" anchor="ctr"/>
-          <a:lstStyle/>
-          <a:p>
-            <a:pPr indent="0" marL="0">
-              <a:buNone/>
-            </a:pPr>
-            <a:r>
-              <a:rPr lang="en-US" sz="1800" b="1" dirty="0">
-                <a:solidFill>
-                  <a:schemeClr val="tx2"/>
-                </a:solidFill>
-              </a:rPr>
-              <a:t>Mobile app</a:t>
-            </a:r>
-            <a:endParaRPr lang="en-US" sz="1800" dirty="0"/>
-          </a:p>
-        </p:txBody>
-      </p:sp>
-      <p:sp>
-        <p:nvSpPr>
-          <p:cNvPr id="22" name="Text 16"/>
-          <p:cNvSpPr txBox="1"/>
-          <p:nvPr/>
-        </p:nvSpPr>
-        <p:spPr>
-          <a:xfrm>
-            <a:off x="822960" y="4846320"/>
-            <a:ext cx="2971800" cy="777240"/>
-          </a:xfrm>
-          <a:prstGeom prst="rect">
-            <a:avLst/>
-          </a:prstGeom>
-          <a:noFill/>
-          <a:ln/>
-        </p:spPr>
-        <p:txBody>
-          <a:bodyPr wrap="square" lIns="0" tIns="0" rIns="0" bIns="0" rtlCol="0" anchor="t"/>
-          <a:lstStyle/>
-          <a:p>
-            <a:pPr indent="0" marL="0">
-              <a:buNone/>
-            </a:pPr>
-            <a:r>
-              <a:rPr lang="en-US" sz="1500" dirty="0">
-                <a:solidFill>
-                  <a:schemeClr val="tx1"/>
-                </a:solidFill>
-              </a:rPr>
-              <a:t>Operators update tasks on the warehouse floor</a:t>
-            </a:r>
-            <a:endParaRPr lang="en-US" sz="1500" dirty="0"/>
-          </a:p>
-        </p:txBody>
-      </p:sp>
-      <p:sp>
-        <p:nvSpPr>
-          <p:cNvPr id="23" name="Cloud database card"/>
-          <p:cNvSpPr/>
-          <p:nvPr/>
-        </p:nvSpPr>
-        <p:spPr>
-          <a:xfrm>
-            <a:off x="4425696" y="3749040"/>
-            <a:ext cx="3520440" cy="2011680"/>
-          </a:xfrm>
-          <a:prstGeom prst="roundRect">
-            <a:avLst>
-              <a:gd name="adj" fmla="val 5455"/>
-            </a:avLst>
-          </a:prstGeom>
-          <a:solidFill>
-            <a:schemeClr val="bg2"/>
-          </a:solidFill>
-          <a:ln w="12700">
-            <a:solidFill>
-              <a:schemeClr val="bg2"/>
-            </a:solidFill>
-            <a:prstDash val="solid"/>
-          </a:ln>
-        </p:spPr>
-      </p:sp>
-      <p:sp>
-        <p:nvSpPr>
-          <p:cNvPr id="24" name="Cloud database circle"/>
-          <p:cNvSpPr/>
-          <p:nvPr/>
-        </p:nvSpPr>
-        <p:spPr>
-          <a:xfrm>
-            <a:off x="4700016" y="4023360"/>
-            <a:ext cx="640080" cy="640080"/>
-          </a:xfrm>
-          <a:prstGeom prst="ellipse">
-            <a:avLst/>
-          </a:prstGeom>
-          <a:solidFill>
-            <a:schemeClr val="accent1"/>
-          </a:solidFill>
-          <a:ln w="12700">
-            <a:solidFill>
-              <a:schemeClr val="accent1"/>
-            </a:solidFill>
-            <a:prstDash val="solid"/>
-          </a:ln>
-        </p:spPr>
-      </p:sp>
-      <p:pic>
-        <p:nvPicPr>
-          <p:cNvPr id="25" name="Cloud database icon" descr="preencoded.png">    </p:cNvPr>
-          <p:cNvPicPr>
-            <a:picLocks noChangeAspect="1"/>
-          </p:cNvPicPr>
-          <p:nvPr/>
-        </p:nvPicPr>
-        <p:blipFill>
-          <a:blip r:embed="rId5"/>
-          <a:stretch>
-            <a:fillRect/>
-          </a:stretch>
-        </p:blipFill>
-        <p:spPr>
-          <a:xfrm>
-            <a:off x="4860036" y="4183380"/>
-            <a:ext cx="320040" cy="320040"/>
-          </a:xfrm>
-          <a:prstGeom prst="rect">
-            <a:avLst/>
-          </a:prstGeom>
-        </p:spPr>
-      </p:pic>
-      <p:sp>
-        <p:nvSpPr>
-          <p:cNvPr id="26" name="Text 19"/>
-          <p:cNvSpPr txBox="1"/>
-          <p:nvPr/>
-        </p:nvSpPr>
-        <p:spPr>
-          <a:xfrm>
-            <a:off x="5477256" y="4069080"/>
-            <a:ext cx="2286000" cy="548640"/>
-          </a:xfrm>
-          <a:prstGeom prst="rect">
-            <a:avLst/>
-          </a:prstGeom>
-          <a:noFill/>
-          <a:ln/>
-        </p:spPr>
-        <p:txBody>
-          <a:bodyPr wrap="square" lIns="0" tIns="0" rIns="0" bIns="0" rtlCol="0" anchor="ctr"/>
-          <a:lstStyle/>
-          <a:p>
-            <a:pPr indent="0" marL="0">
-              <a:buNone/>
-            </a:pPr>
-            <a:r>
-              <a:rPr lang="en-US" sz="1800" b="1" dirty="0">
-                <a:solidFill>
-                  <a:schemeClr val="tx2"/>
-                </a:solidFill>
-              </a:rPr>
-              <a:t>Cloud database</a:t>
-            </a:r>
-            <a:endParaRPr lang="en-US" sz="1800" dirty="0"/>
-          </a:p>
-        </p:txBody>
-      </p:sp>
-      <p:sp>
-        <p:nvSpPr>
-          <p:cNvPr id="27" name="Text 20"/>
-          <p:cNvSpPr txBox="1"/>
-          <p:nvPr/>
-        </p:nvSpPr>
-        <p:spPr>
-          <a:xfrm>
-            <a:off x="4700016" y="4846320"/>
-            <a:ext cx="2971800" cy="777240"/>
-          </a:xfrm>
-          <a:prstGeom prst="rect">
-            <a:avLst/>
-          </a:prstGeom>
-          <a:noFill/>
-          <a:ln/>
-        </p:spPr>
-        <p:txBody>
-          <a:bodyPr wrap="square" lIns="0" tIns="0" rIns="0" bIns="0" rtlCol="0" anchor="t"/>
-          <a:lstStyle/>
-          <a:p>
-            <a:pPr indent="0" marL="0">
-              <a:buNone/>
-            </a:pPr>
-            <a:r>
-              <a:rPr lang="en-US" sz="1500" dirty="0">
-                <a:solidFill>
-                  <a:schemeClr val="tx1"/>
-                </a:solidFill>
-              </a:rPr>
-              <a:t>Oracle Autonomous Database for many sites</a:t>
-            </a:r>
-            <a:endParaRPr lang="en-US" sz="1500" dirty="0"/>
-          </a:p>
-        </p:txBody>
-      </p:sp>
-      <p:sp>
-        <p:nvSpPr>
-          <p:cNvPr id="28" name="High availability card"/>
-          <p:cNvSpPr/>
-          <p:nvPr/>
-        </p:nvSpPr>
-        <p:spPr>
-          <a:xfrm>
-            <a:off x="8302752" y="3749040"/>
-            <a:ext cx="3520440" cy="2011680"/>
-          </a:xfrm>
-          <a:prstGeom prst="roundRect">
-            <a:avLst>
-              <a:gd name="adj" fmla="val 5455"/>
-            </a:avLst>
-          </a:prstGeom>
-          <a:solidFill>
-            <a:schemeClr val="bg2"/>
-          </a:solidFill>
-          <a:ln w="12700">
-            <a:solidFill>
-              <a:schemeClr val="bg2"/>
-            </a:solidFill>
-            <a:prstDash val="solid"/>
-          </a:ln>
-        </p:spPr>
-      </p:sp>
-      <p:sp>
-        <p:nvSpPr>
-          <p:cNvPr id="29" name="High availability circle"/>
-          <p:cNvSpPr/>
-          <p:nvPr/>
-        </p:nvSpPr>
-        <p:spPr>
-          <a:xfrm>
-            <a:off x="8577072" y="4023360"/>
-            <a:ext cx="640080" cy="640080"/>
-          </a:xfrm>
-          <a:prstGeom prst="ellipse">
-            <a:avLst/>
-          </a:prstGeom>
-          <a:solidFill>
-            <a:schemeClr val="accent2"/>
-          </a:solidFill>
-          <a:ln w="12700">
-            <a:solidFill>
-              <a:schemeClr val="accent2"/>
-            </a:solidFill>
-            <a:prstDash val="solid"/>
-          </a:ln>
-        </p:spPr>
-      </p:sp>
-      <p:pic>
-        <p:nvPicPr>
-          <p:cNvPr id="30" name="High availability icon" descr="preencoded.png">    </p:cNvPr>
-          <p:cNvPicPr>
-            <a:picLocks noChangeAspect="1"/>
-          </p:cNvPicPr>
-          <p:nvPr/>
-        </p:nvPicPr>
-        <p:blipFill>
-          <a:blip r:embed="rId6"/>
-          <a:stretch>
-            <a:fillRect/>
-          </a:stretch>
-        </p:blipFill>
-        <p:spPr>
-          <a:xfrm>
-            <a:off x="8737092" y="4183380"/>
-            <a:ext cx="320040" cy="320040"/>
-          </a:xfrm>
-          <a:prstGeom prst="rect">
-            <a:avLst/>
-          </a:prstGeom>
-        </p:spPr>
-      </p:pic>
-      <p:sp>
-        <p:nvSpPr>
-          <p:cNvPr id="31" name="Text 23"/>
-          <p:cNvSpPr txBox="1"/>
-          <p:nvPr/>
-        </p:nvSpPr>
-        <p:spPr>
-          <a:xfrm>
-            <a:off x="9354312" y="4069080"/>
-            <a:ext cx="2286000" cy="548640"/>
-          </a:xfrm>
-          <a:prstGeom prst="rect">
-            <a:avLst/>
-          </a:prstGeom>
-          <a:noFill/>
-          <a:ln/>
-        </p:spPr>
-        <p:txBody>
-          <a:bodyPr wrap="square" lIns="0" tIns="0" rIns="0" bIns="0" rtlCol="0" anchor="ctr"/>
-          <a:lstStyle/>
-          <a:p>
-            <a:pPr indent="0" marL="0">
-              <a:buNone/>
-            </a:pPr>
-            <a:r>
-              <a:rPr lang="en-US" sz="1800" b="1" dirty="0">
-                <a:solidFill>
-                  <a:schemeClr val="tx2"/>
-                </a:solidFill>
-              </a:rPr>
-              <a:t>High availability</a:t>
-            </a:r>
-            <a:endParaRPr lang="en-US" sz="1800" dirty="0"/>
-          </a:p>
-        </p:txBody>
-      </p:sp>
-      <p:sp>
-        <p:nvSpPr>
-          <p:cNvPr id="32" name="Text 24"/>
-          <p:cNvSpPr txBox="1"/>
-          <p:nvPr/>
-        </p:nvSpPr>
-        <p:spPr>
-          <a:xfrm>
-            <a:off x="8577072" y="4846320"/>
-            <a:ext cx="2971800" cy="777240"/>
-          </a:xfrm>
-          <a:prstGeom prst="rect">
-            <a:avLst/>
-          </a:prstGeom>
-          <a:noFill/>
-          <a:ln/>
-        </p:spPr>
-        <p:txBody>
-          <a:bodyPr wrap="square" lIns="0" tIns="0" rIns="0" bIns="0" rtlCol="0" anchor="t"/>
-          <a:lstStyle/>
-          <a:p>
-            <a:pPr indent="0" marL="0">
-              <a:buNone/>
-            </a:pPr>
-            <a:r>
-              <a:rPr lang="en-US" sz="1500" dirty="0">
-                <a:solidFill>
-                  <a:schemeClr val="tx1"/>
-                </a:solidFill>
-              </a:rPr>
-              <a:t>Data Guard and scheduled RMAN backups</a:t>
-            </a:r>
-            <a:endParaRPr lang="en-US" sz="1500" dirty="0"/>
+              <a:t>Trend and weekday pattern from the demand history; reorder point and order size for every product</a:t>
+            </a:r>
+            <a:endParaRPr lang="en-US" sz="1300" dirty="0"/>
           </a:p>
         </p:txBody>
       </p:sp>
@@ -9938,47 +10010,72 @@
         </p:nvSpPr>
         <p:spPr>
           <a:xfrm>
-            <a:off x="548640" y="640080"/>
-            <a:ext cx="11094415" cy="914400"/>
-          </a:xfrm>
-          <a:prstGeom prst="rect">
-            <a:avLst/>
-          </a:prstGeom>
-          <a:noFill/>
-          <a:ln/>
-        </p:spPr>
-        <p:txBody>
-          <a:bodyPr wrap="square" lIns="0" tIns="0" rIns="0" bIns="0" rtlCol="0"/>
+            <a:off x="548640" y="365760"/>
+            <a:ext cx="11094415" cy="822960"/>
+          </a:xfrm>
+          <a:prstGeom prst="rect">
+            <a:avLst/>
+          </a:prstGeom>
+          <a:noFill/>
+          <a:ln/>
+        </p:spPr>
+        <p:txBody>
+          <a:bodyPr wrap="square" lIns="0" tIns="0" rIns="0" bIns="0" rtlCol="0" anchor="ctr"/>
           <a:lstStyle/>
           <a:p>
             <a:pPr algn="l" indent="0" marL="0">
               <a:buNone/>
             </a:pPr>
             <a:r>
-              <a:rPr lang="en-US" sz="4000" b="1" dirty="0">
-                <a:solidFill>
-                  <a:schemeClr val="bg1"/>
+              <a:rPr lang="en-US" sz="3400" b="1" dirty="0">
+                <a:solidFill>
+                  <a:schemeClr val="tx2"/>
                 </a:solidFill>
                 <a:latin typeface="Cambria" pitchFamily="34" charset="0"/>
                 <a:ea typeface="Cambria" pitchFamily="34" charset="-122"/>
                 <a:cs typeface="Cambria" pitchFamily="34" charset="-120"/>
               </a:rPr>
-              <a:t>Conclusion</a:t>
-            </a:r>
-            <a:endParaRPr lang="en-US" sz="4000" dirty="0"/>
-          </a:p>
-        </p:txBody>
-      </p:sp>
-      <p:sp>
-        <p:nvSpPr>
-          <p:cNvPr id="3" name="Text 1"/>
-          <p:cNvSpPr txBox="1"/>
-          <p:nvPr/>
-        </p:nvSpPr>
-        <p:spPr>
-          <a:xfrm>
-            <a:off x="548640" y="1828800"/>
-            <a:ext cx="1737360" cy="548640"/>
+              <a:t>Built in ten steps</a:t>
+            </a:r>
+            <a:endParaRPr lang="en-US" sz="3400" dirty="0"/>
+          </a:p>
+        </p:txBody>
+      </p:sp>
+      <p:sp>
+        <p:nvSpPr>
+          <p:cNvPr id="3" name="Step 1 marker"/>
+          <p:cNvSpPr/>
+          <p:nvPr/>
+        </p:nvSpPr>
+        <p:spPr>
+          <a:xfrm>
+            <a:off x="548640" y="1508760"/>
+            <a:ext cx="548640" cy="548640"/>
+          </a:xfrm>
+          <a:prstGeom prst="ellipse">
+            <a:avLst/>
+          </a:prstGeom>
+          <a:solidFill>
+            <a:srgbClr val="E8792B"/>
+          </a:solidFill>
+          <a:ln w="12700">
+            <a:solidFill>
+              <a:srgbClr val="E8792B"/>
+            </a:solidFill>
+            <a:prstDash val="solid"/>
+          </a:ln>
+        </p:spPr>
+      </p:sp>
+      <p:sp>
+        <p:nvSpPr>
+          <p:cNvPr id="4" name="Text 2"/>
+          <p:cNvSpPr txBox="1"/>
+          <p:nvPr/>
+        </p:nvSpPr>
+        <p:spPr>
+          <a:xfrm>
+            <a:off x="548640" y="1508760"/>
+            <a:ext cx="548640" cy="548640"/>
           </a:xfrm>
           <a:prstGeom prst="rect">
             <a:avLst/>
@@ -9990,324 +10087,1540 @@
           <a:bodyPr wrap="square" lIns="0" tIns="0" rIns="0" bIns="0" rtlCol="0" anchor="ctr"/>
           <a:lstStyle/>
           <a:p>
-            <a:pPr indent="0" marL="0">
-              <a:buNone/>
-            </a:pPr>
-            <a:r>
-              <a:rPr lang="en-US" sz="2400" b="1" dirty="0">
-                <a:solidFill>
-                  <a:schemeClr val="accent1"/>
+            <a:pPr algn="ctr" indent="0" marL="0">
+              <a:buNone/>
+            </a:pPr>
+            <a:r>
+              <a:rPr lang="en-US" sz="1800" b="1" dirty="0">
+                <a:solidFill>
+                  <a:schemeClr val="bg1"/>
+                </a:solidFill>
+              </a:rPr>
+              <a:t>1</a:t>
+            </a:r>
+            <a:endParaRPr lang="en-US" sz="1800" dirty="0"/>
+          </a:p>
+        </p:txBody>
+      </p:sp>
+      <p:sp>
+        <p:nvSpPr>
+          <p:cNvPr id="5" name="Text 3"/>
+          <p:cNvSpPr txBox="1"/>
+          <p:nvPr/>
+        </p:nvSpPr>
+        <p:spPr>
+          <a:xfrm>
+            <a:off x="548640" y="2194560"/>
+            <a:ext cx="2057400" cy="411480"/>
+          </a:xfrm>
+          <a:prstGeom prst="rect">
+            <a:avLst/>
+          </a:prstGeom>
+          <a:noFill/>
+          <a:ln/>
+        </p:spPr>
+        <p:txBody>
+          <a:bodyPr wrap="square" lIns="0" tIns="0" rIns="0" bIns="0" rtlCol="0" anchor="t"/>
+          <a:lstStyle/>
+          <a:p>
+            <a:pPr indent="0" marL="0">
+              <a:buNone/>
+            </a:pPr>
+            <a:r>
+              <a:rPr lang="en-US" sz="1600" b="1" dirty="0">
+                <a:solidFill>
+                  <a:schemeClr val="tx2"/>
+                </a:solidFill>
+              </a:rPr>
+              <a:t>Requirements</a:t>
+            </a:r>
+            <a:endParaRPr lang="en-US" sz="1600" dirty="0"/>
+          </a:p>
+        </p:txBody>
+      </p:sp>
+      <p:sp>
+        <p:nvSpPr>
+          <p:cNvPr id="6" name="Text 4"/>
+          <p:cNvSpPr txBox="1"/>
+          <p:nvPr/>
+        </p:nvSpPr>
+        <p:spPr>
+          <a:xfrm>
+            <a:off x="548640" y="2606040"/>
+            <a:ext cx="2057400" cy="594360"/>
+          </a:xfrm>
+          <a:prstGeom prst="rect">
+            <a:avLst/>
+          </a:prstGeom>
+          <a:noFill/>
+          <a:ln/>
+        </p:spPr>
+        <p:txBody>
+          <a:bodyPr wrap="square" lIns="0" tIns="0" rIns="0" bIns="0" rtlCol="0" anchor="t"/>
+          <a:lstStyle/>
+          <a:p>
+            <a:pPr indent="0" marL="0">
+              <a:buNone/>
+            </a:pPr>
+            <a:r>
+              <a:rPr lang="en-US" sz="1350" dirty="0">
+                <a:solidFill>
+                  <a:schemeClr val="accent5"/>
+                </a:solidFill>
+              </a:rPr>
+              <a:t>entities, events, roles</a:t>
+            </a:r>
+            <a:endParaRPr lang="en-US" sz="1350" dirty="0"/>
+          </a:p>
+        </p:txBody>
+      </p:sp>
+      <p:sp>
+        <p:nvSpPr>
+          <p:cNvPr id="7" name="Step 2 marker"/>
+          <p:cNvSpPr/>
+          <p:nvPr/>
+        </p:nvSpPr>
+        <p:spPr>
+          <a:xfrm>
+            <a:off x="2807894" y="1508760"/>
+            <a:ext cx="548640" cy="548640"/>
+          </a:xfrm>
+          <a:prstGeom prst="ellipse">
+            <a:avLst/>
+          </a:prstGeom>
+          <a:solidFill>
+            <a:srgbClr val="E8792B"/>
+          </a:solidFill>
+          <a:ln w="12700">
+            <a:solidFill>
+              <a:srgbClr val="E8792B"/>
+            </a:solidFill>
+            <a:prstDash val="solid"/>
+          </a:ln>
+        </p:spPr>
+      </p:sp>
+      <p:sp>
+        <p:nvSpPr>
+          <p:cNvPr id="8" name="Text 6"/>
+          <p:cNvSpPr txBox="1"/>
+          <p:nvPr/>
+        </p:nvSpPr>
+        <p:spPr>
+          <a:xfrm>
+            <a:off x="2807894" y="1508760"/>
+            <a:ext cx="548640" cy="548640"/>
+          </a:xfrm>
+          <a:prstGeom prst="rect">
+            <a:avLst/>
+          </a:prstGeom>
+          <a:noFill/>
+          <a:ln/>
+        </p:spPr>
+        <p:txBody>
+          <a:bodyPr wrap="square" lIns="0" tIns="0" rIns="0" bIns="0" rtlCol="0" anchor="ctr"/>
+          <a:lstStyle/>
+          <a:p>
+            <a:pPr algn="ctr" indent="0" marL="0">
+              <a:buNone/>
+            </a:pPr>
+            <a:r>
+              <a:rPr lang="en-US" sz="1800" b="1" dirty="0">
+                <a:solidFill>
+                  <a:schemeClr val="bg1"/>
+                </a:solidFill>
+              </a:rPr>
+              <a:t>2</a:t>
+            </a:r>
+            <a:endParaRPr lang="en-US" sz="1800" dirty="0"/>
+          </a:p>
+        </p:txBody>
+      </p:sp>
+      <p:sp>
+        <p:nvSpPr>
+          <p:cNvPr id="9" name="Text 7"/>
+          <p:cNvSpPr txBox="1"/>
+          <p:nvPr/>
+        </p:nvSpPr>
+        <p:spPr>
+          <a:xfrm>
+            <a:off x="2807894" y="2194560"/>
+            <a:ext cx="2057400" cy="411480"/>
+          </a:xfrm>
+          <a:prstGeom prst="rect">
+            <a:avLst/>
+          </a:prstGeom>
+          <a:noFill/>
+          <a:ln/>
+        </p:spPr>
+        <p:txBody>
+          <a:bodyPr wrap="square" lIns="0" tIns="0" rIns="0" bIns="0" rtlCol="0" anchor="t"/>
+          <a:lstStyle/>
+          <a:p>
+            <a:pPr indent="0" marL="0">
+              <a:buNone/>
+            </a:pPr>
+            <a:r>
+              <a:rPr lang="en-US" sz="1600" b="1" dirty="0">
+                <a:solidFill>
+                  <a:schemeClr val="tx2"/>
+                </a:solidFill>
+              </a:rPr>
+              <a:t>ER model and 3NF</a:t>
+            </a:r>
+            <a:endParaRPr lang="en-US" sz="1600" dirty="0"/>
+          </a:p>
+        </p:txBody>
+      </p:sp>
+      <p:sp>
+        <p:nvSpPr>
+          <p:cNvPr id="10" name="Text 8"/>
+          <p:cNvSpPr txBox="1"/>
+          <p:nvPr/>
+        </p:nvSpPr>
+        <p:spPr>
+          <a:xfrm>
+            <a:off x="2807894" y="2606040"/>
+            <a:ext cx="2057400" cy="594360"/>
+          </a:xfrm>
+          <a:prstGeom prst="rect">
+            <a:avLst/>
+          </a:prstGeom>
+          <a:noFill/>
+          <a:ln/>
+        </p:spPr>
+        <p:txBody>
+          <a:bodyPr wrap="square" lIns="0" tIns="0" rIns="0" bIns="0" rtlCol="0" anchor="t"/>
+          <a:lstStyle/>
+          <a:p>
+            <a:pPr indent="0" marL="0">
+              <a:buNone/>
+            </a:pPr>
+            <a:r>
+              <a:rPr lang="en-US" sz="1350" dirty="0">
+                <a:solidFill>
+                  <a:schemeClr val="accent5"/>
+                </a:solidFill>
+              </a:rPr>
+              <a:t>normalised design</a:t>
+            </a:r>
+            <a:endParaRPr lang="en-US" sz="1350" dirty="0"/>
+          </a:p>
+        </p:txBody>
+      </p:sp>
+      <p:sp>
+        <p:nvSpPr>
+          <p:cNvPr id="11" name="Step 3 marker"/>
+          <p:cNvSpPr/>
+          <p:nvPr/>
+        </p:nvSpPr>
+        <p:spPr>
+          <a:xfrm>
+            <a:off x="5067148" y="1508760"/>
+            <a:ext cx="548640" cy="548640"/>
+          </a:xfrm>
+          <a:prstGeom prst="ellipse">
+            <a:avLst/>
+          </a:prstGeom>
+          <a:solidFill>
+            <a:srgbClr val="E8792B"/>
+          </a:solidFill>
+          <a:ln w="12700">
+            <a:solidFill>
+              <a:srgbClr val="E8792B"/>
+            </a:solidFill>
+            <a:prstDash val="solid"/>
+          </a:ln>
+        </p:spPr>
+      </p:sp>
+      <p:sp>
+        <p:nvSpPr>
+          <p:cNvPr id="12" name="Text 10"/>
+          <p:cNvSpPr txBox="1"/>
+          <p:nvPr/>
+        </p:nvSpPr>
+        <p:spPr>
+          <a:xfrm>
+            <a:off x="5067148" y="1508760"/>
+            <a:ext cx="548640" cy="548640"/>
+          </a:xfrm>
+          <a:prstGeom prst="rect">
+            <a:avLst/>
+          </a:prstGeom>
+          <a:noFill/>
+          <a:ln/>
+        </p:spPr>
+        <p:txBody>
+          <a:bodyPr wrap="square" lIns="0" tIns="0" rIns="0" bIns="0" rtlCol="0" anchor="ctr"/>
+          <a:lstStyle/>
+          <a:p>
+            <a:pPr algn="ctr" indent="0" marL="0">
+              <a:buNone/>
+            </a:pPr>
+            <a:r>
+              <a:rPr lang="en-US" sz="1800" b="1" dirty="0">
+                <a:solidFill>
+                  <a:schemeClr val="bg1"/>
+                </a:solidFill>
+              </a:rPr>
+              <a:t>3</a:t>
+            </a:r>
+            <a:endParaRPr lang="en-US" sz="1800" dirty="0"/>
+          </a:p>
+        </p:txBody>
+      </p:sp>
+      <p:sp>
+        <p:nvSpPr>
+          <p:cNvPr id="13" name="Text 11"/>
+          <p:cNvSpPr txBox="1"/>
+          <p:nvPr/>
+        </p:nvSpPr>
+        <p:spPr>
+          <a:xfrm>
+            <a:off x="5067148" y="2194560"/>
+            <a:ext cx="2057400" cy="411480"/>
+          </a:xfrm>
+          <a:prstGeom prst="rect">
+            <a:avLst/>
+          </a:prstGeom>
+          <a:noFill/>
+          <a:ln/>
+        </p:spPr>
+        <p:txBody>
+          <a:bodyPr wrap="square" lIns="0" tIns="0" rIns="0" bIns="0" rtlCol="0" anchor="t"/>
+          <a:lstStyle/>
+          <a:p>
+            <a:pPr indent="0" marL="0">
+              <a:buNone/>
+            </a:pPr>
+            <a:r>
+              <a:rPr lang="en-US" sz="1600" b="1" dirty="0">
+                <a:solidFill>
+                  <a:schemeClr val="tx2"/>
+                </a:solidFill>
+              </a:rPr>
+              <a:t>Schema DDL</a:t>
+            </a:r>
+            <a:endParaRPr lang="en-US" sz="1600" dirty="0"/>
+          </a:p>
+        </p:txBody>
+      </p:sp>
+      <p:sp>
+        <p:nvSpPr>
+          <p:cNvPr id="14" name="Text 12"/>
+          <p:cNvSpPr txBox="1"/>
+          <p:nvPr/>
+        </p:nvSpPr>
+        <p:spPr>
+          <a:xfrm>
+            <a:off x="5067148" y="2606040"/>
+            <a:ext cx="2057400" cy="594360"/>
+          </a:xfrm>
+          <a:prstGeom prst="rect">
+            <a:avLst/>
+          </a:prstGeom>
+          <a:noFill/>
+          <a:ln/>
+        </p:spPr>
+        <p:txBody>
+          <a:bodyPr wrap="square" lIns="0" tIns="0" rIns="0" bIns="0" rtlCol="0" anchor="t"/>
+          <a:lstStyle/>
+          <a:p>
+            <a:pPr indent="0" marL="0">
+              <a:buNone/>
+            </a:pPr>
+            <a:r>
+              <a:rPr lang="en-US" sz="1350" dirty="0">
+                <a:solidFill>
+                  <a:schemeClr val="accent5"/>
+                </a:solidFill>
+              </a:rPr>
+              <a:t>keys, constraints, comments</a:t>
+            </a:r>
+            <a:endParaRPr lang="en-US" sz="1350" dirty="0"/>
+          </a:p>
+        </p:txBody>
+      </p:sp>
+      <p:sp>
+        <p:nvSpPr>
+          <p:cNvPr id="15" name="Step 4 marker"/>
+          <p:cNvSpPr/>
+          <p:nvPr/>
+        </p:nvSpPr>
+        <p:spPr>
+          <a:xfrm>
+            <a:off x="7326401" y="1508760"/>
+            <a:ext cx="548640" cy="548640"/>
+          </a:xfrm>
+          <a:prstGeom prst="ellipse">
+            <a:avLst/>
+          </a:prstGeom>
+          <a:solidFill>
+            <a:srgbClr val="E8792B"/>
+          </a:solidFill>
+          <a:ln w="12700">
+            <a:solidFill>
+              <a:srgbClr val="E8792B"/>
+            </a:solidFill>
+            <a:prstDash val="solid"/>
+          </a:ln>
+        </p:spPr>
+      </p:sp>
+      <p:sp>
+        <p:nvSpPr>
+          <p:cNvPr id="16" name="Text 14"/>
+          <p:cNvSpPr txBox="1"/>
+          <p:nvPr/>
+        </p:nvSpPr>
+        <p:spPr>
+          <a:xfrm>
+            <a:off x="7326401" y="1508760"/>
+            <a:ext cx="548640" cy="548640"/>
+          </a:xfrm>
+          <a:prstGeom prst="rect">
+            <a:avLst/>
+          </a:prstGeom>
+          <a:noFill/>
+          <a:ln/>
+        </p:spPr>
+        <p:txBody>
+          <a:bodyPr wrap="square" lIns="0" tIns="0" rIns="0" bIns="0" rtlCol="0" anchor="ctr"/>
+          <a:lstStyle/>
+          <a:p>
+            <a:pPr algn="ctr" indent="0" marL="0">
+              <a:buNone/>
+            </a:pPr>
+            <a:r>
+              <a:rPr lang="en-US" sz="1800" b="1" dirty="0">
+                <a:solidFill>
+                  <a:schemeClr val="bg1"/>
+                </a:solidFill>
+              </a:rPr>
+              <a:t>4</a:t>
+            </a:r>
+            <a:endParaRPr lang="en-US" sz="1800" dirty="0"/>
+          </a:p>
+        </p:txBody>
+      </p:sp>
+      <p:sp>
+        <p:nvSpPr>
+          <p:cNvPr id="17" name="Text 15"/>
+          <p:cNvSpPr txBox="1"/>
+          <p:nvPr/>
+        </p:nvSpPr>
+        <p:spPr>
+          <a:xfrm>
+            <a:off x="7326401" y="2194560"/>
+            <a:ext cx="2057400" cy="411480"/>
+          </a:xfrm>
+          <a:prstGeom prst="rect">
+            <a:avLst/>
+          </a:prstGeom>
+          <a:noFill/>
+          <a:ln/>
+        </p:spPr>
+        <p:txBody>
+          <a:bodyPr wrap="square" lIns="0" tIns="0" rIns="0" bIns="0" rtlCol="0" anchor="t"/>
+          <a:lstStyle/>
+          <a:p>
+            <a:pPr indent="0" marL="0">
+              <a:buNone/>
+            </a:pPr>
+            <a:r>
+              <a:rPr lang="en-US" sz="1600" b="1" dirty="0">
+                <a:solidFill>
+                  <a:schemeClr val="tx2"/>
+                </a:solidFill>
+              </a:rPr>
+              <a:t>PL/SQL and triggers</a:t>
+            </a:r>
+            <a:endParaRPr lang="en-US" sz="1600" dirty="0"/>
+          </a:p>
+        </p:txBody>
+      </p:sp>
+      <p:sp>
+        <p:nvSpPr>
+          <p:cNvPr id="18" name="Text 16"/>
+          <p:cNvSpPr txBox="1"/>
+          <p:nvPr/>
+        </p:nvSpPr>
+        <p:spPr>
+          <a:xfrm>
+            <a:off x="7326401" y="2606040"/>
+            <a:ext cx="2057400" cy="594360"/>
+          </a:xfrm>
+          <a:prstGeom prst="rect">
+            <a:avLst/>
+          </a:prstGeom>
+          <a:noFill/>
+          <a:ln/>
+        </p:spPr>
+        <p:txBody>
+          <a:bodyPr wrap="square" lIns="0" tIns="0" rIns="0" bIns="0" rtlCol="0" anchor="t"/>
+          <a:lstStyle/>
+          <a:p>
+            <a:pPr indent="0" marL="0">
+              <a:buNone/>
+            </a:pPr>
+            <a:r>
+              <a:rPr lang="en-US" sz="1350" dirty="0">
+                <a:solidFill>
+                  <a:schemeClr val="accent5"/>
+                </a:solidFill>
+              </a:rPr>
+              <a:t>rules in the database</a:t>
+            </a:r>
+            <a:endParaRPr lang="en-US" sz="1350" dirty="0"/>
+          </a:p>
+        </p:txBody>
+      </p:sp>
+      <p:sp>
+        <p:nvSpPr>
+          <p:cNvPr id="19" name="Step 5 marker"/>
+          <p:cNvSpPr/>
+          <p:nvPr/>
+        </p:nvSpPr>
+        <p:spPr>
+          <a:xfrm>
+            <a:off x="9585655" y="1508760"/>
+            <a:ext cx="548640" cy="548640"/>
+          </a:xfrm>
+          <a:prstGeom prst="ellipse">
+            <a:avLst/>
+          </a:prstGeom>
+          <a:solidFill>
+            <a:srgbClr val="E8792B"/>
+          </a:solidFill>
+          <a:ln w="12700">
+            <a:solidFill>
+              <a:srgbClr val="E8792B"/>
+            </a:solidFill>
+            <a:prstDash val="solid"/>
+          </a:ln>
+        </p:spPr>
+      </p:sp>
+      <p:sp>
+        <p:nvSpPr>
+          <p:cNvPr id="20" name="Text 18"/>
+          <p:cNvSpPr txBox="1"/>
+          <p:nvPr/>
+        </p:nvSpPr>
+        <p:spPr>
+          <a:xfrm>
+            <a:off x="9585655" y="1508760"/>
+            <a:ext cx="548640" cy="548640"/>
+          </a:xfrm>
+          <a:prstGeom prst="rect">
+            <a:avLst/>
+          </a:prstGeom>
+          <a:noFill/>
+          <a:ln/>
+        </p:spPr>
+        <p:txBody>
+          <a:bodyPr wrap="square" lIns="0" tIns="0" rIns="0" bIns="0" rtlCol="0" anchor="ctr"/>
+          <a:lstStyle/>
+          <a:p>
+            <a:pPr algn="ctr" indent="0" marL="0">
+              <a:buNone/>
+            </a:pPr>
+            <a:r>
+              <a:rPr lang="en-US" sz="1800" b="1" dirty="0">
+                <a:solidFill>
+                  <a:schemeClr val="bg1"/>
+                </a:solidFill>
+              </a:rPr>
+              <a:t>5</a:t>
+            </a:r>
+            <a:endParaRPr lang="en-US" sz="1800" dirty="0"/>
+          </a:p>
+        </p:txBody>
+      </p:sp>
+      <p:sp>
+        <p:nvSpPr>
+          <p:cNvPr id="21" name="Text 19"/>
+          <p:cNvSpPr txBox="1"/>
+          <p:nvPr/>
+        </p:nvSpPr>
+        <p:spPr>
+          <a:xfrm>
+            <a:off x="9585655" y="2194560"/>
+            <a:ext cx="2057400" cy="411480"/>
+          </a:xfrm>
+          <a:prstGeom prst="rect">
+            <a:avLst/>
+          </a:prstGeom>
+          <a:noFill/>
+          <a:ln/>
+        </p:spPr>
+        <p:txBody>
+          <a:bodyPr wrap="square" lIns="0" tIns="0" rIns="0" bIns="0" rtlCol="0" anchor="t"/>
+          <a:lstStyle/>
+          <a:p>
+            <a:pPr indent="0" marL="0">
+              <a:buNone/>
+            </a:pPr>
+            <a:r>
+              <a:rPr lang="en-US" sz="1600" b="1" dirty="0">
+                <a:solidFill>
+                  <a:schemeClr val="tx2"/>
+                </a:solidFill>
+              </a:rPr>
+              <a:t>Views and reports</a:t>
+            </a:r>
+            <a:endParaRPr lang="en-US" sz="1600" dirty="0"/>
+          </a:p>
+        </p:txBody>
+      </p:sp>
+      <p:sp>
+        <p:nvSpPr>
+          <p:cNvPr id="22" name="Text 20"/>
+          <p:cNvSpPr txBox="1"/>
+          <p:nvPr/>
+        </p:nvSpPr>
+        <p:spPr>
+          <a:xfrm>
+            <a:off x="9585655" y="2606040"/>
+            <a:ext cx="2057400" cy="594360"/>
+          </a:xfrm>
+          <a:prstGeom prst="rect">
+            <a:avLst/>
+          </a:prstGeom>
+          <a:noFill/>
+          <a:ln/>
+        </p:spPr>
+        <p:txBody>
+          <a:bodyPr wrap="square" lIns="0" tIns="0" rIns="0" bIns="0" rtlCol="0" anchor="t"/>
+          <a:lstStyle/>
+          <a:p>
+            <a:pPr indent="0" marL="0">
+              <a:buNone/>
+            </a:pPr>
+            <a:r>
+              <a:rPr lang="en-US" sz="1350" dirty="0">
+                <a:solidFill>
+                  <a:schemeClr val="accent5"/>
+                </a:solidFill>
+              </a:rPr>
+              <a:t>17 views, 26 queries</a:t>
+            </a:r>
+            <a:endParaRPr lang="en-US" sz="1350" dirty="0"/>
+          </a:p>
+        </p:txBody>
+      </p:sp>
+      <p:sp>
+        <p:nvSpPr>
+          <p:cNvPr id="23" name="Step 6 marker"/>
+          <p:cNvSpPr/>
+          <p:nvPr/>
+        </p:nvSpPr>
+        <p:spPr>
+          <a:xfrm>
+            <a:off x="548640" y="3703320"/>
+            <a:ext cx="548640" cy="548640"/>
+          </a:xfrm>
+          <a:prstGeom prst="ellipse">
+            <a:avLst/>
+          </a:prstGeom>
+          <a:solidFill>
+            <a:srgbClr val="E8792B"/>
+          </a:solidFill>
+          <a:ln w="12700">
+            <a:solidFill>
+              <a:srgbClr val="E8792B"/>
+            </a:solidFill>
+            <a:prstDash val="solid"/>
+          </a:ln>
+        </p:spPr>
+      </p:sp>
+      <p:sp>
+        <p:nvSpPr>
+          <p:cNvPr id="24" name="Text 22"/>
+          <p:cNvSpPr txBox="1"/>
+          <p:nvPr/>
+        </p:nvSpPr>
+        <p:spPr>
+          <a:xfrm>
+            <a:off x="548640" y="3703320"/>
+            <a:ext cx="548640" cy="548640"/>
+          </a:xfrm>
+          <a:prstGeom prst="rect">
+            <a:avLst/>
+          </a:prstGeom>
+          <a:noFill/>
+          <a:ln/>
+        </p:spPr>
+        <p:txBody>
+          <a:bodyPr wrap="square" lIns="0" tIns="0" rIns="0" bIns="0" rtlCol="0" anchor="ctr"/>
+          <a:lstStyle/>
+          <a:p>
+            <a:pPr algn="ctr" indent="0" marL="0">
+              <a:buNone/>
+            </a:pPr>
+            <a:r>
+              <a:rPr lang="en-US" sz="1800" b="1" dirty="0">
+                <a:solidFill>
+                  <a:schemeClr val="bg1"/>
+                </a:solidFill>
+              </a:rPr>
+              <a:t>6</a:t>
+            </a:r>
+            <a:endParaRPr lang="en-US" sz="1800" dirty="0"/>
+          </a:p>
+        </p:txBody>
+      </p:sp>
+      <p:sp>
+        <p:nvSpPr>
+          <p:cNvPr id="25" name="Text 23"/>
+          <p:cNvSpPr txBox="1"/>
+          <p:nvPr/>
+        </p:nvSpPr>
+        <p:spPr>
+          <a:xfrm>
+            <a:off x="548640" y="4389120"/>
+            <a:ext cx="2057400" cy="411480"/>
+          </a:xfrm>
+          <a:prstGeom prst="rect">
+            <a:avLst/>
+          </a:prstGeom>
+          <a:noFill/>
+          <a:ln/>
+        </p:spPr>
+        <p:txBody>
+          <a:bodyPr wrap="square" lIns="0" tIns="0" rIns="0" bIns="0" rtlCol="0" anchor="t"/>
+          <a:lstStyle/>
+          <a:p>
+            <a:pPr indent="0" marL="0">
+              <a:buNone/>
+            </a:pPr>
+            <a:r>
+              <a:rPr lang="en-US" sz="1600" b="1" dirty="0">
+                <a:solidFill>
+                  <a:schemeClr val="tx2"/>
+                </a:solidFill>
+              </a:rPr>
+              <a:t>Seed data</a:t>
+            </a:r>
+            <a:endParaRPr lang="en-US" sz="1600" dirty="0"/>
+          </a:p>
+        </p:txBody>
+      </p:sp>
+      <p:sp>
+        <p:nvSpPr>
+          <p:cNvPr id="26" name="Text 24"/>
+          <p:cNvSpPr txBox="1"/>
+          <p:nvPr/>
+        </p:nvSpPr>
+        <p:spPr>
+          <a:xfrm>
+            <a:off x="548640" y="4800600"/>
+            <a:ext cx="2057400" cy="594360"/>
+          </a:xfrm>
+          <a:prstGeom prst="rect">
+            <a:avLst/>
+          </a:prstGeom>
+          <a:noFill/>
+          <a:ln/>
+        </p:spPr>
+        <p:txBody>
+          <a:bodyPr wrap="square" lIns="0" tIns="0" rIns="0" bIns="0" rtlCol="0" anchor="t"/>
+          <a:lstStyle/>
+          <a:p>
+            <a:pPr indent="0" marL="0">
+              <a:buNone/>
+            </a:pPr>
+            <a:r>
+              <a:rPr lang="en-US" sz="1350" dirty="0">
+                <a:solidFill>
+                  <a:schemeClr val="accent5"/>
+                </a:solidFill>
+              </a:rPr>
+              <a:t>realistic starting data</a:t>
+            </a:r>
+            <a:endParaRPr lang="en-US" sz="1350" dirty="0"/>
+          </a:p>
+        </p:txBody>
+      </p:sp>
+      <p:sp>
+        <p:nvSpPr>
+          <p:cNvPr id="27" name="Step 7 marker"/>
+          <p:cNvSpPr/>
+          <p:nvPr/>
+        </p:nvSpPr>
+        <p:spPr>
+          <a:xfrm>
+            <a:off x="2807894" y="3703320"/>
+            <a:ext cx="548640" cy="548640"/>
+          </a:xfrm>
+          <a:prstGeom prst="ellipse">
+            <a:avLst/>
+          </a:prstGeom>
+          <a:solidFill>
+            <a:srgbClr val="E8792B"/>
+          </a:solidFill>
+          <a:ln w="12700">
+            <a:solidFill>
+              <a:srgbClr val="E8792B"/>
+            </a:solidFill>
+            <a:prstDash val="solid"/>
+          </a:ln>
+        </p:spPr>
+      </p:sp>
+      <p:sp>
+        <p:nvSpPr>
+          <p:cNvPr id="28" name="Text 26"/>
+          <p:cNvSpPr txBox="1"/>
+          <p:nvPr/>
+        </p:nvSpPr>
+        <p:spPr>
+          <a:xfrm>
+            <a:off x="2807894" y="3703320"/>
+            <a:ext cx="548640" cy="548640"/>
+          </a:xfrm>
+          <a:prstGeom prst="rect">
+            <a:avLst/>
+          </a:prstGeom>
+          <a:noFill/>
+          <a:ln/>
+        </p:spPr>
+        <p:txBody>
+          <a:bodyPr wrap="square" lIns="0" tIns="0" rIns="0" bIns="0" rtlCol="0" anchor="ctr"/>
+          <a:lstStyle/>
+          <a:p>
+            <a:pPr algn="ctr" indent="0" marL="0">
+              <a:buNone/>
+            </a:pPr>
+            <a:r>
+              <a:rPr lang="en-US" sz="1800" b="1" dirty="0">
+                <a:solidFill>
+                  <a:schemeClr val="bg1"/>
+                </a:solidFill>
+              </a:rPr>
+              <a:t>7</a:t>
+            </a:r>
+            <a:endParaRPr lang="en-US" sz="1800" dirty="0"/>
+          </a:p>
+        </p:txBody>
+      </p:sp>
+      <p:sp>
+        <p:nvSpPr>
+          <p:cNvPr id="29" name="Text 27"/>
+          <p:cNvSpPr txBox="1"/>
+          <p:nvPr/>
+        </p:nvSpPr>
+        <p:spPr>
+          <a:xfrm>
+            <a:off x="2807894" y="4389120"/>
+            <a:ext cx="2057400" cy="411480"/>
+          </a:xfrm>
+          <a:prstGeom prst="rect">
+            <a:avLst/>
+          </a:prstGeom>
+          <a:noFill/>
+          <a:ln/>
+        </p:spPr>
+        <p:txBody>
+          <a:bodyPr wrap="square" lIns="0" tIns="0" rIns="0" bIns="0" rtlCol="0" anchor="t"/>
+          <a:lstStyle/>
+          <a:p>
+            <a:pPr indent="0" marL="0">
+              <a:buNone/>
+            </a:pPr>
+            <a:r>
+              <a:rPr lang="en-US" sz="1600" b="1" dirty="0">
+                <a:solidFill>
+                  <a:schemeClr val="tx2"/>
+                </a:solidFill>
+              </a:rPr>
+              <a:t>Server and 3D interface</a:t>
+            </a:r>
+            <a:endParaRPr lang="en-US" sz="1600" dirty="0"/>
+          </a:p>
+        </p:txBody>
+      </p:sp>
+      <p:sp>
+        <p:nvSpPr>
+          <p:cNvPr id="30" name="Text 28"/>
+          <p:cNvSpPr txBox="1"/>
+          <p:nvPr/>
+        </p:nvSpPr>
+        <p:spPr>
+          <a:xfrm>
+            <a:off x="2807894" y="4800600"/>
+            <a:ext cx="2057400" cy="594360"/>
+          </a:xfrm>
+          <a:prstGeom prst="rect">
+            <a:avLst/>
+          </a:prstGeom>
+          <a:noFill/>
+          <a:ln/>
+        </p:spPr>
+        <p:txBody>
+          <a:bodyPr wrap="square" lIns="0" tIns="0" rIns="0" bIns="0" rtlCol="0" anchor="t"/>
+          <a:lstStyle/>
+          <a:p>
+            <a:pPr indent="0" marL="0">
+              <a:buNone/>
+            </a:pPr>
+            <a:r>
+              <a:rPr lang="en-US" sz="1350" dirty="0">
+                <a:solidFill>
+                  <a:schemeClr val="accent5"/>
+                </a:solidFill>
+              </a:rPr>
+              <a:t>Node.js, React, Three.js</a:t>
+            </a:r>
+            <a:endParaRPr lang="en-US" sz="1350" dirty="0"/>
+          </a:p>
+        </p:txBody>
+      </p:sp>
+      <p:sp>
+        <p:nvSpPr>
+          <p:cNvPr id="31" name="Step 8 marker"/>
+          <p:cNvSpPr/>
+          <p:nvPr/>
+        </p:nvSpPr>
+        <p:spPr>
+          <a:xfrm>
+            <a:off x="5067148" y="3703320"/>
+            <a:ext cx="548640" cy="548640"/>
+          </a:xfrm>
+          <a:prstGeom prst="ellipse">
+            <a:avLst/>
+          </a:prstGeom>
+          <a:solidFill>
+            <a:srgbClr val="E8792B"/>
+          </a:solidFill>
+          <a:ln w="12700">
+            <a:solidFill>
+              <a:srgbClr val="E8792B"/>
+            </a:solidFill>
+            <a:prstDash val="solid"/>
+          </a:ln>
+        </p:spPr>
+      </p:sp>
+      <p:sp>
+        <p:nvSpPr>
+          <p:cNvPr id="32" name="Text 30"/>
+          <p:cNvSpPr txBox="1"/>
+          <p:nvPr/>
+        </p:nvSpPr>
+        <p:spPr>
+          <a:xfrm>
+            <a:off x="5067148" y="3703320"/>
+            <a:ext cx="548640" cy="548640"/>
+          </a:xfrm>
+          <a:prstGeom prst="rect">
+            <a:avLst/>
+          </a:prstGeom>
+          <a:noFill/>
+          <a:ln/>
+        </p:spPr>
+        <p:txBody>
+          <a:bodyPr wrap="square" lIns="0" tIns="0" rIns="0" bIns="0" rtlCol="0" anchor="ctr"/>
+          <a:lstStyle/>
+          <a:p>
+            <a:pPr algn="ctr" indent="0" marL="0">
+              <a:buNone/>
+            </a:pPr>
+            <a:r>
+              <a:rPr lang="en-US" sz="1800" b="1" dirty="0">
+                <a:solidFill>
+                  <a:schemeClr val="bg1"/>
+                </a:solidFill>
+              </a:rPr>
+              <a:t>8</a:t>
+            </a:r>
+            <a:endParaRPr lang="en-US" sz="1800" dirty="0"/>
+          </a:p>
+        </p:txBody>
+      </p:sp>
+      <p:sp>
+        <p:nvSpPr>
+          <p:cNvPr id="33" name="Text 31"/>
+          <p:cNvSpPr txBox="1"/>
+          <p:nvPr/>
+        </p:nvSpPr>
+        <p:spPr>
+          <a:xfrm>
+            <a:off x="5067148" y="4389120"/>
+            <a:ext cx="2057400" cy="411480"/>
+          </a:xfrm>
+          <a:prstGeom prst="rect">
+            <a:avLst/>
+          </a:prstGeom>
+          <a:noFill/>
+          <a:ln/>
+        </p:spPr>
+        <p:txBody>
+          <a:bodyPr wrap="square" lIns="0" tIns="0" rIns="0" bIns="0" rtlCol="0" anchor="t"/>
+          <a:lstStyle/>
+          <a:p>
+            <a:pPr indent="0" marL="0">
+              <a:buNone/>
+            </a:pPr>
+            <a:r>
+              <a:rPr lang="en-US" sz="1600" b="1" dirty="0">
+                <a:solidFill>
+                  <a:schemeClr val="tx2"/>
+                </a:solidFill>
+              </a:rPr>
+              <a:t>Simulation</a:t>
+            </a:r>
+            <a:endParaRPr lang="en-US" sz="1600" dirty="0"/>
+          </a:p>
+        </p:txBody>
+      </p:sp>
+      <p:sp>
+        <p:nvSpPr>
+          <p:cNvPr id="34" name="Text 32"/>
+          <p:cNvSpPr txBox="1"/>
+          <p:nvPr/>
+        </p:nvSpPr>
+        <p:spPr>
+          <a:xfrm>
+            <a:off x="5067148" y="4800600"/>
+            <a:ext cx="2057400" cy="594360"/>
+          </a:xfrm>
+          <a:prstGeom prst="rect">
+            <a:avLst/>
+          </a:prstGeom>
+          <a:noFill/>
+          <a:ln/>
+        </p:spPr>
+        <p:txBody>
+          <a:bodyPr wrap="square" lIns="0" tIns="0" rIns="0" bIns="0" rtlCol="0" anchor="t"/>
+          <a:lstStyle/>
+          <a:p>
+            <a:pPr indent="0" marL="0">
+              <a:buNone/>
+            </a:pPr>
+            <a:r>
+              <a:rPr lang="en-US" sz="1350" dirty="0">
+                <a:solidFill>
+                  <a:schemeClr val="accent5"/>
+                </a:solidFill>
+              </a:rPr>
+              <a:t>saves to Oracle every 2 s</a:t>
+            </a:r>
+            <a:endParaRPr lang="en-US" sz="1350" dirty="0"/>
+          </a:p>
+        </p:txBody>
+      </p:sp>
+      <p:sp>
+        <p:nvSpPr>
+          <p:cNvPr id="35" name="Step 9 marker"/>
+          <p:cNvSpPr/>
+          <p:nvPr/>
+        </p:nvSpPr>
+        <p:spPr>
+          <a:xfrm>
+            <a:off x="7326401" y="3703320"/>
+            <a:ext cx="548640" cy="548640"/>
+          </a:xfrm>
+          <a:prstGeom prst="ellipse">
+            <a:avLst/>
+          </a:prstGeom>
+          <a:solidFill>
+            <a:srgbClr val="0E7C7B"/>
+          </a:solidFill>
+          <a:ln w="12700">
+            <a:solidFill>
+              <a:srgbClr val="0E7C7B"/>
+            </a:solidFill>
+            <a:prstDash val="solid"/>
+          </a:ln>
+        </p:spPr>
+      </p:sp>
+      <p:sp>
+        <p:nvSpPr>
+          <p:cNvPr id="36" name="Text 34"/>
+          <p:cNvSpPr txBox="1"/>
+          <p:nvPr/>
+        </p:nvSpPr>
+        <p:spPr>
+          <a:xfrm>
+            <a:off x="7326401" y="3703320"/>
+            <a:ext cx="548640" cy="548640"/>
+          </a:xfrm>
+          <a:prstGeom prst="rect">
+            <a:avLst/>
+          </a:prstGeom>
+          <a:noFill/>
+          <a:ln/>
+        </p:spPr>
+        <p:txBody>
+          <a:bodyPr wrap="square" lIns="0" tIns="0" rIns="0" bIns="0" rtlCol="0" anchor="ctr"/>
+          <a:lstStyle/>
+          <a:p>
+            <a:pPr algn="ctr" indent="0" marL="0">
+              <a:buNone/>
+            </a:pPr>
+            <a:r>
+              <a:rPr lang="en-US" sz="1800" b="1" dirty="0">
+                <a:solidFill>
+                  <a:schemeClr val="bg1"/>
+                </a:solidFill>
+              </a:rPr>
+              <a:t>9</a:t>
+            </a:r>
+            <a:endParaRPr lang="en-US" sz="1800" dirty="0"/>
+          </a:p>
+        </p:txBody>
+      </p:sp>
+      <p:sp>
+        <p:nvSpPr>
+          <p:cNvPr id="37" name="Text 35"/>
+          <p:cNvSpPr txBox="1"/>
+          <p:nvPr/>
+        </p:nvSpPr>
+        <p:spPr>
+          <a:xfrm>
+            <a:off x="7326401" y="4389120"/>
+            <a:ext cx="2057400" cy="411480"/>
+          </a:xfrm>
+          <a:prstGeom prst="rect">
+            <a:avLst/>
+          </a:prstGeom>
+          <a:noFill/>
+          <a:ln/>
+        </p:spPr>
+        <p:txBody>
+          <a:bodyPr wrap="square" lIns="0" tIns="0" rIns="0" bIns="0" rtlCol="0" anchor="t"/>
+          <a:lstStyle/>
+          <a:p>
+            <a:pPr indent="0" marL="0">
+              <a:buNone/>
+            </a:pPr>
+            <a:r>
+              <a:rPr lang="en-US" sz="1600" b="1" dirty="0">
+                <a:solidFill>
+                  <a:schemeClr val="tx2"/>
+                </a:solidFill>
+              </a:rPr>
+              <a:t>Database Lab and tests</a:t>
+            </a:r>
+            <a:endParaRPr lang="en-US" sz="1600" dirty="0"/>
+          </a:p>
+        </p:txBody>
+      </p:sp>
+      <p:sp>
+        <p:nvSpPr>
+          <p:cNvPr id="38" name="Text 36"/>
+          <p:cNvSpPr txBox="1"/>
+          <p:nvPr/>
+        </p:nvSpPr>
+        <p:spPr>
+          <a:xfrm>
+            <a:off x="7326401" y="4800600"/>
+            <a:ext cx="2057400" cy="594360"/>
+          </a:xfrm>
+          <a:prstGeom prst="rect">
+            <a:avLst/>
+          </a:prstGeom>
+          <a:noFill/>
+          <a:ln/>
+        </p:spPr>
+        <p:txBody>
+          <a:bodyPr wrap="square" lIns="0" tIns="0" rIns="0" bIns="0" rtlCol="0" anchor="t"/>
+          <a:lstStyle/>
+          <a:p>
+            <a:pPr indent="0" marL="0">
+              <a:buNone/>
+            </a:pPr>
+            <a:r>
+              <a:rPr lang="en-US" sz="1350" dirty="0">
+                <a:solidFill>
+                  <a:schemeClr val="accent5"/>
+                </a:solidFill>
+              </a:rPr>
+              <a:t>Flashback, VPD, locks; db:selftest</a:t>
+            </a:r>
+            <a:endParaRPr lang="en-US" sz="1350" dirty="0"/>
+          </a:p>
+        </p:txBody>
+      </p:sp>
+      <p:sp>
+        <p:nvSpPr>
+          <p:cNvPr id="39" name="Step 10 marker"/>
+          <p:cNvSpPr/>
+          <p:nvPr/>
+        </p:nvSpPr>
+        <p:spPr>
+          <a:xfrm>
+            <a:off x="9585655" y="3703320"/>
+            <a:ext cx="548640" cy="548640"/>
+          </a:xfrm>
+          <a:prstGeom prst="ellipse">
+            <a:avLst/>
+          </a:prstGeom>
+          <a:solidFill>
+            <a:srgbClr val="0E7C7B"/>
+          </a:solidFill>
+          <a:ln w="12700">
+            <a:solidFill>
+              <a:srgbClr val="0E7C7B"/>
+            </a:solidFill>
+            <a:prstDash val="solid"/>
+          </a:ln>
+        </p:spPr>
+      </p:sp>
+      <p:sp>
+        <p:nvSpPr>
+          <p:cNvPr id="40" name="Text 38"/>
+          <p:cNvSpPr txBox="1"/>
+          <p:nvPr/>
+        </p:nvSpPr>
+        <p:spPr>
+          <a:xfrm>
+            <a:off x="9585655" y="3703320"/>
+            <a:ext cx="548640" cy="548640"/>
+          </a:xfrm>
+          <a:prstGeom prst="rect">
+            <a:avLst/>
+          </a:prstGeom>
+          <a:noFill/>
+          <a:ln/>
+        </p:spPr>
+        <p:txBody>
+          <a:bodyPr wrap="square" lIns="0" tIns="0" rIns="0" bIns="0" rtlCol="0" anchor="ctr"/>
+          <a:lstStyle/>
+          <a:p>
+            <a:pPr algn="ctr" indent="0" marL="0">
+              <a:buNone/>
+            </a:pPr>
+            <a:r>
+              <a:rPr lang="en-US" sz="1800" b="1" dirty="0">
+                <a:solidFill>
+                  <a:schemeClr val="bg1"/>
+                </a:solidFill>
+              </a:rPr>
+              <a:t>10</a:t>
+            </a:r>
+            <a:endParaRPr lang="en-US" sz="1800" dirty="0"/>
+          </a:p>
+        </p:txBody>
+      </p:sp>
+      <p:sp>
+        <p:nvSpPr>
+          <p:cNvPr id="41" name="Text 39"/>
+          <p:cNvSpPr txBox="1"/>
+          <p:nvPr/>
+        </p:nvSpPr>
+        <p:spPr>
+          <a:xfrm>
+            <a:off x="9585655" y="4389120"/>
+            <a:ext cx="2057400" cy="411480"/>
+          </a:xfrm>
+          <a:prstGeom prst="rect">
+            <a:avLst/>
+          </a:prstGeom>
+          <a:noFill/>
+          <a:ln/>
+        </p:spPr>
+        <p:txBody>
+          <a:bodyPr wrap="square" lIns="0" tIns="0" rIns="0" bIns="0" rtlCol="0" anchor="t"/>
+          <a:lstStyle/>
+          <a:p>
+            <a:pPr indent="0" marL="0">
+              <a:buNone/>
+            </a:pPr>
+            <a:r>
+              <a:rPr lang="en-US" sz="1600" b="1" dirty="0">
+                <a:solidFill>
+                  <a:schemeClr val="tx2"/>
+                </a:solidFill>
+              </a:rPr>
+              <a:t>Smart Warehouse</a:t>
+            </a:r>
+            <a:endParaRPr lang="en-US" sz="1600" dirty="0"/>
+          </a:p>
+        </p:txBody>
+      </p:sp>
+      <p:sp>
+        <p:nvSpPr>
+          <p:cNvPr id="42" name="Text 40"/>
+          <p:cNvSpPr txBox="1"/>
+          <p:nvPr/>
+        </p:nvSpPr>
+        <p:spPr>
+          <a:xfrm>
+            <a:off x="9585655" y="4800600"/>
+            <a:ext cx="2057400" cy="594360"/>
+          </a:xfrm>
+          <a:prstGeom prst="rect">
+            <a:avLst/>
+          </a:prstGeom>
+          <a:noFill/>
+          <a:ln/>
+        </p:spPr>
+        <p:txBody>
+          <a:bodyPr wrap="square" lIns="0" tIns="0" rIns="0" bIns="0" rtlCol="0" anchor="t"/>
+          <a:lstStyle/>
+          <a:p>
+            <a:pPr indent="0" marL="0">
+              <a:buNone/>
+            </a:pPr>
+            <a:r>
+              <a:rPr lang="en-US" sz="1350" dirty="0">
+                <a:solidFill>
+                  <a:schemeClr val="accent5"/>
+                </a:solidFill>
+              </a:rPr>
+              <a:t>lots, bins, sensors, graph</a:t>
+            </a:r>
+            <a:endParaRPr lang="en-US" sz="1350" dirty="0"/>
+          </a:p>
+        </p:txBody>
+      </p:sp>
+      <p:sp>
+        <p:nvSpPr>
+          <p:cNvPr id="43" name="Text 41"/>
+          <p:cNvSpPr txBox="1"/>
+          <p:nvPr/>
+        </p:nvSpPr>
+        <p:spPr>
+          <a:xfrm>
+            <a:off x="548640" y="5760720"/>
+            <a:ext cx="11094415" cy="411480"/>
+          </a:xfrm>
+          <a:prstGeom prst="rect">
+            <a:avLst/>
+          </a:prstGeom>
+          <a:noFill/>
+          <a:ln/>
+        </p:spPr>
+        <p:txBody>
+          <a:bodyPr wrap="square" lIns="0" tIns="0" rIns="0" bIns="0" rtlCol="0" anchor="t"/>
+          <a:lstStyle/>
+          <a:p>
+            <a:pPr indent="0" marL="0">
+              <a:buNone/>
+            </a:pPr>
+            <a:r>
+              <a:rPr lang="en-US" sz="1500" b="1" dirty="0">
+                <a:solidFill>
+                  <a:schemeClr val="tx2"/>
+                </a:solidFill>
+              </a:rPr>
+              <a:t>Setup is scripted: </a:t>
+            </a:r>
+            <a:pPr indent="0" marL="0">
+              <a:buNone/>
+            </a:pPr>
+            <a:r>
+              <a:rPr lang="en-US" sz="1500" dirty="0">
+                <a:solidFill>
+                  <a:schemeClr val="tx1"/>
+                </a:solidFill>
+                <a:latin typeface="Courier New" pitchFamily="34" charset="0"/>
+                <a:ea typeface="Courier New" pitchFamily="34" charset="-122"/>
+                <a:cs typeface="Courier New" pitchFamily="34" charset="-120"/>
+              </a:rPr>
+              <a:t>npm run db:up</a:t>
+            </a:r>
+            <a:pPr indent="0" marL="0">
+              <a:buNone/>
+            </a:pPr>
+            <a:r>
+              <a:rPr lang="en-US" sz="1500" dirty="0">
+                <a:solidFill>
+                  <a:schemeClr val="tx1"/>
+                </a:solidFill>
+              </a:rPr>
+              <a:t> starts Oracle, </a:t>
+            </a:r>
+            <a:pPr indent="0" marL="0">
+              <a:buNone/>
+            </a:pPr>
+            <a:r>
+              <a:rPr lang="en-US" sz="1500" dirty="0">
+                <a:solidFill>
+                  <a:schemeClr val="tx1"/>
+                </a:solidFill>
+                <a:latin typeface="Courier New" pitchFamily="34" charset="0"/>
+                <a:ea typeface="Courier New" pitchFamily="34" charset="-122"/>
+                <a:cs typeface="Courier New" pitchFamily="34" charset="-120"/>
+              </a:rPr>
+              <a:t>npm run db:reset</a:t>
+            </a:r>
+            <a:pPr indent="0" marL="0">
+              <a:buNone/>
+            </a:pPr>
+            <a:r>
+              <a:rPr lang="en-US" sz="1500" dirty="0">
+                <a:solidFill>
+                  <a:schemeClr val="tx1"/>
+                </a:solidFill>
+              </a:rPr>
+              <a:t> loads the schema, </a:t>
+            </a:r>
+            <a:pPr indent="0" marL="0">
+              <a:buNone/>
+            </a:pPr>
+            <a:r>
+              <a:rPr lang="en-US" sz="1500" dirty="0">
+                <a:solidFill>
+                  <a:schemeClr val="tx1"/>
+                </a:solidFill>
+                <a:latin typeface="Courier New" pitchFamily="34" charset="0"/>
+                <a:ea typeface="Courier New" pitchFamily="34" charset="-122"/>
+                <a:cs typeface="Courier New" pitchFamily="34" charset="-120"/>
+              </a:rPr>
+              <a:t>npm run dev</a:t>
+            </a:r>
+            <a:pPr indent="0" marL="0">
+              <a:buNone/>
+            </a:pPr>
+            <a:r>
+              <a:rPr lang="en-US" sz="1500" dirty="0">
+                <a:solidFill>
+                  <a:schemeClr val="tx1"/>
+                </a:solidFill>
+              </a:rPr>
+              <a:t> starts the app.</a:t>
+            </a:r>
+            <a:endParaRPr lang="en-US" sz="1500" dirty="0"/>
+          </a:p>
+        </p:txBody>
+      </p:sp>
+      <p:sp>
+        <p:nvSpPr>
+          <p:cNvPr id="25" name="Slide Number Placeholder 0"/>
+          <p:cNvSpPr>
+            <a:spLocks noGrp="1"/>
+          </p:cNvSpPr>
+          <p:nvPr>
+            <p:ph type="sldNum" sz="quarter" idx="4294967295"/>
+          </p:nvPr>
+        </p:nvSpPr>
+        <p:spPr>
+          <a:xfrm>
+            <a:off x="11094415" y="6446520"/>
+            <a:ext cx="548640" cy="274320"/>
+          </a:xfrm>
+          <a:prstGeom prst="rect">
+            <a:avLst/>
+          </a:prstGeom>
+          <a:extLst>
+            <a:ext uri="{C572A759-6A51-4108-AA02-DFA0A04FC94B}">
+              <ma14:wrappingTextBoxFlag xmlns:ma14="http://schemas.microsoft.com/office/mac/drawingml/2011/main" val="0"/>
+            </a:ext>
+          </a:extLst>
+        </p:spPr>
+        <p:txBody>
+          <a:bodyPr/>
+          <a:lstStyle>
+            <a:lvl1pPr>
+              <a:defRPr sz="1000">
+                <a:solidFill>
+                  <a:schemeClr val="accent5"/>
+                </a:solidFill>
+              </a:defRPr>
+            </a:lvl1pPr>
+          </a:lstStyle>
+          <a:p>
+            <a:pPr algn="r"/>
+            <a:fld id="{F7021451-1387-4CA6-816F-3879F97B5CBC}" type="slidenum">
+              <a:rPr b="0" lang="en-US"/>
+              <a:t>17</a:t>
+            </a:fld>
+            <a:endParaRPr lang="en-US"/>
+          </a:p>
+        </p:txBody>
+      </p:sp>
+    </p:spTree>
+  </p:cSld>
+  <p:clrMapOvr>
+    <a:masterClrMapping/>
+  </p:clrMapOvr>
+</p:sld>
+</file>
+
+<file path=ppt/slides/slide18.xml><?xml version="1.0" encoding="utf-8"?>
+<p:sld xmlns:a="http://schemas.openxmlformats.org/drawingml/2006/main" xmlns:r="http://schemas.openxmlformats.org/officeDocument/2006/relationships" xmlns:p="http://schemas.openxmlformats.org/presentationml/2006/main">
+  <p:cSld name="Slide 18">
+    <p:spTree>
+      <p:nvGrpSpPr>
+        <p:cNvPr id="1" name=""/>
+        <p:cNvGrpSpPr/>
+        <p:nvPr/>
+      </p:nvGrpSpPr>
+      <p:grpSpPr>
+        <a:xfrm>
+          <a:off x="0" y="0"/>
+          <a:ext cx="0" cy="0"/>
+          <a:chOff x="0" y="0"/>
+          <a:chExt cx="0" cy="0"/>
+        </a:xfrm>
+      </p:grpSpPr>
+      <p:sp>
+        <p:nvSpPr>
+          <p:cNvPr id="2" name="Text 0"/>
+          <p:cNvSpPr/>
+          <p:nvPr>
+            <p:ph idx="100" type="title" hasCustomPrompt="1"/>
+          </p:nvPr>
+        </p:nvSpPr>
+        <p:spPr>
+          <a:xfrm>
+            <a:off x="548640" y="365760"/>
+            <a:ext cx="11094415" cy="822960"/>
+          </a:xfrm>
+          <a:prstGeom prst="rect">
+            <a:avLst/>
+          </a:prstGeom>
+          <a:noFill/>
+          <a:ln/>
+        </p:spPr>
+        <p:txBody>
+          <a:bodyPr wrap="square" lIns="0" tIns="0" rIns="0" bIns="0" rtlCol="0" anchor="ctr"/>
+          <a:lstStyle/>
+          <a:p>
+            <a:pPr algn="l" indent="0" marL="0">
+              <a:buNone/>
+            </a:pPr>
+            <a:r>
+              <a:rPr lang="en-US" sz="3400" b="1" dirty="0">
+                <a:solidFill>
+                  <a:schemeClr val="tx2"/>
                 </a:solidFill>
                 <a:latin typeface="Cambria" pitchFamily="34" charset="0"/>
                 <a:ea typeface="Cambria" pitchFamily="34" charset="-122"/>
                 <a:cs typeface="Cambria" pitchFamily="34" charset="-120"/>
               </a:rPr>
-              <a:t>Correct</a:t>
-            </a:r>
-            <a:endParaRPr lang="en-US" sz="2400" dirty="0"/>
-          </a:p>
-        </p:txBody>
-      </p:sp>
-      <p:sp>
-        <p:nvSpPr>
-          <p:cNvPr id="4" name="Text 2"/>
-          <p:cNvSpPr txBox="1"/>
-          <p:nvPr/>
-        </p:nvSpPr>
-        <p:spPr>
-          <a:xfrm>
-            <a:off x="2377440" y="1828800"/>
-            <a:ext cx="5120640" cy="548640"/>
-          </a:xfrm>
-          <a:prstGeom prst="rect">
-            <a:avLst/>
-          </a:prstGeom>
-          <a:noFill/>
-          <a:ln/>
-        </p:spPr>
-        <p:txBody>
-          <a:bodyPr wrap="square" lIns="0" tIns="0" rIns="0" bIns="0" rtlCol="0" anchor="ctr"/>
-          <a:lstStyle/>
-          <a:p>
-            <a:pPr indent="0" marL="0">
-              <a:buNone/>
-            </a:pPr>
-            <a:r>
-              <a:rPr lang="en-US" sz="1800" dirty="0">
-                <a:solidFill>
-                  <a:schemeClr val="bg1"/>
-                </a:solidFill>
-              </a:rPr>
-              <a:t>keys, constraints, PL/SQL and triggers keep the data valid</a:t>
-            </a:r>
-            <a:endParaRPr lang="en-US" sz="1800" dirty="0"/>
-          </a:p>
-        </p:txBody>
-      </p:sp>
-      <p:sp>
-        <p:nvSpPr>
-          <p:cNvPr id="5" name="Text 3"/>
-          <p:cNvSpPr txBox="1"/>
-          <p:nvPr/>
-        </p:nvSpPr>
-        <p:spPr>
-          <a:xfrm>
-            <a:off x="548640" y="2606040"/>
-            <a:ext cx="1737360" cy="548640"/>
-          </a:xfrm>
-          <a:prstGeom prst="rect">
-            <a:avLst/>
-          </a:prstGeom>
-          <a:noFill/>
-          <a:ln/>
-        </p:spPr>
-        <p:txBody>
-          <a:bodyPr wrap="square" lIns="0" tIns="0" rIns="0" bIns="0" rtlCol="0" anchor="ctr"/>
-          <a:lstStyle/>
-          <a:p>
-            <a:pPr indent="0" marL="0">
-              <a:buNone/>
-            </a:pPr>
-            <a:r>
-              <a:rPr lang="en-US" sz="2400" b="1" dirty="0">
-                <a:solidFill>
-                  <a:schemeClr val="accent1"/>
-                </a:solidFill>
-                <a:latin typeface="Cambria" pitchFamily="34" charset="0"/>
-                <a:ea typeface="Cambria" pitchFamily="34" charset="-122"/>
-                <a:cs typeface="Cambria" pitchFamily="34" charset="-120"/>
-              </a:rPr>
-              <a:t>Secure</a:t>
-            </a:r>
-            <a:endParaRPr lang="en-US" sz="2400" dirty="0"/>
-          </a:p>
-        </p:txBody>
-      </p:sp>
-      <p:sp>
-        <p:nvSpPr>
-          <p:cNvPr id="6" name="Text 4"/>
-          <p:cNvSpPr txBox="1"/>
-          <p:nvPr/>
-        </p:nvSpPr>
-        <p:spPr>
-          <a:xfrm>
-            <a:off x="2377440" y="2606040"/>
-            <a:ext cx="5120640" cy="548640"/>
-          </a:xfrm>
-          <a:prstGeom prst="rect">
-            <a:avLst/>
-          </a:prstGeom>
-          <a:noFill/>
-          <a:ln/>
-        </p:spPr>
-        <p:txBody>
-          <a:bodyPr wrap="square" lIns="0" tIns="0" rIns="0" bIns="0" rtlCol="0" anchor="ctr"/>
-          <a:lstStyle/>
-          <a:p>
-            <a:pPr indent="0" marL="0">
-              <a:buNone/>
-            </a:pPr>
-            <a:r>
-              <a:rPr lang="en-US" sz="1800" dirty="0">
-                <a:solidFill>
-                  <a:schemeClr val="bg1"/>
-                </a:solidFill>
-              </a:rPr>
-              <a:t>roles and the audit trail make every change accountable</a:t>
-            </a:r>
-            <a:endParaRPr lang="en-US" sz="1800" dirty="0"/>
-          </a:p>
-        </p:txBody>
-      </p:sp>
-      <p:sp>
-        <p:nvSpPr>
-          <p:cNvPr id="7" name="Text 5"/>
-          <p:cNvSpPr txBox="1"/>
-          <p:nvPr/>
-        </p:nvSpPr>
-        <p:spPr>
-          <a:xfrm>
-            <a:off x="548640" y="3383280"/>
-            <a:ext cx="1737360" cy="548640"/>
-          </a:xfrm>
-          <a:prstGeom prst="rect">
-            <a:avLst/>
-          </a:prstGeom>
-          <a:noFill/>
-          <a:ln/>
-        </p:spPr>
-        <p:txBody>
-          <a:bodyPr wrap="square" lIns="0" tIns="0" rIns="0" bIns="0" rtlCol="0" anchor="ctr"/>
-          <a:lstStyle/>
-          <a:p>
-            <a:pPr indent="0" marL="0">
-              <a:buNone/>
-            </a:pPr>
-            <a:r>
-              <a:rPr lang="en-US" sz="2400" b="1" dirty="0">
-                <a:solidFill>
-                  <a:schemeClr val="accent1"/>
-                </a:solidFill>
-                <a:latin typeface="Cambria" pitchFamily="34" charset="0"/>
-                <a:ea typeface="Cambria" pitchFamily="34" charset="-122"/>
-                <a:cs typeface="Cambria" pitchFamily="34" charset="-120"/>
-              </a:rPr>
-              <a:t>Useful</a:t>
-            </a:r>
-            <a:endParaRPr lang="en-US" sz="2400" dirty="0"/>
-          </a:p>
-        </p:txBody>
-      </p:sp>
-      <p:sp>
-        <p:nvSpPr>
-          <p:cNvPr id="8" name="Text 6"/>
-          <p:cNvSpPr txBox="1"/>
-          <p:nvPr/>
-        </p:nvSpPr>
-        <p:spPr>
-          <a:xfrm>
-            <a:off x="2377440" y="3383280"/>
-            <a:ext cx="5120640" cy="548640"/>
-          </a:xfrm>
-          <a:prstGeom prst="rect">
-            <a:avLst/>
-          </a:prstGeom>
-          <a:noFill/>
-          <a:ln/>
-        </p:spPr>
-        <p:txBody>
-          <a:bodyPr wrap="square" lIns="0" tIns="0" rIns="0" bIns="0" rtlCol="0" anchor="ctr"/>
-          <a:lstStyle/>
-          <a:p>
-            <a:pPr indent="0" marL="0">
-              <a:buNone/>
-            </a:pPr>
-            <a:r>
-              <a:rPr lang="en-US" sz="1800" dirty="0">
-                <a:solidFill>
-                  <a:schemeClr val="bg1"/>
-                </a:solidFill>
-              </a:rPr>
-              <a:t>views and reports turn the data into decisions</a:t>
-            </a:r>
-            <a:endParaRPr lang="en-US" sz="1800" dirty="0"/>
-          </a:p>
-        </p:txBody>
-      </p:sp>
-      <p:sp>
-        <p:nvSpPr>
-          <p:cNvPr id="9" name="Text 7"/>
-          <p:cNvSpPr txBox="1"/>
-          <p:nvPr/>
-        </p:nvSpPr>
-        <p:spPr>
-          <a:xfrm>
-            <a:off x="548640" y="4160520"/>
-            <a:ext cx="1737360" cy="548640"/>
-          </a:xfrm>
-          <a:prstGeom prst="rect">
-            <a:avLst/>
-          </a:prstGeom>
-          <a:noFill/>
-          <a:ln/>
-        </p:spPr>
-        <p:txBody>
-          <a:bodyPr wrap="square" lIns="0" tIns="0" rIns="0" bIns="0" rtlCol="0" anchor="ctr"/>
-          <a:lstStyle/>
-          <a:p>
-            <a:pPr indent="0" marL="0">
-              <a:buNone/>
-            </a:pPr>
-            <a:r>
-              <a:rPr lang="en-US" sz="2400" b="1" dirty="0">
-                <a:solidFill>
-                  <a:schemeClr val="accent1"/>
-                </a:solidFill>
-                <a:latin typeface="Cambria" pitchFamily="34" charset="0"/>
-                <a:ea typeface="Cambria" pitchFamily="34" charset="-122"/>
-                <a:cs typeface="Cambria" pitchFamily="34" charset="-120"/>
-              </a:rPr>
-              <a:t>Visible</a:t>
-            </a:r>
-            <a:endParaRPr lang="en-US" sz="2400" dirty="0"/>
-          </a:p>
-        </p:txBody>
-      </p:sp>
-      <p:sp>
-        <p:nvSpPr>
-          <p:cNvPr id="10" name="Text 8"/>
-          <p:cNvSpPr txBox="1"/>
-          <p:nvPr/>
-        </p:nvSpPr>
-        <p:spPr>
-          <a:xfrm>
-            <a:off x="2377440" y="4160520"/>
-            <a:ext cx="5120640" cy="548640"/>
-          </a:xfrm>
-          <a:prstGeom prst="rect">
-            <a:avLst/>
-          </a:prstGeom>
-          <a:noFill/>
-          <a:ln/>
-        </p:spPr>
-        <p:txBody>
-          <a:bodyPr wrap="square" lIns="0" tIns="0" rIns="0" bIns="0" rtlCol="0" anchor="ctr"/>
-          <a:lstStyle/>
-          <a:p>
-            <a:pPr indent="0" marL="0">
-              <a:buNone/>
-            </a:pPr>
-            <a:r>
-              <a:rPr lang="en-US" sz="1800" dirty="0">
-                <a:solidFill>
-                  <a:schemeClr val="bg1"/>
-                </a:solidFill>
-              </a:rPr>
-              <a:t>the 3D city shows the database as it changes</a:t>
-            </a:r>
-            <a:endParaRPr lang="en-US" sz="1800" dirty="0"/>
-          </a:p>
-        </p:txBody>
-      </p:sp>
-      <p:sp>
-        <p:nvSpPr>
-          <p:cNvPr id="11" name="Text 9"/>
-          <p:cNvSpPr txBox="1"/>
-          <p:nvPr/>
-        </p:nvSpPr>
-        <p:spPr>
-          <a:xfrm>
-            <a:off x="548640" y="5120640"/>
-            <a:ext cx="6858000" cy="548640"/>
-          </a:xfrm>
-          <a:prstGeom prst="rect">
-            <a:avLst/>
-          </a:prstGeom>
-          <a:noFill/>
-          <a:ln/>
-        </p:spPr>
-        <p:txBody>
-          <a:bodyPr wrap="square" lIns="0" tIns="0" rIns="0" bIns="0" rtlCol="0" anchor="t"/>
-          <a:lstStyle/>
-          <a:p>
-            <a:pPr indent="0" marL="0">
-              <a:buNone/>
-            </a:pPr>
-            <a:r>
-              <a:rPr lang="en-US" sz="2200" i="1" dirty="0">
-                <a:solidFill>
-                  <a:schemeClr val="bg2"/>
-                </a:solidFill>
-              </a:rPr>
-              <a:t>Everything on the screen is a row in Oracle.</a:t>
-            </a:r>
-            <a:endParaRPr lang="en-US" sz="2200" dirty="0"/>
-          </a:p>
-        </p:txBody>
+              <a:t>Results</a:t>
+            </a:r>
+            <a:endParaRPr lang="en-US" sz="3400" dirty="0"/>
+          </a:p>
+        </p:txBody>
+      </p:sp>
+      <p:sp>
+        <p:nvSpPr>
+          <p:cNvPr id="3" name="Complete working system circle"/>
+          <p:cNvSpPr/>
+          <p:nvPr/>
+        </p:nvSpPr>
+        <p:spPr>
+          <a:xfrm>
+            <a:off x="548640" y="1325880"/>
+            <a:ext cx="658368" cy="658368"/>
+          </a:xfrm>
+          <a:prstGeom prst="ellipse">
+            <a:avLst/>
+          </a:prstGeom>
+          <a:solidFill>
+            <a:schemeClr val="accent3"/>
+          </a:solidFill>
+          <a:ln w="12700">
+            <a:solidFill>
+              <a:schemeClr val="accent3"/>
+            </a:solidFill>
+            <a:prstDash val="solid"/>
+          </a:ln>
+        </p:spPr>
       </p:sp>
       <p:pic>
         <p:nvPicPr>
-          <p:cNvPr id="12" name="Port closing image" descr="preencoded.png">    </p:cNvPr>
+          <p:cNvPr id="4" name="Complete working system icon" descr="preencoded.png">    </p:cNvPr>
           <p:cNvPicPr>
             <a:picLocks noChangeAspect="1"/>
           </p:cNvPicPr>
@@ -10321,31 +11634,24 @@
         </p:blipFill>
         <p:spPr>
           <a:xfrm>
-            <a:off x="7635240" y="1828800"/>
-            <a:ext cx="4023360" cy="2322576"/>
-          </a:xfrm>
-          <a:prstGeom prst="rect">
-            <a:avLst/>
-          </a:prstGeom>
-          <a:effectLst>
-            <a:outerShdw sx="100000" sy="100000" kx="0" ky="0" algn="bl" rotWithShape="0" blurRad="152400" dist="50800" dir="5400000">
-              <a:srgbClr val="000000">
-                <a:alpha val="35000"/>
-              </a:srgbClr>
-            </a:outerShdw>
-          </a:effectLst>
+            <a:off x="713232" y="1490472"/>
+            <a:ext cx="329184" cy="329184"/>
+          </a:xfrm>
+          <a:prstGeom prst="rect">
+            <a:avLst/>
+          </a:prstGeom>
         </p:spPr>
       </p:pic>
       <p:sp>
         <p:nvSpPr>
-          <p:cNvPr id="13" name="Text 10"/>
-          <p:cNvSpPr txBox="1"/>
-          <p:nvPr/>
-        </p:nvSpPr>
-        <p:spPr>
-          <a:xfrm>
-            <a:off x="7635240" y="4572000"/>
-            <a:ext cx="4023360" cy="731520"/>
+          <p:cNvPr id="5" name="Text 2"/>
+          <p:cNvSpPr txBox="1"/>
+          <p:nvPr/>
+        </p:nvSpPr>
+        <p:spPr>
+          <a:xfrm>
+            <a:off x="1417320" y="1307592"/>
+            <a:ext cx="5669280" cy="384048"/>
           </a:xfrm>
           <a:prstGeom prst="rect">
             <a:avLst/>
@@ -10357,34 +11663,738 @@
           <a:bodyPr wrap="square" lIns="0" tIns="0" rIns="0" bIns="0" rtlCol="0" anchor="t"/>
           <a:lstStyle/>
           <a:p>
-            <a:pPr algn="r" indent="0" marL="0">
-              <a:buNone/>
-            </a:pPr>
-            <a:r>
-              <a:rPr lang="en-US" sz="3600" b="1" dirty="0">
-                <a:solidFill>
-                  <a:schemeClr val="bg1"/>
+            <a:pPr indent="0" marL="0">
+              <a:buNone/>
+            </a:pPr>
+            <a:r>
+              <a:rPr lang="en-US" sz="1800" b="1" dirty="0">
+                <a:solidFill>
+                  <a:schemeClr val="tx2"/>
+                </a:solidFill>
+              </a:rPr>
+              <a:t>Complete working system</a:t>
+            </a:r>
+            <a:endParaRPr lang="en-US" sz="1800" dirty="0"/>
+          </a:p>
+        </p:txBody>
+      </p:sp>
+      <p:sp>
+        <p:nvSpPr>
+          <p:cNvPr id="6" name="Text 3"/>
+          <p:cNvSpPr txBox="1"/>
+          <p:nvPr/>
+        </p:nvSpPr>
+        <p:spPr>
+          <a:xfrm>
+            <a:off x="1417320" y="1691640"/>
+            <a:ext cx="5669280" cy="411480"/>
+          </a:xfrm>
+          <a:prstGeom prst="rect">
+            <a:avLst/>
+          </a:prstGeom>
+          <a:noFill/>
+          <a:ln/>
+        </p:spPr>
+        <p:txBody>
+          <a:bodyPr wrap="square" lIns="0" tIns="0" rIns="0" bIns="0" rtlCol="0" anchor="t"/>
+          <a:lstStyle/>
+          <a:p>
+            <a:pPr indent="0" marL="0">
+              <a:buNone/>
+            </a:pPr>
+            <a:r>
+              <a:rPr lang="en-US" sz="1500" dirty="0">
+                <a:solidFill>
+                  <a:schemeClr val="tx1"/>
+                </a:solidFill>
+              </a:rPr>
+              <a:t>Ship to shelf, stored in one Oracle schema and running live</a:t>
+            </a:r>
+            <a:endParaRPr lang="en-US" sz="1500" dirty="0"/>
+          </a:p>
+        </p:txBody>
+      </p:sp>
+      <p:sp>
+        <p:nvSpPr>
+          <p:cNvPr id="7" name="Integrity enforced in the database circle"/>
+          <p:cNvSpPr/>
+          <p:nvPr/>
+        </p:nvSpPr>
+        <p:spPr>
+          <a:xfrm>
+            <a:off x="548640" y="2093976"/>
+            <a:ext cx="658368" cy="658368"/>
+          </a:xfrm>
+          <a:prstGeom prst="ellipse">
+            <a:avLst/>
+          </a:prstGeom>
+          <a:solidFill>
+            <a:schemeClr val="accent3"/>
+          </a:solidFill>
+          <a:ln w="12700">
+            <a:solidFill>
+              <a:schemeClr val="accent3"/>
+            </a:solidFill>
+            <a:prstDash val="solid"/>
+          </a:ln>
+        </p:spPr>
+      </p:sp>
+      <p:pic>
+        <p:nvPicPr>
+          <p:cNvPr id="8" name="Integrity enforced in the database icon" descr="preencoded.png">    </p:cNvPr>
+          <p:cNvPicPr>
+            <a:picLocks noChangeAspect="1"/>
+          </p:cNvPicPr>
+          <p:nvPr/>
+        </p:nvPicPr>
+        <p:blipFill>
+          <a:blip r:embed="rId2"/>
+          <a:stretch>
+            <a:fillRect/>
+          </a:stretch>
+        </p:blipFill>
+        <p:spPr>
+          <a:xfrm>
+            <a:off x="713232" y="2258568"/>
+            <a:ext cx="329184" cy="329184"/>
+          </a:xfrm>
+          <a:prstGeom prst="rect">
+            <a:avLst/>
+          </a:prstGeom>
+        </p:spPr>
+      </p:pic>
+      <p:sp>
+        <p:nvSpPr>
+          <p:cNvPr id="9" name="Text 5"/>
+          <p:cNvSpPr txBox="1"/>
+          <p:nvPr/>
+        </p:nvSpPr>
+        <p:spPr>
+          <a:xfrm>
+            <a:off x="1417320" y="2075688"/>
+            <a:ext cx="5669280" cy="384048"/>
+          </a:xfrm>
+          <a:prstGeom prst="rect">
+            <a:avLst/>
+          </a:prstGeom>
+          <a:noFill/>
+          <a:ln/>
+        </p:spPr>
+        <p:txBody>
+          <a:bodyPr wrap="square" lIns="0" tIns="0" rIns="0" bIns="0" rtlCol="0" anchor="t"/>
+          <a:lstStyle/>
+          <a:p>
+            <a:pPr indent="0" marL="0">
+              <a:buNone/>
+            </a:pPr>
+            <a:r>
+              <a:rPr lang="en-US" sz="1800" b="1" dirty="0">
+                <a:solidFill>
+                  <a:schemeClr val="tx2"/>
+                </a:solidFill>
+              </a:rPr>
+              <a:t>Integrity enforced in the database</a:t>
+            </a:r>
+            <a:endParaRPr lang="en-US" sz="1800" dirty="0"/>
+          </a:p>
+        </p:txBody>
+      </p:sp>
+      <p:sp>
+        <p:nvSpPr>
+          <p:cNvPr id="10" name="Text 6"/>
+          <p:cNvSpPr txBox="1"/>
+          <p:nvPr/>
+        </p:nvSpPr>
+        <p:spPr>
+          <a:xfrm>
+            <a:off x="1417320" y="2459736"/>
+            <a:ext cx="5669280" cy="411480"/>
+          </a:xfrm>
+          <a:prstGeom prst="rect">
+            <a:avLst/>
+          </a:prstGeom>
+          <a:noFill/>
+          <a:ln/>
+        </p:spPr>
+        <p:txBody>
+          <a:bodyPr wrap="square" lIns="0" tIns="0" rIns="0" bIns="0" rtlCol="0" anchor="t"/>
+          <a:lstStyle/>
+          <a:p>
+            <a:pPr indent="0" marL="0">
+              <a:buNone/>
+            </a:pPr>
+            <a:r>
+              <a:rPr lang="en-US" sz="1500" dirty="0">
+                <a:solidFill>
+                  <a:schemeClr val="tx1"/>
+                </a:solidFill>
+              </a:rPr>
+              <a:t>Invalid data is refused, whatever program sends it</a:t>
+            </a:r>
+            <a:endParaRPr lang="en-US" sz="1500" dirty="0"/>
+          </a:p>
+        </p:txBody>
+      </p:sp>
+      <p:sp>
+        <p:nvSpPr>
+          <p:cNvPr id="11" name="Full traceability circle"/>
+          <p:cNvSpPr/>
+          <p:nvPr/>
+        </p:nvSpPr>
+        <p:spPr>
+          <a:xfrm>
+            <a:off x="548640" y="2862072"/>
+            <a:ext cx="658368" cy="658368"/>
+          </a:xfrm>
+          <a:prstGeom prst="ellipse">
+            <a:avLst/>
+          </a:prstGeom>
+          <a:solidFill>
+            <a:schemeClr val="accent3"/>
+          </a:solidFill>
+          <a:ln w="12700">
+            <a:solidFill>
+              <a:schemeClr val="accent3"/>
+            </a:solidFill>
+            <a:prstDash val="solid"/>
+          </a:ln>
+        </p:spPr>
+      </p:sp>
+      <p:pic>
+        <p:nvPicPr>
+          <p:cNvPr id="12" name="Full traceability icon" descr="preencoded.png">    </p:cNvPr>
+          <p:cNvPicPr>
+            <a:picLocks noChangeAspect="1"/>
+          </p:cNvPicPr>
+          <p:nvPr/>
+        </p:nvPicPr>
+        <p:blipFill>
+          <a:blip r:embed="rId3"/>
+          <a:stretch>
+            <a:fillRect/>
+          </a:stretch>
+        </p:blipFill>
+        <p:spPr>
+          <a:xfrm>
+            <a:off x="713232" y="3026664"/>
+            <a:ext cx="329184" cy="329184"/>
+          </a:xfrm>
+          <a:prstGeom prst="rect">
+            <a:avLst/>
+          </a:prstGeom>
+        </p:spPr>
+      </p:pic>
+      <p:sp>
+        <p:nvSpPr>
+          <p:cNvPr id="13" name="Text 8"/>
+          <p:cNvSpPr txBox="1"/>
+          <p:nvPr/>
+        </p:nvSpPr>
+        <p:spPr>
+          <a:xfrm>
+            <a:off x="1417320" y="2843784"/>
+            <a:ext cx="5669280" cy="384048"/>
+          </a:xfrm>
+          <a:prstGeom prst="rect">
+            <a:avLst/>
+          </a:prstGeom>
+          <a:noFill/>
+          <a:ln/>
+        </p:spPr>
+        <p:txBody>
+          <a:bodyPr wrap="square" lIns="0" tIns="0" rIns="0" bIns="0" rtlCol="0" anchor="t"/>
+          <a:lstStyle/>
+          <a:p>
+            <a:pPr indent="0" marL="0">
+              <a:buNone/>
+            </a:pPr>
+            <a:r>
+              <a:rPr lang="en-US" sz="1800" b="1" dirty="0">
+                <a:solidFill>
+                  <a:schemeClr val="tx2"/>
+                </a:solidFill>
+              </a:rPr>
+              <a:t>Full traceability</a:t>
+            </a:r>
+            <a:endParaRPr lang="en-US" sz="1800" dirty="0"/>
+          </a:p>
+        </p:txBody>
+      </p:sp>
+      <p:sp>
+        <p:nvSpPr>
+          <p:cNvPr id="14" name="Text 9"/>
+          <p:cNvSpPr txBox="1"/>
+          <p:nvPr/>
+        </p:nvSpPr>
+        <p:spPr>
+          <a:xfrm>
+            <a:off x="1417320" y="3227832"/>
+            <a:ext cx="5669280" cy="411480"/>
+          </a:xfrm>
+          <a:prstGeom prst="rect">
+            <a:avLst/>
+          </a:prstGeom>
+          <a:noFill/>
+          <a:ln/>
+        </p:spPr>
+        <p:txBody>
+          <a:bodyPr wrap="square" lIns="0" tIns="0" rIns="0" bIns="0" rtlCol="0" anchor="t"/>
+          <a:lstStyle/>
+          <a:p>
+            <a:pPr indent="0" marL="0">
+              <a:buNone/>
+            </a:pPr>
+            <a:r>
+              <a:rPr lang="en-US" sz="1500" dirty="0">
+                <a:solidFill>
+                  <a:schemeClr val="tx1"/>
+                </a:solidFill>
+              </a:rPr>
+              <a:t>Any container, any change, back to a user and a time</a:t>
+            </a:r>
+            <a:endParaRPr lang="en-US" sz="1500" dirty="0"/>
+          </a:p>
+        </p:txBody>
+      </p:sp>
+      <p:sp>
+        <p:nvSpPr>
+          <p:cNvPr id="15" name="Open to other tools circle"/>
+          <p:cNvSpPr/>
+          <p:nvPr/>
+        </p:nvSpPr>
+        <p:spPr>
+          <a:xfrm>
+            <a:off x="548640" y="3630168"/>
+            <a:ext cx="658368" cy="658368"/>
+          </a:xfrm>
+          <a:prstGeom prst="ellipse">
+            <a:avLst/>
+          </a:prstGeom>
+          <a:solidFill>
+            <a:schemeClr val="accent3"/>
+          </a:solidFill>
+          <a:ln w="12700">
+            <a:solidFill>
+              <a:schemeClr val="accent3"/>
+            </a:solidFill>
+            <a:prstDash val="solid"/>
+          </a:ln>
+        </p:spPr>
+      </p:sp>
+      <p:pic>
+        <p:nvPicPr>
+          <p:cNvPr id="16" name="Open to other tools icon" descr="preencoded.png">    </p:cNvPr>
+          <p:cNvPicPr>
+            <a:picLocks noChangeAspect="1"/>
+          </p:cNvPicPr>
+          <p:nvPr/>
+        </p:nvPicPr>
+        <p:blipFill>
+          <a:blip r:embed="rId4"/>
+          <a:stretch>
+            <a:fillRect/>
+          </a:stretch>
+        </p:blipFill>
+        <p:spPr>
+          <a:xfrm>
+            <a:off x="713232" y="3794760"/>
+            <a:ext cx="329184" cy="329184"/>
+          </a:xfrm>
+          <a:prstGeom prst="rect">
+            <a:avLst/>
+          </a:prstGeom>
+        </p:spPr>
+      </p:pic>
+      <p:sp>
+        <p:nvSpPr>
+          <p:cNvPr id="17" name="Text 11"/>
+          <p:cNvSpPr txBox="1"/>
+          <p:nvPr/>
+        </p:nvSpPr>
+        <p:spPr>
+          <a:xfrm>
+            <a:off x="1417320" y="3611880"/>
+            <a:ext cx="5669280" cy="384048"/>
+          </a:xfrm>
+          <a:prstGeom prst="rect">
+            <a:avLst/>
+          </a:prstGeom>
+          <a:noFill/>
+          <a:ln/>
+        </p:spPr>
+        <p:txBody>
+          <a:bodyPr wrap="square" lIns="0" tIns="0" rIns="0" bIns="0" rtlCol="0" anchor="t"/>
+          <a:lstStyle/>
+          <a:p>
+            <a:pPr indent="0" marL="0">
+              <a:buNone/>
+            </a:pPr>
+            <a:r>
+              <a:rPr lang="en-US" sz="1800" b="1" dirty="0">
+                <a:solidFill>
+                  <a:schemeClr val="tx2"/>
+                </a:solidFill>
+              </a:rPr>
+              <a:t>Open to other tools</a:t>
+            </a:r>
+            <a:endParaRPr lang="en-US" sz="1800" dirty="0"/>
+          </a:p>
+        </p:txBody>
+      </p:sp>
+      <p:sp>
+        <p:nvSpPr>
+          <p:cNvPr id="18" name="Text 12"/>
+          <p:cNvSpPr txBox="1"/>
+          <p:nvPr/>
+        </p:nvSpPr>
+        <p:spPr>
+          <a:xfrm>
+            <a:off x="1417320" y="3995928"/>
+            <a:ext cx="5669280" cy="411480"/>
+          </a:xfrm>
+          <a:prstGeom prst="rect">
+            <a:avLst/>
+          </a:prstGeom>
+          <a:noFill/>
+          <a:ln/>
+        </p:spPr>
+        <p:txBody>
+          <a:bodyPr wrap="square" lIns="0" tIns="0" rIns="0" bIns="0" rtlCol="0" anchor="t"/>
+          <a:lstStyle/>
+          <a:p>
+            <a:pPr indent="0" marL="0">
+              <a:buNone/>
+            </a:pPr>
+            <a:r>
+              <a:rPr lang="en-US" sz="1500" dirty="0">
+                <a:solidFill>
+                  <a:schemeClr val="tx1"/>
+                </a:solidFill>
+              </a:rPr>
+              <a:t>An UPDATE in SQL Developer changes the live city</a:t>
+            </a:r>
+            <a:endParaRPr lang="en-US" sz="1500" dirty="0"/>
+          </a:p>
+        </p:txBody>
+      </p:sp>
+      <p:sp>
+        <p:nvSpPr>
+          <p:cNvPr id="19" name="The database remembers circle"/>
+          <p:cNvSpPr/>
+          <p:nvPr/>
+        </p:nvSpPr>
+        <p:spPr>
+          <a:xfrm>
+            <a:off x="548640" y="4398264"/>
+            <a:ext cx="658368" cy="658368"/>
+          </a:xfrm>
+          <a:prstGeom prst="ellipse">
+            <a:avLst/>
+          </a:prstGeom>
+          <a:solidFill>
+            <a:schemeClr val="accent3"/>
+          </a:solidFill>
+          <a:ln w="12700">
+            <a:solidFill>
+              <a:schemeClr val="accent3"/>
+            </a:solidFill>
+            <a:prstDash val="solid"/>
+          </a:ln>
+        </p:spPr>
+      </p:sp>
+      <p:pic>
+        <p:nvPicPr>
+          <p:cNvPr id="20" name="The database remembers icon" descr="preencoded.png">    </p:cNvPr>
+          <p:cNvPicPr>
+            <a:picLocks noChangeAspect="1"/>
+          </p:cNvPicPr>
+          <p:nvPr/>
+        </p:nvPicPr>
+        <p:blipFill>
+          <a:blip r:embed="rId5"/>
+          <a:stretch>
+            <a:fillRect/>
+          </a:stretch>
+        </p:blipFill>
+        <p:spPr>
+          <a:xfrm>
+            <a:off x="713232" y="4562856"/>
+            <a:ext cx="329184" cy="329184"/>
+          </a:xfrm>
+          <a:prstGeom prst="rect">
+            <a:avLst/>
+          </a:prstGeom>
+        </p:spPr>
+      </p:pic>
+      <p:sp>
+        <p:nvSpPr>
+          <p:cNvPr id="21" name="Text 14"/>
+          <p:cNvSpPr txBox="1"/>
+          <p:nvPr/>
+        </p:nvSpPr>
+        <p:spPr>
+          <a:xfrm>
+            <a:off x="1417320" y="4379976"/>
+            <a:ext cx="5669280" cy="384048"/>
+          </a:xfrm>
+          <a:prstGeom prst="rect">
+            <a:avLst/>
+          </a:prstGeom>
+          <a:noFill/>
+          <a:ln/>
+        </p:spPr>
+        <p:txBody>
+          <a:bodyPr wrap="square" lIns="0" tIns="0" rIns="0" bIns="0" rtlCol="0" anchor="t"/>
+          <a:lstStyle/>
+          <a:p>
+            <a:pPr indent="0" marL="0">
+              <a:buNone/>
+            </a:pPr>
+            <a:r>
+              <a:rPr lang="en-US" sz="1800" b="1" dirty="0">
+                <a:solidFill>
+                  <a:schemeClr val="tx2"/>
+                </a:solidFill>
+              </a:rPr>
+              <a:t>The database remembers</a:t>
+            </a:r>
+            <a:endParaRPr lang="en-US" sz="1800" dirty="0"/>
+          </a:p>
+        </p:txBody>
+      </p:sp>
+      <p:sp>
+        <p:nvSpPr>
+          <p:cNvPr id="22" name="Text 15"/>
+          <p:cNvSpPr txBox="1"/>
+          <p:nvPr/>
+        </p:nvSpPr>
+        <p:spPr>
+          <a:xfrm>
+            <a:off x="1417320" y="4764024"/>
+            <a:ext cx="5669280" cy="411480"/>
+          </a:xfrm>
+          <a:prstGeom prst="rect">
+            <a:avLst/>
+          </a:prstGeom>
+          <a:noFill/>
+          <a:ln/>
+        </p:spPr>
+        <p:txBody>
+          <a:bodyPr wrap="square" lIns="0" tIns="0" rIns="0" bIns="0" rtlCol="0" anchor="t"/>
+          <a:lstStyle/>
+          <a:p>
+            <a:pPr indent="0" marL="0">
+              <a:buNone/>
+            </a:pPr>
+            <a:r>
+              <a:rPr lang="en-US" sz="1500" dirty="0">
+                <a:solidFill>
+                  <a:schemeClr val="tx1"/>
+                </a:solidFill>
+              </a:rPr>
+              <a:t>Flashback rewinds the city; VPD and locks keep it safe</a:t>
+            </a:r>
+            <a:endParaRPr lang="en-US" sz="1500" dirty="0"/>
+          </a:p>
+        </p:txBody>
+      </p:sp>
+      <p:sp>
+        <p:nvSpPr>
+          <p:cNvPr id="23" name="A smart warehouse circle"/>
+          <p:cNvSpPr/>
+          <p:nvPr/>
+        </p:nvSpPr>
+        <p:spPr>
+          <a:xfrm>
+            <a:off x="548640" y="5166360"/>
+            <a:ext cx="658368" cy="658368"/>
+          </a:xfrm>
+          <a:prstGeom prst="ellipse">
+            <a:avLst/>
+          </a:prstGeom>
+          <a:solidFill>
+            <a:schemeClr val="accent3"/>
+          </a:solidFill>
+          <a:ln w="12700">
+            <a:solidFill>
+              <a:schemeClr val="accent3"/>
+            </a:solidFill>
+            <a:prstDash val="solid"/>
+          </a:ln>
+        </p:spPr>
+      </p:sp>
+      <p:pic>
+        <p:nvPicPr>
+          <p:cNvPr id="24" name="A smart warehouse icon" descr="preencoded.png">    </p:cNvPr>
+          <p:cNvPicPr>
+            <a:picLocks noChangeAspect="1"/>
+          </p:cNvPicPr>
+          <p:nvPr/>
+        </p:nvPicPr>
+        <p:blipFill>
+          <a:blip r:embed="rId6"/>
+          <a:stretch>
+            <a:fillRect/>
+          </a:stretch>
+        </p:blipFill>
+        <p:spPr>
+          <a:xfrm>
+            <a:off x="713232" y="5330952"/>
+            <a:ext cx="329184" cy="329184"/>
+          </a:xfrm>
+          <a:prstGeom prst="rect">
+            <a:avLst/>
+          </a:prstGeom>
+        </p:spPr>
+      </p:pic>
+      <p:sp>
+        <p:nvSpPr>
+          <p:cNvPr id="25" name="Text 17"/>
+          <p:cNvSpPr txBox="1"/>
+          <p:nvPr/>
+        </p:nvSpPr>
+        <p:spPr>
+          <a:xfrm>
+            <a:off x="1417320" y="5148072"/>
+            <a:ext cx="5669280" cy="384048"/>
+          </a:xfrm>
+          <a:prstGeom prst="rect">
+            <a:avLst/>
+          </a:prstGeom>
+          <a:noFill/>
+          <a:ln/>
+        </p:spPr>
+        <p:txBody>
+          <a:bodyPr wrap="square" lIns="0" tIns="0" rIns="0" bIns="0" rtlCol="0" anchor="t"/>
+          <a:lstStyle/>
+          <a:p>
+            <a:pPr indent="0" marL="0">
+              <a:buNone/>
+            </a:pPr>
+            <a:r>
+              <a:rPr lang="en-US" sz="1800" b="1" dirty="0">
+                <a:solidFill>
+                  <a:schemeClr val="tx2"/>
+                </a:solidFill>
+              </a:rPr>
+              <a:t>A smart warehouse</a:t>
+            </a:r>
+            <a:endParaRPr lang="en-US" sz="1800" dirty="0"/>
+          </a:p>
+        </p:txBody>
+      </p:sp>
+      <p:sp>
+        <p:nvSpPr>
+          <p:cNvPr id="26" name="Text 18"/>
+          <p:cNvSpPr txBox="1"/>
+          <p:nvPr/>
+        </p:nvSpPr>
+        <p:spPr>
+          <a:xfrm>
+            <a:off x="1417320" y="5532120"/>
+            <a:ext cx="5669280" cy="411480"/>
+          </a:xfrm>
+          <a:prstGeom prst="rect">
+            <a:avLst/>
+          </a:prstGeom>
+          <a:noFill/>
+          <a:ln/>
+        </p:spPr>
+        <p:txBody>
+          <a:bodyPr wrap="square" lIns="0" tIns="0" rIns="0" bIns="0" rtlCol="0" anchor="t"/>
+          <a:lstStyle/>
+          <a:p>
+            <a:pPr indent="0" marL="0">
+              <a:buNone/>
+            </a:pPr>
+            <a:r>
+              <a:rPr lang="en-US" sz="1500" dirty="0">
+                <a:solidFill>
+                  <a:schemeClr val="tx1"/>
+                </a:solidFill>
+              </a:rPr>
+              <a:t>Lots, FEFO, cold chain, recalls and routes decided in SQL</a:t>
+            </a:r>
+            <a:endParaRPr lang="en-US" sz="1500" dirty="0"/>
+          </a:p>
+        </p:txBody>
+      </p:sp>
+      <p:sp>
+        <p:nvSpPr>
+          <p:cNvPr id="27" name="Size stat card"/>
+          <p:cNvSpPr/>
+          <p:nvPr/>
+        </p:nvSpPr>
+        <p:spPr>
+          <a:xfrm>
+            <a:off x="7452360" y="1417320"/>
+            <a:ext cx="4187952" cy="4160520"/>
+          </a:xfrm>
+          <a:prstGeom prst="roundRect">
+            <a:avLst>
+              <a:gd name="adj" fmla="val 2637"/>
+            </a:avLst>
+          </a:prstGeom>
+          <a:solidFill>
+            <a:srgbClr val="0B1F3A"/>
+          </a:solidFill>
+          <a:ln w="12700">
+            <a:solidFill>
+              <a:srgbClr val="0B1F3A"/>
+            </a:solidFill>
+            <a:prstDash val="solid"/>
+          </a:ln>
+        </p:spPr>
+      </p:sp>
+      <p:sp>
+        <p:nvSpPr>
+          <p:cNvPr id="28" name="Text 20"/>
+          <p:cNvSpPr txBox="1"/>
+          <p:nvPr/>
+        </p:nvSpPr>
+        <p:spPr>
+          <a:xfrm>
+            <a:off x="7772400" y="1874520"/>
+            <a:ext cx="3657600" cy="1097280"/>
+          </a:xfrm>
+          <a:prstGeom prst="rect">
+            <a:avLst/>
+          </a:prstGeom>
+          <a:noFill/>
+          <a:ln/>
+        </p:spPr>
+        <p:txBody>
+          <a:bodyPr wrap="square" lIns="0" tIns="0" rIns="0" bIns="0" rtlCol="0" anchor="t"/>
+          <a:lstStyle/>
+          <a:p>
+            <a:pPr indent="0" marL="0">
+              <a:buNone/>
+            </a:pPr>
+            <a:r>
+              <a:rPr lang="en-US" sz="6000" b="1" dirty="0">
+                <a:solidFill>
+                  <a:schemeClr val="accent1"/>
                 </a:solidFill>
                 <a:latin typeface="Cambria" pitchFamily="34" charset="0"/>
                 <a:ea typeface="Cambria" pitchFamily="34" charset="-122"/>
                 <a:cs typeface="Cambria" pitchFamily="34" charset="-120"/>
               </a:rPr>
-              <a:t>Thank you</a:t>
-            </a:r>
-            <a:endParaRPr lang="en-US" sz="3600" dirty="0"/>
-          </a:p>
-        </p:txBody>
-      </p:sp>
-      <p:sp>
-        <p:nvSpPr>
-          <p:cNvPr id="14" name="Text 11"/>
-          <p:cNvSpPr txBox="1"/>
-          <p:nvPr/>
-        </p:nvSpPr>
-        <p:spPr>
-          <a:xfrm>
-            <a:off x="7635240" y="5257800"/>
-            <a:ext cx="4023360" cy="411480"/>
+              <a:t>~30,700</a:t>
+            </a:r>
+            <a:endParaRPr lang="en-US" sz="6000" dirty="0"/>
+          </a:p>
+        </p:txBody>
+      </p:sp>
+      <p:sp>
+        <p:nvSpPr>
+          <p:cNvPr id="29" name="Text 21"/>
+          <p:cNvSpPr txBox="1"/>
+          <p:nvPr/>
+        </p:nvSpPr>
+        <p:spPr>
+          <a:xfrm>
+            <a:off x="7772400" y="2971800"/>
+            <a:ext cx="3566160" cy="731520"/>
           </a:xfrm>
           <a:prstGeom prst="rect">
             <a:avLst/>
@@ -10396,18 +12406,1098 @@
           <a:bodyPr wrap="square" lIns="0" tIns="0" rIns="0" bIns="0" rtlCol="0" anchor="t"/>
           <a:lstStyle/>
           <a:p>
-            <a:pPr algn="r" indent="0" marL="0">
-              <a:buNone/>
-            </a:pPr>
-            <a:r>
-              <a:rPr lang="en-US" sz="1600" dirty="0">
+            <a:pPr indent="0" marL="0">
+              <a:buNone/>
+            </a:pPr>
+            <a:r>
+              <a:rPr lang="en-US" sz="1800" dirty="0">
+                <a:solidFill>
+                  <a:schemeClr val="bg1"/>
+                </a:solidFill>
+              </a:rPr>
+              <a:t>lines of SQL, PL/SQL and TypeScript</a:t>
+            </a:r>
+            <a:endParaRPr lang="en-US" sz="1800" dirty="0"/>
+          </a:p>
+        </p:txBody>
+      </p:sp>
+      <p:sp>
+        <p:nvSpPr>
+          <p:cNvPr id="30" name="Text 22"/>
+          <p:cNvSpPr txBox="1"/>
+          <p:nvPr/>
+        </p:nvSpPr>
+        <p:spPr>
+          <a:xfrm>
+            <a:off x="7772400" y="4023360"/>
+            <a:ext cx="3566160" cy="1097280"/>
+          </a:xfrm>
+          <a:prstGeom prst="rect">
+            <a:avLst/>
+          </a:prstGeom>
+          <a:noFill/>
+          <a:ln/>
+        </p:spPr>
+        <p:txBody>
+          <a:bodyPr wrap="square" lIns="0" tIns="0" rIns="0" bIns="0" rtlCol="0" anchor="t"/>
+          <a:lstStyle/>
+          <a:p>
+            <a:pPr indent="0" marL="0">
+              <a:buNone/>
+            </a:pPr>
+            <a:r>
+              <a:rPr lang="en-US" sz="1500" dirty="0">
                 <a:solidFill>
                   <a:schemeClr val="bg2"/>
                 </a:solidFill>
               </a:rPr>
-              <a:t>Questions welcome</a:t>
-            </a:r>
-            <a:endParaRPr lang="en-US" sz="1600" dirty="0"/>
+              <a:t>64 tables · 27 views · 10 packages · 26 triggers · 26 reports</a:t>
+            </a:r>
+            <a:endParaRPr lang="en-US" sz="1500" dirty="0"/>
+          </a:p>
+        </p:txBody>
+      </p:sp>
+      <p:sp>
+        <p:nvSpPr>
+          <p:cNvPr id="25" name="Slide Number Placeholder 0"/>
+          <p:cNvSpPr>
+            <a:spLocks noGrp="1"/>
+          </p:cNvSpPr>
+          <p:nvPr>
+            <p:ph type="sldNum" sz="quarter" idx="4294967295"/>
+          </p:nvPr>
+        </p:nvSpPr>
+        <p:spPr>
+          <a:xfrm>
+            <a:off x="11094415" y="6446520"/>
+            <a:ext cx="548640" cy="274320"/>
+          </a:xfrm>
+          <a:prstGeom prst="rect">
+            <a:avLst/>
+          </a:prstGeom>
+          <a:extLst>
+            <a:ext uri="{C572A759-6A51-4108-AA02-DFA0A04FC94B}">
+              <ma14:wrappingTextBoxFlag xmlns:ma14="http://schemas.microsoft.com/office/mac/drawingml/2011/main" val="0"/>
+            </a:ext>
+          </a:extLst>
+        </p:spPr>
+        <p:txBody>
+          <a:bodyPr/>
+          <a:lstStyle>
+            <a:lvl1pPr>
+              <a:defRPr sz="1000">
+                <a:solidFill>
+                  <a:schemeClr val="accent5"/>
+                </a:solidFill>
+              </a:defRPr>
+            </a:lvl1pPr>
+          </a:lstStyle>
+          <a:p>
+            <a:pPr algn="r"/>
+            <a:fld id="{F7021451-1387-4CA6-816F-3879F97B5CBC}" type="slidenum">
+              <a:rPr b="0" lang="en-US"/>
+              <a:t>18</a:t>
+            </a:fld>
+            <a:endParaRPr lang="en-US"/>
+          </a:p>
+        </p:txBody>
+      </p:sp>
+    </p:spTree>
+  </p:cSld>
+  <p:clrMapOvr>
+    <a:masterClrMapping/>
+  </p:clrMapOvr>
+</p:sld>
+</file>
+
+<file path=ppt/slides/slide19.xml><?xml version="1.0" encoding="utf-8"?>
+<p:sld xmlns:a="http://schemas.openxmlformats.org/drawingml/2006/main" xmlns:r="http://schemas.openxmlformats.org/officeDocument/2006/relationships" xmlns:p="http://schemas.openxmlformats.org/presentationml/2006/main">
+  <p:cSld name="Slide 19">
+    <p:spTree>
+      <p:nvGrpSpPr>
+        <p:cNvPr id="1" name=""/>
+        <p:cNvGrpSpPr/>
+        <p:nvPr/>
+      </p:nvGrpSpPr>
+      <p:grpSpPr>
+        <a:xfrm>
+          <a:off x="0" y="0"/>
+          <a:ext cx="0" cy="0"/>
+          <a:chOff x="0" y="0"/>
+          <a:chExt cx="0" cy="0"/>
+        </a:xfrm>
+      </p:grpSpPr>
+      <p:sp>
+        <p:nvSpPr>
+          <p:cNvPr id="2" name="Text 0"/>
+          <p:cNvSpPr/>
+          <p:nvPr>
+            <p:ph idx="100" type="title" hasCustomPrompt="1"/>
+          </p:nvPr>
+        </p:nvSpPr>
+        <p:spPr>
+          <a:xfrm>
+            <a:off x="548640" y="365760"/>
+            <a:ext cx="11094415" cy="822960"/>
+          </a:xfrm>
+          <a:prstGeom prst="rect">
+            <a:avLst/>
+          </a:prstGeom>
+          <a:noFill/>
+          <a:ln/>
+        </p:spPr>
+        <p:txBody>
+          <a:bodyPr wrap="square" lIns="0" tIns="0" rIns="0" bIns="0" rtlCol="0" anchor="ctr"/>
+          <a:lstStyle/>
+          <a:p>
+            <a:pPr algn="l" indent="0" marL="0">
+              <a:buNone/>
+            </a:pPr>
+            <a:r>
+              <a:rPr lang="en-US" sz="3400" b="1" dirty="0">
+                <a:solidFill>
+                  <a:schemeClr val="tx2"/>
+                </a:solidFill>
+                <a:latin typeface="Cambria" pitchFamily="34" charset="0"/>
+                <a:ea typeface="Cambria" pitchFamily="34" charset="-122"/>
+                <a:cs typeface="Cambria" pitchFamily="34" charset="-120"/>
+              </a:rPr>
+              <a:t>Future scope</a:t>
+            </a:r>
+            <a:endParaRPr lang="en-US" sz="3400" dirty="0"/>
+          </a:p>
+        </p:txBody>
+      </p:sp>
+      <p:sp>
+        <p:nvSpPr>
+          <p:cNvPr id="3" name="Real devices card"/>
+          <p:cNvSpPr/>
+          <p:nvPr/>
+        </p:nvSpPr>
+        <p:spPr>
+          <a:xfrm>
+            <a:off x="548640" y="1417320"/>
+            <a:ext cx="3520440" cy="2011680"/>
+          </a:xfrm>
+          <a:prstGeom prst="roundRect">
+            <a:avLst>
+              <a:gd name="adj" fmla="val 5455"/>
+            </a:avLst>
+          </a:prstGeom>
+          <a:solidFill>
+            <a:schemeClr val="bg2"/>
+          </a:solidFill>
+          <a:ln w="12700">
+            <a:solidFill>
+              <a:schemeClr val="bg2"/>
+            </a:solidFill>
+            <a:prstDash val="solid"/>
+          </a:ln>
+        </p:spPr>
+      </p:sp>
+      <p:sp>
+        <p:nvSpPr>
+          <p:cNvPr id="4" name="Real devices circle"/>
+          <p:cNvSpPr/>
+          <p:nvPr/>
+        </p:nvSpPr>
+        <p:spPr>
+          <a:xfrm>
+            <a:off x="822960" y="1691640"/>
+            <a:ext cx="640080" cy="640080"/>
+          </a:xfrm>
+          <a:prstGeom prst="ellipse">
+            <a:avLst/>
+          </a:prstGeom>
+          <a:solidFill>
+            <a:schemeClr val="accent1"/>
+          </a:solidFill>
+          <a:ln w="12700">
+            <a:solidFill>
+              <a:schemeClr val="accent1"/>
+            </a:solidFill>
+            <a:prstDash val="solid"/>
+          </a:ln>
+        </p:spPr>
+      </p:sp>
+      <p:pic>
+        <p:nvPicPr>
+          <p:cNvPr id="5" name="Real devices icon" descr="preencoded.png">    </p:cNvPr>
+          <p:cNvPicPr>
+            <a:picLocks noChangeAspect="1"/>
+          </p:cNvPicPr>
+          <p:nvPr/>
+        </p:nvPicPr>
+        <p:blipFill>
+          <a:blip r:embed="rId1"/>
+          <a:stretch>
+            <a:fillRect/>
+          </a:stretch>
+        </p:blipFill>
+        <p:spPr>
+          <a:xfrm>
+            <a:off x="982980" y="1851660"/>
+            <a:ext cx="320040" cy="320040"/>
+          </a:xfrm>
+          <a:prstGeom prst="rect">
+            <a:avLst/>
+          </a:prstGeom>
+        </p:spPr>
+      </p:pic>
+      <p:sp>
+        <p:nvSpPr>
+          <p:cNvPr id="6" name="Text 3"/>
+          <p:cNvSpPr txBox="1"/>
+          <p:nvPr/>
+        </p:nvSpPr>
+        <p:spPr>
+          <a:xfrm>
+            <a:off x="1600200" y="1737360"/>
+            <a:ext cx="2286000" cy="548640"/>
+          </a:xfrm>
+          <a:prstGeom prst="rect">
+            <a:avLst/>
+          </a:prstGeom>
+          <a:noFill/>
+          <a:ln/>
+        </p:spPr>
+        <p:txBody>
+          <a:bodyPr wrap="square" lIns="0" tIns="0" rIns="0" bIns="0" rtlCol="0" anchor="ctr"/>
+          <a:lstStyle/>
+          <a:p>
+            <a:pPr indent="0" marL="0">
+              <a:buNone/>
+            </a:pPr>
+            <a:r>
+              <a:rPr lang="en-US" sz="1800" b="1" dirty="0">
+                <a:solidFill>
+                  <a:schemeClr val="tx2"/>
+                </a:solidFill>
+              </a:rPr>
+              <a:t>Real devices</a:t>
+            </a:r>
+            <a:endParaRPr lang="en-US" sz="1800" dirty="0"/>
+          </a:p>
+        </p:txBody>
+      </p:sp>
+      <p:sp>
+        <p:nvSpPr>
+          <p:cNvPr id="7" name="Text 4"/>
+          <p:cNvSpPr txBox="1"/>
+          <p:nvPr/>
+        </p:nvSpPr>
+        <p:spPr>
+          <a:xfrm>
+            <a:off x="822960" y="2514600"/>
+            <a:ext cx="2971800" cy="777240"/>
+          </a:xfrm>
+          <a:prstGeom prst="rect">
+            <a:avLst/>
+          </a:prstGeom>
+          <a:noFill/>
+          <a:ln/>
+        </p:spPr>
+        <p:txBody>
+          <a:bodyPr wrap="square" lIns="0" tIns="0" rIns="0" bIns="0" rtlCol="0" anchor="t"/>
+          <a:lstStyle/>
+          <a:p>
+            <a:pPr indent="0" marL="0">
+              <a:buNone/>
+            </a:pPr>
+            <a:r>
+              <a:rPr lang="en-US" sz="1500" dirty="0">
+                <a:solidFill>
+                  <a:schemeClr val="tx1"/>
+                </a:solidFill>
+              </a:rPr>
+              <a:t>RFID gates, IoT sensors and GPS trackers instead of the simulation</a:t>
+            </a:r>
+            <a:endParaRPr lang="en-US" sz="1500" dirty="0"/>
+          </a:p>
+        </p:txBody>
+      </p:sp>
+      <p:sp>
+        <p:nvSpPr>
+          <p:cNvPr id="8" name="Billing and customs card"/>
+          <p:cNvSpPr/>
+          <p:nvPr/>
+        </p:nvSpPr>
+        <p:spPr>
+          <a:xfrm>
+            <a:off x="4425696" y="1417320"/>
+            <a:ext cx="3520440" cy="2011680"/>
+          </a:xfrm>
+          <a:prstGeom prst="roundRect">
+            <a:avLst>
+              <a:gd name="adj" fmla="val 5455"/>
+            </a:avLst>
+          </a:prstGeom>
+          <a:solidFill>
+            <a:schemeClr val="bg2"/>
+          </a:solidFill>
+          <a:ln w="12700">
+            <a:solidFill>
+              <a:schemeClr val="bg2"/>
+            </a:solidFill>
+            <a:prstDash val="solid"/>
+          </a:ln>
+        </p:spPr>
+      </p:sp>
+      <p:sp>
+        <p:nvSpPr>
+          <p:cNvPr id="9" name="Billing and customs circle"/>
+          <p:cNvSpPr/>
+          <p:nvPr/>
+        </p:nvSpPr>
+        <p:spPr>
+          <a:xfrm>
+            <a:off x="4700016" y="1691640"/>
+            <a:ext cx="640080" cy="640080"/>
+          </a:xfrm>
+          <a:prstGeom prst="ellipse">
+            <a:avLst/>
+          </a:prstGeom>
+          <a:solidFill>
+            <a:schemeClr val="accent2"/>
+          </a:solidFill>
+          <a:ln w="12700">
+            <a:solidFill>
+              <a:schemeClr val="accent2"/>
+            </a:solidFill>
+            <a:prstDash val="solid"/>
+          </a:ln>
+        </p:spPr>
+      </p:sp>
+      <p:pic>
+        <p:nvPicPr>
+          <p:cNvPr id="10" name="Billing and customs icon" descr="preencoded.png">    </p:cNvPr>
+          <p:cNvPicPr>
+            <a:picLocks noChangeAspect="1"/>
+          </p:cNvPicPr>
+          <p:nvPr/>
+        </p:nvPicPr>
+        <p:blipFill>
+          <a:blip r:embed="rId2"/>
+          <a:stretch>
+            <a:fillRect/>
+          </a:stretch>
+        </p:blipFill>
+        <p:spPr>
+          <a:xfrm>
+            <a:off x="4860036" y="1851660"/>
+            <a:ext cx="320040" cy="320040"/>
+          </a:xfrm>
+          <a:prstGeom prst="rect">
+            <a:avLst/>
+          </a:prstGeom>
+        </p:spPr>
+      </p:pic>
+      <p:sp>
+        <p:nvSpPr>
+          <p:cNvPr id="11" name="Text 7"/>
+          <p:cNvSpPr txBox="1"/>
+          <p:nvPr/>
+        </p:nvSpPr>
+        <p:spPr>
+          <a:xfrm>
+            <a:off x="5477256" y="1737360"/>
+            <a:ext cx="2286000" cy="548640"/>
+          </a:xfrm>
+          <a:prstGeom prst="rect">
+            <a:avLst/>
+          </a:prstGeom>
+          <a:noFill/>
+          <a:ln/>
+        </p:spPr>
+        <p:txBody>
+          <a:bodyPr wrap="square" lIns="0" tIns="0" rIns="0" bIns="0" rtlCol="0" anchor="ctr"/>
+          <a:lstStyle/>
+          <a:p>
+            <a:pPr indent="0" marL="0">
+              <a:buNone/>
+            </a:pPr>
+            <a:r>
+              <a:rPr lang="en-US" sz="1800" b="1" dirty="0">
+                <a:solidFill>
+                  <a:schemeClr val="tx2"/>
+                </a:solidFill>
+              </a:rPr>
+              <a:t>Billing and customs</a:t>
+            </a:r>
+            <a:endParaRPr lang="en-US" sz="1800" dirty="0"/>
+          </a:p>
+        </p:txBody>
+      </p:sp>
+      <p:sp>
+        <p:nvSpPr>
+          <p:cNvPr id="12" name="Text 8"/>
+          <p:cNvSpPr txBox="1"/>
+          <p:nvPr/>
+        </p:nvSpPr>
+        <p:spPr>
+          <a:xfrm>
+            <a:off x="4700016" y="2514600"/>
+            <a:ext cx="2971800" cy="777240"/>
+          </a:xfrm>
+          <a:prstGeom prst="rect">
+            <a:avLst/>
+          </a:prstGeom>
+          <a:noFill/>
+          <a:ln/>
+        </p:spPr>
+        <p:txBody>
+          <a:bodyPr wrap="square" lIns="0" tIns="0" rIns="0" bIns="0" rtlCol="0" anchor="t"/>
+          <a:lstStyle/>
+          <a:p>
+            <a:pPr indent="0" marL="0">
+              <a:buNone/>
+            </a:pPr>
+            <a:r>
+              <a:rPr lang="en-US" sz="1500" dirty="0">
+                <a:solidFill>
+                  <a:schemeClr val="tx1"/>
+                </a:solidFill>
+              </a:rPr>
+              <a:t>Invoices, payments and customs documents</a:t>
+            </a:r>
+            <a:endParaRPr lang="en-US" sz="1500" dirty="0"/>
+          </a:p>
+        </p:txBody>
+      </p:sp>
+      <p:sp>
+        <p:nvSpPr>
+          <p:cNvPr id="13" name="Machine learning card"/>
+          <p:cNvSpPr/>
+          <p:nvPr/>
+        </p:nvSpPr>
+        <p:spPr>
+          <a:xfrm>
+            <a:off x="8302752" y="1417320"/>
+            <a:ext cx="3520440" cy="2011680"/>
+          </a:xfrm>
+          <a:prstGeom prst="roundRect">
+            <a:avLst>
+              <a:gd name="adj" fmla="val 5455"/>
+            </a:avLst>
+          </a:prstGeom>
+          <a:solidFill>
+            <a:schemeClr val="bg2"/>
+          </a:solidFill>
+          <a:ln w="12700">
+            <a:solidFill>
+              <a:schemeClr val="bg2"/>
+            </a:solidFill>
+            <a:prstDash val="solid"/>
+          </a:ln>
+        </p:spPr>
+      </p:sp>
+      <p:sp>
+        <p:nvSpPr>
+          <p:cNvPr id="14" name="Machine learning circle"/>
+          <p:cNvSpPr/>
+          <p:nvPr/>
+        </p:nvSpPr>
+        <p:spPr>
+          <a:xfrm>
+            <a:off x="8577072" y="1691640"/>
+            <a:ext cx="640080" cy="640080"/>
+          </a:xfrm>
+          <a:prstGeom prst="ellipse">
+            <a:avLst/>
+          </a:prstGeom>
+          <a:solidFill>
+            <a:schemeClr val="accent1"/>
+          </a:solidFill>
+          <a:ln w="12700">
+            <a:solidFill>
+              <a:schemeClr val="accent1"/>
+            </a:solidFill>
+            <a:prstDash val="solid"/>
+          </a:ln>
+        </p:spPr>
+      </p:sp>
+      <p:pic>
+        <p:nvPicPr>
+          <p:cNvPr id="15" name="Machine learning icon" descr="preencoded.png">    </p:cNvPr>
+          <p:cNvPicPr>
+            <a:picLocks noChangeAspect="1"/>
+          </p:cNvPicPr>
+          <p:nvPr/>
+        </p:nvPicPr>
+        <p:blipFill>
+          <a:blip r:embed="rId3"/>
+          <a:stretch>
+            <a:fillRect/>
+          </a:stretch>
+        </p:blipFill>
+        <p:spPr>
+          <a:xfrm>
+            <a:off x="8737092" y="1851660"/>
+            <a:ext cx="320040" cy="320040"/>
+          </a:xfrm>
+          <a:prstGeom prst="rect">
+            <a:avLst/>
+          </a:prstGeom>
+        </p:spPr>
+      </p:pic>
+      <p:sp>
+        <p:nvSpPr>
+          <p:cNvPr id="16" name="Text 11"/>
+          <p:cNvSpPr txBox="1"/>
+          <p:nvPr/>
+        </p:nvSpPr>
+        <p:spPr>
+          <a:xfrm>
+            <a:off x="9354312" y="1737360"/>
+            <a:ext cx="2286000" cy="548640"/>
+          </a:xfrm>
+          <a:prstGeom prst="rect">
+            <a:avLst/>
+          </a:prstGeom>
+          <a:noFill/>
+          <a:ln/>
+        </p:spPr>
+        <p:txBody>
+          <a:bodyPr wrap="square" lIns="0" tIns="0" rIns="0" bIns="0" rtlCol="0" anchor="ctr"/>
+          <a:lstStyle/>
+          <a:p>
+            <a:pPr indent="0" marL="0">
+              <a:buNone/>
+            </a:pPr>
+            <a:r>
+              <a:rPr lang="en-US" sz="1800" b="1" dirty="0">
+                <a:solidFill>
+                  <a:schemeClr val="tx2"/>
+                </a:solidFill>
+              </a:rPr>
+              <a:t>Machine learning</a:t>
+            </a:r>
+            <a:endParaRPr lang="en-US" sz="1800" dirty="0"/>
+          </a:p>
+        </p:txBody>
+      </p:sp>
+      <p:sp>
+        <p:nvSpPr>
+          <p:cNvPr id="17" name="Text 12"/>
+          <p:cNvSpPr txBox="1"/>
+          <p:nvPr/>
+        </p:nvSpPr>
+        <p:spPr>
+          <a:xfrm>
+            <a:off x="8577072" y="2514600"/>
+            <a:ext cx="2971800" cy="777240"/>
+          </a:xfrm>
+          <a:prstGeom prst="rect">
+            <a:avLst/>
+          </a:prstGeom>
+          <a:noFill/>
+          <a:ln/>
+        </p:spPr>
+        <p:txBody>
+          <a:bodyPr wrap="square" lIns="0" tIns="0" rIns="0" bIns="0" rtlCol="0" anchor="t"/>
+          <a:lstStyle/>
+          <a:p>
+            <a:pPr indent="0" marL="0">
+              <a:buNone/>
+            </a:pPr>
+            <a:r>
+              <a:rPr lang="en-US" sz="1500" dirty="0">
+                <a:solidFill>
+                  <a:schemeClr val="tx1"/>
+                </a:solidFill>
+              </a:rPr>
+              <a:t>Oracle Machine Learning models trained inside the database</a:t>
+            </a:r>
+            <a:endParaRPr lang="en-US" sz="1500" dirty="0"/>
+          </a:p>
+        </p:txBody>
+      </p:sp>
+      <p:sp>
+        <p:nvSpPr>
+          <p:cNvPr id="18" name="Mobile app card"/>
+          <p:cNvSpPr/>
+          <p:nvPr/>
+        </p:nvSpPr>
+        <p:spPr>
+          <a:xfrm>
+            <a:off x="548640" y="3749040"/>
+            <a:ext cx="3520440" cy="2011680"/>
+          </a:xfrm>
+          <a:prstGeom prst="roundRect">
+            <a:avLst>
+              <a:gd name="adj" fmla="val 5455"/>
+            </a:avLst>
+          </a:prstGeom>
+          <a:solidFill>
+            <a:schemeClr val="bg2"/>
+          </a:solidFill>
+          <a:ln w="12700">
+            <a:solidFill>
+              <a:schemeClr val="bg2"/>
+            </a:solidFill>
+            <a:prstDash val="solid"/>
+          </a:ln>
+        </p:spPr>
+      </p:sp>
+      <p:sp>
+        <p:nvSpPr>
+          <p:cNvPr id="19" name="Mobile app circle"/>
+          <p:cNvSpPr/>
+          <p:nvPr/>
+        </p:nvSpPr>
+        <p:spPr>
+          <a:xfrm>
+            <a:off x="822960" y="4023360"/>
+            <a:ext cx="640080" cy="640080"/>
+          </a:xfrm>
+          <a:prstGeom prst="ellipse">
+            <a:avLst/>
+          </a:prstGeom>
+          <a:solidFill>
+            <a:schemeClr val="accent2"/>
+          </a:solidFill>
+          <a:ln w="12700">
+            <a:solidFill>
+              <a:schemeClr val="accent2"/>
+            </a:solidFill>
+            <a:prstDash val="solid"/>
+          </a:ln>
+        </p:spPr>
+      </p:sp>
+      <p:pic>
+        <p:nvPicPr>
+          <p:cNvPr id="20" name="Mobile app icon" descr="preencoded.png">    </p:cNvPr>
+          <p:cNvPicPr>
+            <a:picLocks noChangeAspect="1"/>
+          </p:cNvPicPr>
+          <p:nvPr/>
+        </p:nvPicPr>
+        <p:blipFill>
+          <a:blip r:embed="rId4"/>
+          <a:stretch>
+            <a:fillRect/>
+          </a:stretch>
+        </p:blipFill>
+        <p:spPr>
+          <a:xfrm>
+            <a:off x="982980" y="4183380"/>
+            <a:ext cx="320040" cy="320040"/>
+          </a:xfrm>
+          <a:prstGeom prst="rect">
+            <a:avLst/>
+          </a:prstGeom>
+        </p:spPr>
+      </p:pic>
+      <p:sp>
+        <p:nvSpPr>
+          <p:cNvPr id="21" name="Text 15"/>
+          <p:cNvSpPr txBox="1"/>
+          <p:nvPr/>
+        </p:nvSpPr>
+        <p:spPr>
+          <a:xfrm>
+            <a:off x="1600200" y="4069080"/>
+            <a:ext cx="2286000" cy="548640"/>
+          </a:xfrm>
+          <a:prstGeom prst="rect">
+            <a:avLst/>
+          </a:prstGeom>
+          <a:noFill/>
+          <a:ln/>
+        </p:spPr>
+        <p:txBody>
+          <a:bodyPr wrap="square" lIns="0" tIns="0" rIns="0" bIns="0" rtlCol="0" anchor="ctr"/>
+          <a:lstStyle/>
+          <a:p>
+            <a:pPr indent="0" marL="0">
+              <a:buNone/>
+            </a:pPr>
+            <a:r>
+              <a:rPr lang="en-US" sz="1800" b="1" dirty="0">
+                <a:solidFill>
+                  <a:schemeClr val="tx2"/>
+                </a:solidFill>
+              </a:rPr>
+              <a:t>Mobile app</a:t>
+            </a:r>
+            <a:endParaRPr lang="en-US" sz="1800" dirty="0"/>
+          </a:p>
+        </p:txBody>
+      </p:sp>
+      <p:sp>
+        <p:nvSpPr>
+          <p:cNvPr id="22" name="Text 16"/>
+          <p:cNvSpPr txBox="1"/>
+          <p:nvPr/>
+        </p:nvSpPr>
+        <p:spPr>
+          <a:xfrm>
+            <a:off x="822960" y="4846320"/>
+            <a:ext cx="2971800" cy="777240"/>
+          </a:xfrm>
+          <a:prstGeom prst="rect">
+            <a:avLst/>
+          </a:prstGeom>
+          <a:noFill/>
+          <a:ln/>
+        </p:spPr>
+        <p:txBody>
+          <a:bodyPr wrap="square" lIns="0" tIns="0" rIns="0" bIns="0" rtlCol="0" anchor="t"/>
+          <a:lstStyle/>
+          <a:p>
+            <a:pPr indent="0" marL="0">
+              <a:buNone/>
+            </a:pPr>
+            <a:r>
+              <a:rPr lang="en-US" sz="1500" dirty="0">
+                <a:solidFill>
+                  <a:schemeClr val="tx1"/>
+                </a:solidFill>
+              </a:rPr>
+              <a:t>Operators update tasks on the warehouse floor</a:t>
+            </a:r>
+            <a:endParaRPr lang="en-US" sz="1500" dirty="0"/>
+          </a:p>
+        </p:txBody>
+      </p:sp>
+      <p:sp>
+        <p:nvSpPr>
+          <p:cNvPr id="23" name="Cloud database card"/>
+          <p:cNvSpPr/>
+          <p:nvPr/>
+        </p:nvSpPr>
+        <p:spPr>
+          <a:xfrm>
+            <a:off x="4425696" y="3749040"/>
+            <a:ext cx="3520440" cy="2011680"/>
+          </a:xfrm>
+          <a:prstGeom prst="roundRect">
+            <a:avLst>
+              <a:gd name="adj" fmla="val 5455"/>
+            </a:avLst>
+          </a:prstGeom>
+          <a:solidFill>
+            <a:schemeClr val="bg2"/>
+          </a:solidFill>
+          <a:ln w="12700">
+            <a:solidFill>
+              <a:schemeClr val="bg2"/>
+            </a:solidFill>
+            <a:prstDash val="solid"/>
+          </a:ln>
+        </p:spPr>
+      </p:sp>
+      <p:sp>
+        <p:nvSpPr>
+          <p:cNvPr id="24" name="Cloud database circle"/>
+          <p:cNvSpPr/>
+          <p:nvPr/>
+        </p:nvSpPr>
+        <p:spPr>
+          <a:xfrm>
+            <a:off x="4700016" y="4023360"/>
+            <a:ext cx="640080" cy="640080"/>
+          </a:xfrm>
+          <a:prstGeom prst="ellipse">
+            <a:avLst/>
+          </a:prstGeom>
+          <a:solidFill>
+            <a:schemeClr val="accent1"/>
+          </a:solidFill>
+          <a:ln w="12700">
+            <a:solidFill>
+              <a:schemeClr val="accent1"/>
+            </a:solidFill>
+            <a:prstDash val="solid"/>
+          </a:ln>
+        </p:spPr>
+      </p:sp>
+      <p:pic>
+        <p:nvPicPr>
+          <p:cNvPr id="25" name="Cloud database icon" descr="preencoded.png">    </p:cNvPr>
+          <p:cNvPicPr>
+            <a:picLocks noChangeAspect="1"/>
+          </p:cNvPicPr>
+          <p:nvPr/>
+        </p:nvPicPr>
+        <p:blipFill>
+          <a:blip r:embed="rId5"/>
+          <a:stretch>
+            <a:fillRect/>
+          </a:stretch>
+        </p:blipFill>
+        <p:spPr>
+          <a:xfrm>
+            <a:off x="4860036" y="4183380"/>
+            <a:ext cx="320040" cy="320040"/>
+          </a:xfrm>
+          <a:prstGeom prst="rect">
+            <a:avLst/>
+          </a:prstGeom>
+        </p:spPr>
+      </p:pic>
+      <p:sp>
+        <p:nvSpPr>
+          <p:cNvPr id="26" name="Text 19"/>
+          <p:cNvSpPr txBox="1"/>
+          <p:nvPr/>
+        </p:nvSpPr>
+        <p:spPr>
+          <a:xfrm>
+            <a:off x="5477256" y="4069080"/>
+            <a:ext cx="2286000" cy="548640"/>
+          </a:xfrm>
+          <a:prstGeom prst="rect">
+            <a:avLst/>
+          </a:prstGeom>
+          <a:noFill/>
+          <a:ln/>
+        </p:spPr>
+        <p:txBody>
+          <a:bodyPr wrap="square" lIns="0" tIns="0" rIns="0" bIns="0" rtlCol="0" anchor="ctr"/>
+          <a:lstStyle/>
+          <a:p>
+            <a:pPr indent="0" marL="0">
+              <a:buNone/>
+            </a:pPr>
+            <a:r>
+              <a:rPr lang="en-US" sz="1800" b="1" dirty="0">
+                <a:solidFill>
+                  <a:schemeClr val="tx2"/>
+                </a:solidFill>
+              </a:rPr>
+              <a:t>Cloud database</a:t>
+            </a:r>
+            <a:endParaRPr lang="en-US" sz="1800" dirty="0"/>
+          </a:p>
+        </p:txBody>
+      </p:sp>
+      <p:sp>
+        <p:nvSpPr>
+          <p:cNvPr id="27" name="Text 20"/>
+          <p:cNvSpPr txBox="1"/>
+          <p:nvPr/>
+        </p:nvSpPr>
+        <p:spPr>
+          <a:xfrm>
+            <a:off x="4700016" y="4846320"/>
+            <a:ext cx="2971800" cy="777240"/>
+          </a:xfrm>
+          <a:prstGeom prst="rect">
+            <a:avLst/>
+          </a:prstGeom>
+          <a:noFill/>
+          <a:ln/>
+        </p:spPr>
+        <p:txBody>
+          <a:bodyPr wrap="square" lIns="0" tIns="0" rIns="0" bIns="0" rtlCol="0" anchor="t"/>
+          <a:lstStyle/>
+          <a:p>
+            <a:pPr indent="0" marL="0">
+              <a:buNone/>
+            </a:pPr>
+            <a:r>
+              <a:rPr lang="en-US" sz="1500" dirty="0">
+                <a:solidFill>
+                  <a:schemeClr val="tx1"/>
+                </a:solidFill>
+              </a:rPr>
+              <a:t>Oracle Autonomous Database for many sites</a:t>
+            </a:r>
+            <a:endParaRPr lang="en-US" sz="1500" dirty="0"/>
+          </a:p>
+        </p:txBody>
+      </p:sp>
+      <p:sp>
+        <p:nvSpPr>
+          <p:cNvPr id="28" name="High availability card"/>
+          <p:cNvSpPr/>
+          <p:nvPr/>
+        </p:nvSpPr>
+        <p:spPr>
+          <a:xfrm>
+            <a:off x="8302752" y="3749040"/>
+            <a:ext cx="3520440" cy="2011680"/>
+          </a:xfrm>
+          <a:prstGeom prst="roundRect">
+            <a:avLst>
+              <a:gd name="adj" fmla="val 5455"/>
+            </a:avLst>
+          </a:prstGeom>
+          <a:solidFill>
+            <a:schemeClr val="bg2"/>
+          </a:solidFill>
+          <a:ln w="12700">
+            <a:solidFill>
+              <a:schemeClr val="bg2"/>
+            </a:solidFill>
+            <a:prstDash val="solid"/>
+          </a:ln>
+        </p:spPr>
+      </p:sp>
+      <p:sp>
+        <p:nvSpPr>
+          <p:cNvPr id="29" name="High availability circle"/>
+          <p:cNvSpPr/>
+          <p:nvPr/>
+        </p:nvSpPr>
+        <p:spPr>
+          <a:xfrm>
+            <a:off x="8577072" y="4023360"/>
+            <a:ext cx="640080" cy="640080"/>
+          </a:xfrm>
+          <a:prstGeom prst="ellipse">
+            <a:avLst/>
+          </a:prstGeom>
+          <a:solidFill>
+            <a:schemeClr val="accent2"/>
+          </a:solidFill>
+          <a:ln w="12700">
+            <a:solidFill>
+              <a:schemeClr val="accent2"/>
+            </a:solidFill>
+            <a:prstDash val="solid"/>
+          </a:ln>
+        </p:spPr>
+      </p:sp>
+      <p:pic>
+        <p:nvPicPr>
+          <p:cNvPr id="30" name="High availability icon" descr="preencoded.png">    </p:cNvPr>
+          <p:cNvPicPr>
+            <a:picLocks noChangeAspect="1"/>
+          </p:cNvPicPr>
+          <p:nvPr/>
+        </p:nvPicPr>
+        <p:blipFill>
+          <a:blip r:embed="rId6"/>
+          <a:stretch>
+            <a:fillRect/>
+          </a:stretch>
+        </p:blipFill>
+        <p:spPr>
+          <a:xfrm>
+            <a:off x="8737092" y="4183380"/>
+            <a:ext cx="320040" cy="320040"/>
+          </a:xfrm>
+          <a:prstGeom prst="rect">
+            <a:avLst/>
+          </a:prstGeom>
+        </p:spPr>
+      </p:pic>
+      <p:sp>
+        <p:nvSpPr>
+          <p:cNvPr id="31" name="Text 23"/>
+          <p:cNvSpPr txBox="1"/>
+          <p:nvPr/>
+        </p:nvSpPr>
+        <p:spPr>
+          <a:xfrm>
+            <a:off x="9354312" y="4069080"/>
+            <a:ext cx="2286000" cy="548640"/>
+          </a:xfrm>
+          <a:prstGeom prst="rect">
+            <a:avLst/>
+          </a:prstGeom>
+          <a:noFill/>
+          <a:ln/>
+        </p:spPr>
+        <p:txBody>
+          <a:bodyPr wrap="square" lIns="0" tIns="0" rIns="0" bIns="0" rtlCol="0" anchor="ctr"/>
+          <a:lstStyle/>
+          <a:p>
+            <a:pPr indent="0" marL="0">
+              <a:buNone/>
+            </a:pPr>
+            <a:r>
+              <a:rPr lang="en-US" sz="1800" b="1" dirty="0">
+                <a:solidFill>
+                  <a:schemeClr val="tx2"/>
+                </a:solidFill>
+              </a:rPr>
+              <a:t>High availability</a:t>
+            </a:r>
+            <a:endParaRPr lang="en-US" sz="1800" dirty="0"/>
+          </a:p>
+        </p:txBody>
+      </p:sp>
+      <p:sp>
+        <p:nvSpPr>
+          <p:cNvPr id="32" name="Text 24"/>
+          <p:cNvSpPr txBox="1"/>
+          <p:nvPr/>
+        </p:nvSpPr>
+        <p:spPr>
+          <a:xfrm>
+            <a:off x="8577072" y="4846320"/>
+            <a:ext cx="2971800" cy="777240"/>
+          </a:xfrm>
+          <a:prstGeom prst="rect">
+            <a:avLst/>
+          </a:prstGeom>
+          <a:noFill/>
+          <a:ln/>
+        </p:spPr>
+        <p:txBody>
+          <a:bodyPr wrap="square" lIns="0" tIns="0" rIns="0" bIns="0" rtlCol="0" anchor="t"/>
+          <a:lstStyle/>
+          <a:p>
+            <a:pPr indent="0" marL="0">
+              <a:buNone/>
+            </a:pPr>
+            <a:r>
+              <a:rPr lang="en-US" sz="1500" dirty="0">
+                <a:solidFill>
+                  <a:schemeClr val="tx1"/>
+                </a:solidFill>
+              </a:rPr>
+              <a:t>Data Guard and scheduled RMAN backups</a:t>
+            </a:r>
+            <a:endParaRPr lang="en-US" sz="1500" dirty="0"/>
+          </a:p>
+        </p:txBody>
+      </p:sp>
+      <p:sp>
+        <p:nvSpPr>
+          <p:cNvPr id="25" name="Slide Number Placeholder 0"/>
+          <p:cNvSpPr>
+            <a:spLocks noGrp="1"/>
+          </p:cNvSpPr>
+          <p:nvPr>
+            <p:ph type="sldNum" sz="quarter" idx="4294967295"/>
+          </p:nvPr>
+        </p:nvSpPr>
+        <p:spPr>
+          <a:xfrm>
+            <a:off x="11094415" y="6446520"/>
+            <a:ext cx="548640" cy="274320"/>
+          </a:xfrm>
+          <a:prstGeom prst="rect">
+            <a:avLst/>
+          </a:prstGeom>
+          <a:extLst>
+            <a:ext uri="{C572A759-6A51-4108-AA02-DFA0A04FC94B}">
+              <ma14:wrappingTextBoxFlag xmlns:ma14="http://schemas.microsoft.com/office/mac/drawingml/2011/main" val="0"/>
+            </a:ext>
+          </a:extLst>
+        </p:spPr>
+        <p:txBody>
+          <a:bodyPr/>
+          <a:lstStyle>
+            <a:lvl1pPr>
+              <a:defRPr sz="1000">
+                <a:solidFill>
+                  <a:schemeClr val="accent5"/>
+                </a:solidFill>
+              </a:defRPr>
+            </a:lvl1pPr>
+          </a:lstStyle>
+          <a:p>
+            <a:pPr algn="r"/>
+            <a:fld id="{F7021451-1387-4CA6-816F-3879F97B5CBC}" type="slidenum">
+              <a:rPr b="0" lang="en-US"/>
+              <a:t>19</a:t>
+            </a:fld>
+            <a:endParaRPr lang="en-US"/>
           </a:p>
         </p:txBody>
       </p:sp>
@@ -11158,6 +14248,514 @@
 </p:sld>
 </file>
 
+<file path=ppt/slides/slide20.xml><?xml version="1.0" encoding="utf-8"?>
+<p:sld xmlns:a="http://schemas.openxmlformats.org/drawingml/2006/main" xmlns:r="http://schemas.openxmlformats.org/officeDocument/2006/relationships" xmlns:p="http://schemas.openxmlformats.org/presentationml/2006/main">
+  <p:cSld name="Slide 20">
+    <p:spTree>
+      <p:nvGrpSpPr>
+        <p:cNvPr id="1" name=""/>
+        <p:cNvGrpSpPr/>
+        <p:nvPr/>
+      </p:nvGrpSpPr>
+      <p:grpSpPr>
+        <a:xfrm>
+          <a:off x="0" y="0"/>
+          <a:ext cx="0" cy="0"/>
+          <a:chOff x="0" y="0"/>
+          <a:chExt cx="0" cy="0"/>
+        </a:xfrm>
+      </p:grpSpPr>
+      <p:sp>
+        <p:nvSpPr>
+          <p:cNvPr id="2" name="Text 0"/>
+          <p:cNvSpPr/>
+          <p:nvPr>
+            <p:ph idx="100" type="title" hasCustomPrompt="1"/>
+          </p:nvPr>
+        </p:nvSpPr>
+        <p:spPr>
+          <a:xfrm>
+            <a:off x="548640" y="640080"/>
+            <a:ext cx="11094415" cy="914400"/>
+          </a:xfrm>
+          <a:prstGeom prst="rect">
+            <a:avLst/>
+          </a:prstGeom>
+          <a:noFill/>
+          <a:ln/>
+        </p:spPr>
+        <p:txBody>
+          <a:bodyPr wrap="square" lIns="0" tIns="0" rIns="0" bIns="0" rtlCol="0"/>
+          <a:lstStyle/>
+          <a:p>
+            <a:pPr algn="l" indent="0" marL="0">
+              <a:buNone/>
+            </a:pPr>
+            <a:r>
+              <a:rPr lang="en-US" sz="4000" b="1" dirty="0">
+                <a:solidFill>
+                  <a:schemeClr val="bg1"/>
+                </a:solidFill>
+                <a:latin typeface="Cambria" pitchFamily="34" charset="0"/>
+                <a:ea typeface="Cambria" pitchFamily="34" charset="-122"/>
+                <a:cs typeface="Cambria" pitchFamily="34" charset="-120"/>
+              </a:rPr>
+              <a:t>Conclusion</a:t>
+            </a:r>
+            <a:endParaRPr lang="en-US" sz="4000" dirty="0"/>
+          </a:p>
+        </p:txBody>
+      </p:sp>
+      <p:sp>
+        <p:nvSpPr>
+          <p:cNvPr id="3" name="Text 1"/>
+          <p:cNvSpPr txBox="1"/>
+          <p:nvPr/>
+        </p:nvSpPr>
+        <p:spPr>
+          <a:xfrm>
+            <a:off x="548640" y="1828800"/>
+            <a:ext cx="1737360" cy="548640"/>
+          </a:xfrm>
+          <a:prstGeom prst="rect">
+            <a:avLst/>
+          </a:prstGeom>
+          <a:noFill/>
+          <a:ln/>
+        </p:spPr>
+        <p:txBody>
+          <a:bodyPr wrap="square" lIns="0" tIns="0" rIns="0" bIns="0" rtlCol="0" anchor="ctr"/>
+          <a:lstStyle/>
+          <a:p>
+            <a:pPr indent="0" marL="0">
+              <a:buNone/>
+            </a:pPr>
+            <a:r>
+              <a:rPr lang="en-US" sz="2400" b="1" dirty="0">
+                <a:solidFill>
+                  <a:schemeClr val="accent1"/>
+                </a:solidFill>
+                <a:latin typeface="Cambria" pitchFamily="34" charset="0"/>
+                <a:ea typeface="Cambria" pitchFamily="34" charset="-122"/>
+                <a:cs typeface="Cambria" pitchFamily="34" charset="-120"/>
+              </a:rPr>
+              <a:t>Correct</a:t>
+            </a:r>
+            <a:endParaRPr lang="en-US" sz="2400" dirty="0"/>
+          </a:p>
+        </p:txBody>
+      </p:sp>
+      <p:sp>
+        <p:nvSpPr>
+          <p:cNvPr id="4" name="Text 2"/>
+          <p:cNvSpPr txBox="1"/>
+          <p:nvPr/>
+        </p:nvSpPr>
+        <p:spPr>
+          <a:xfrm>
+            <a:off x="2377440" y="1828800"/>
+            <a:ext cx="5120640" cy="548640"/>
+          </a:xfrm>
+          <a:prstGeom prst="rect">
+            <a:avLst/>
+          </a:prstGeom>
+          <a:noFill/>
+          <a:ln/>
+        </p:spPr>
+        <p:txBody>
+          <a:bodyPr wrap="square" lIns="0" tIns="0" rIns="0" bIns="0" rtlCol="0" anchor="ctr"/>
+          <a:lstStyle/>
+          <a:p>
+            <a:pPr indent="0" marL="0">
+              <a:buNone/>
+            </a:pPr>
+            <a:r>
+              <a:rPr lang="en-US" sz="1800" dirty="0">
+                <a:solidFill>
+                  <a:schemeClr val="bg1"/>
+                </a:solidFill>
+              </a:rPr>
+              <a:t>keys, constraints, PL/SQL and triggers keep the data valid</a:t>
+            </a:r>
+            <a:endParaRPr lang="en-US" sz="1800" dirty="0"/>
+          </a:p>
+        </p:txBody>
+      </p:sp>
+      <p:sp>
+        <p:nvSpPr>
+          <p:cNvPr id="5" name="Text 3"/>
+          <p:cNvSpPr txBox="1"/>
+          <p:nvPr/>
+        </p:nvSpPr>
+        <p:spPr>
+          <a:xfrm>
+            <a:off x="548640" y="2606040"/>
+            <a:ext cx="1737360" cy="548640"/>
+          </a:xfrm>
+          <a:prstGeom prst="rect">
+            <a:avLst/>
+          </a:prstGeom>
+          <a:noFill/>
+          <a:ln/>
+        </p:spPr>
+        <p:txBody>
+          <a:bodyPr wrap="square" lIns="0" tIns="0" rIns="0" bIns="0" rtlCol="0" anchor="ctr"/>
+          <a:lstStyle/>
+          <a:p>
+            <a:pPr indent="0" marL="0">
+              <a:buNone/>
+            </a:pPr>
+            <a:r>
+              <a:rPr lang="en-US" sz="2400" b="1" dirty="0">
+                <a:solidFill>
+                  <a:schemeClr val="accent1"/>
+                </a:solidFill>
+                <a:latin typeface="Cambria" pitchFamily="34" charset="0"/>
+                <a:ea typeface="Cambria" pitchFamily="34" charset="-122"/>
+                <a:cs typeface="Cambria" pitchFamily="34" charset="-120"/>
+              </a:rPr>
+              <a:t>Secure</a:t>
+            </a:r>
+            <a:endParaRPr lang="en-US" sz="2400" dirty="0"/>
+          </a:p>
+        </p:txBody>
+      </p:sp>
+      <p:sp>
+        <p:nvSpPr>
+          <p:cNvPr id="6" name="Text 4"/>
+          <p:cNvSpPr txBox="1"/>
+          <p:nvPr/>
+        </p:nvSpPr>
+        <p:spPr>
+          <a:xfrm>
+            <a:off x="2377440" y="2606040"/>
+            <a:ext cx="5120640" cy="548640"/>
+          </a:xfrm>
+          <a:prstGeom prst="rect">
+            <a:avLst/>
+          </a:prstGeom>
+          <a:noFill/>
+          <a:ln/>
+        </p:spPr>
+        <p:txBody>
+          <a:bodyPr wrap="square" lIns="0" tIns="0" rIns="0" bIns="0" rtlCol="0" anchor="ctr"/>
+          <a:lstStyle/>
+          <a:p>
+            <a:pPr indent="0" marL="0">
+              <a:buNone/>
+            </a:pPr>
+            <a:r>
+              <a:rPr lang="en-US" sz="1800" dirty="0">
+                <a:solidFill>
+                  <a:schemeClr val="bg1"/>
+                </a:solidFill>
+              </a:rPr>
+              <a:t>roles and the audit trail make every change accountable</a:t>
+            </a:r>
+            <a:endParaRPr lang="en-US" sz="1800" dirty="0"/>
+          </a:p>
+        </p:txBody>
+      </p:sp>
+      <p:sp>
+        <p:nvSpPr>
+          <p:cNvPr id="7" name="Text 5"/>
+          <p:cNvSpPr txBox="1"/>
+          <p:nvPr/>
+        </p:nvSpPr>
+        <p:spPr>
+          <a:xfrm>
+            <a:off x="548640" y="3383280"/>
+            <a:ext cx="1737360" cy="548640"/>
+          </a:xfrm>
+          <a:prstGeom prst="rect">
+            <a:avLst/>
+          </a:prstGeom>
+          <a:noFill/>
+          <a:ln/>
+        </p:spPr>
+        <p:txBody>
+          <a:bodyPr wrap="square" lIns="0" tIns="0" rIns="0" bIns="0" rtlCol="0" anchor="ctr"/>
+          <a:lstStyle/>
+          <a:p>
+            <a:pPr indent="0" marL="0">
+              <a:buNone/>
+            </a:pPr>
+            <a:r>
+              <a:rPr lang="en-US" sz="2400" b="1" dirty="0">
+                <a:solidFill>
+                  <a:schemeClr val="accent1"/>
+                </a:solidFill>
+                <a:latin typeface="Cambria" pitchFamily="34" charset="0"/>
+                <a:ea typeface="Cambria" pitchFamily="34" charset="-122"/>
+                <a:cs typeface="Cambria" pitchFamily="34" charset="-120"/>
+              </a:rPr>
+              <a:t>Useful</a:t>
+            </a:r>
+            <a:endParaRPr lang="en-US" sz="2400" dirty="0"/>
+          </a:p>
+        </p:txBody>
+      </p:sp>
+      <p:sp>
+        <p:nvSpPr>
+          <p:cNvPr id="8" name="Text 6"/>
+          <p:cNvSpPr txBox="1"/>
+          <p:nvPr/>
+        </p:nvSpPr>
+        <p:spPr>
+          <a:xfrm>
+            <a:off x="2377440" y="3383280"/>
+            <a:ext cx="5120640" cy="548640"/>
+          </a:xfrm>
+          <a:prstGeom prst="rect">
+            <a:avLst/>
+          </a:prstGeom>
+          <a:noFill/>
+          <a:ln/>
+        </p:spPr>
+        <p:txBody>
+          <a:bodyPr wrap="square" lIns="0" tIns="0" rIns="0" bIns="0" rtlCol="0" anchor="ctr"/>
+          <a:lstStyle/>
+          <a:p>
+            <a:pPr indent="0" marL="0">
+              <a:buNone/>
+            </a:pPr>
+            <a:r>
+              <a:rPr lang="en-US" sz="1800" dirty="0">
+                <a:solidFill>
+                  <a:schemeClr val="bg1"/>
+                </a:solidFill>
+              </a:rPr>
+              <a:t>views and reports turn the data into decisions</a:t>
+            </a:r>
+            <a:endParaRPr lang="en-US" sz="1800" dirty="0"/>
+          </a:p>
+        </p:txBody>
+      </p:sp>
+      <p:sp>
+        <p:nvSpPr>
+          <p:cNvPr id="9" name="Text 7"/>
+          <p:cNvSpPr txBox="1"/>
+          <p:nvPr/>
+        </p:nvSpPr>
+        <p:spPr>
+          <a:xfrm>
+            <a:off x="548640" y="4160520"/>
+            <a:ext cx="1737360" cy="548640"/>
+          </a:xfrm>
+          <a:prstGeom prst="rect">
+            <a:avLst/>
+          </a:prstGeom>
+          <a:noFill/>
+          <a:ln/>
+        </p:spPr>
+        <p:txBody>
+          <a:bodyPr wrap="square" lIns="0" tIns="0" rIns="0" bIns="0" rtlCol="0" anchor="ctr"/>
+          <a:lstStyle/>
+          <a:p>
+            <a:pPr indent="0" marL="0">
+              <a:buNone/>
+            </a:pPr>
+            <a:r>
+              <a:rPr lang="en-US" sz="2400" b="1" dirty="0">
+                <a:solidFill>
+                  <a:schemeClr val="accent1"/>
+                </a:solidFill>
+                <a:latin typeface="Cambria" pitchFamily="34" charset="0"/>
+                <a:ea typeface="Cambria" pitchFamily="34" charset="-122"/>
+                <a:cs typeface="Cambria" pitchFamily="34" charset="-120"/>
+              </a:rPr>
+              <a:t>Visible</a:t>
+            </a:r>
+            <a:endParaRPr lang="en-US" sz="2400" dirty="0"/>
+          </a:p>
+        </p:txBody>
+      </p:sp>
+      <p:sp>
+        <p:nvSpPr>
+          <p:cNvPr id="10" name="Text 8"/>
+          <p:cNvSpPr txBox="1"/>
+          <p:nvPr/>
+        </p:nvSpPr>
+        <p:spPr>
+          <a:xfrm>
+            <a:off x="2377440" y="4160520"/>
+            <a:ext cx="5120640" cy="548640"/>
+          </a:xfrm>
+          <a:prstGeom prst="rect">
+            <a:avLst/>
+          </a:prstGeom>
+          <a:noFill/>
+          <a:ln/>
+        </p:spPr>
+        <p:txBody>
+          <a:bodyPr wrap="square" lIns="0" tIns="0" rIns="0" bIns="0" rtlCol="0" anchor="ctr"/>
+          <a:lstStyle/>
+          <a:p>
+            <a:pPr indent="0" marL="0">
+              <a:buNone/>
+            </a:pPr>
+            <a:r>
+              <a:rPr lang="en-US" sz="1800" dirty="0">
+                <a:solidFill>
+                  <a:schemeClr val="bg1"/>
+                </a:solidFill>
+              </a:rPr>
+              <a:t>the 3D city shows the database as it changes</a:t>
+            </a:r>
+            <a:endParaRPr lang="en-US" sz="1800" dirty="0"/>
+          </a:p>
+        </p:txBody>
+      </p:sp>
+      <p:sp>
+        <p:nvSpPr>
+          <p:cNvPr id="11" name="Text 9"/>
+          <p:cNvSpPr txBox="1"/>
+          <p:nvPr/>
+        </p:nvSpPr>
+        <p:spPr>
+          <a:xfrm>
+            <a:off x="548640" y="5120640"/>
+            <a:ext cx="6858000" cy="548640"/>
+          </a:xfrm>
+          <a:prstGeom prst="rect">
+            <a:avLst/>
+          </a:prstGeom>
+          <a:noFill/>
+          <a:ln/>
+        </p:spPr>
+        <p:txBody>
+          <a:bodyPr wrap="square" lIns="0" tIns="0" rIns="0" bIns="0" rtlCol="0" anchor="t"/>
+          <a:lstStyle/>
+          <a:p>
+            <a:pPr indent="0" marL="0">
+              <a:buNone/>
+            </a:pPr>
+            <a:r>
+              <a:rPr lang="en-US" sz="2200" i="1" dirty="0">
+                <a:solidFill>
+                  <a:schemeClr val="bg2"/>
+                </a:solidFill>
+              </a:rPr>
+              <a:t>Everything on the screen is a row in Oracle.</a:t>
+            </a:r>
+            <a:endParaRPr lang="en-US" sz="2200" dirty="0"/>
+          </a:p>
+        </p:txBody>
+      </p:sp>
+      <p:pic>
+        <p:nvPicPr>
+          <p:cNvPr id="12" name="Port closing image" descr="preencoded.png">    </p:cNvPr>
+          <p:cNvPicPr>
+            <a:picLocks noChangeAspect="1"/>
+          </p:cNvPicPr>
+          <p:nvPr/>
+        </p:nvPicPr>
+        <p:blipFill>
+          <a:blip r:embed="rId1"/>
+          <a:stretch>
+            <a:fillRect/>
+          </a:stretch>
+        </p:blipFill>
+        <p:spPr>
+          <a:xfrm>
+            <a:off x="7635240" y="1828800"/>
+            <a:ext cx="4023360" cy="2322576"/>
+          </a:xfrm>
+          <a:prstGeom prst="rect">
+            <a:avLst/>
+          </a:prstGeom>
+          <a:effectLst>
+            <a:outerShdw sx="100000" sy="100000" kx="0" ky="0" algn="bl" rotWithShape="0" blurRad="152400" dist="50800" dir="5400000">
+              <a:srgbClr val="000000">
+                <a:alpha val="35000"/>
+              </a:srgbClr>
+            </a:outerShdw>
+          </a:effectLst>
+        </p:spPr>
+      </p:pic>
+      <p:sp>
+        <p:nvSpPr>
+          <p:cNvPr id="13" name="Text 10"/>
+          <p:cNvSpPr txBox="1"/>
+          <p:nvPr/>
+        </p:nvSpPr>
+        <p:spPr>
+          <a:xfrm>
+            <a:off x="7635240" y="4572000"/>
+            <a:ext cx="4023360" cy="731520"/>
+          </a:xfrm>
+          <a:prstGeom prst="rect">
+            <a:avLst/>
+          </a:prstGeom>
+          <a:noFill/>
+          <a:ln/>
+        </p:spPr>
+        <p:txBody>
+          <a:bodyPr wrap="square" lIns="0" tIns="0" rIns="0" bIns="0" rtlCol="0" anchor="t"/>
+          <a:lstStyle/>
+          <a:p>
+            <a:pPr algn="r" indent="0" marL="0">
+              <a:buNone/>
+            </a:pPr>
+            <a:r>
+              <a:rPr lang="en-US" sz="3600" b="1" dirty="0">
+                <a:solidFill>
+                  <a:schemeClr val="bg1"/>
+                </a:solidFill>
+                <a:latin typeface="Cambria" pitchFamily="34" charset="0"/>
+                <a:ea typeface="Cambria" pitchFamily="34" charset="-122"/>
+                <a:cs typeface="Cambria" pitchFamily="34" charset="-120"/>
+              </a:rPr>
+              <a:t>Thank you</a:t>
+            </a:r>
+            <a:endParaRPr lang="en-US" sz="3600" dirty="0"/>
+          </a:p>
+        </p:txBody>
+      </p:sp>
+      <p:sp>
+        <p:nvSpPr>
+          <p:cNvPr id="14" name="Text 11"/>
+          <p:cNvSpPr txBox="1"/>
+          <p:nvPr/>
+        </p:nvSpPr>
+        <p:spPr>
+          <a:xfrm>
+            <a:off x="7635240" y="5257800"/>
+            <a:ext cx="4023360" cy="411480"/>
+          </a:xfrm>
+          <a:prstGeom prst="rect">
+            <a:avLst/>
+          </a:prstGeom>
+          <a:noFill/>
+          <a:ln/>
+        </p:spPr>
+        <p:txBody>
+          <a:bodyPr wrap="square" lIns="0" tIns="0" rIns="0" bIns="0" rtlCol="0" anchor="t"/>
+          <a:lstStyle/>
+          <a:p>
+            <a:pPr algn="r" indent="0" marL="0">
+              <a:buNone/>
+            </a:pPr>
+            <a:r>
+              <a:rPr lang="en-US" sz="1600" dirty="0">
+                <a:solidFill>
+                  <a:schemeClr val="bg2"/>
+                </a:solidFill>
+              </a:rPr>
+              <a:t>Questions welcome</a:t>
+            </a:r>
+            <a:endParaRPr lang="en-US" sz="1600" dirty="0"/>
+          </a:p>
+        </p:txBody>
+      </p:sp>
+    </p:spTree>
+  </p:cSld>
+  <p:clrMapOvr>
+    <a:masterClrMapping/>
+  </p:clrMapOvr>
+</p:sld>
+</file>
+
 <file path=ppt/slides/slide3.xml><?xml version="1.0" encoding="utf-8"?>
 <p:sld xmlns:a="http://schemas.openxmlformats.org/drawingml/2006/main" xmlns:r="http://schemas.openxmlformats.org/officeDocument/2006/relationships" xmlns:p="http://schemas.openxmlformats.org/presentationml/2006/main">
   <p:cSld name="Slide 3">
@@ -13423,7 +17021,7 @@
                   <a:schemeClr val="tx1"/>
                 </a:solidFill>
               </a:rPr>
-              <a:t>44 tables, 17 views</a:t>
+              <a:t>64 tables, 27 views</a:t>
             </a:r>
             <a:endParaRPr lang="en-US" sz="1500" dirty="0"/>
           </a:p>
@@ -13441,7 +17039,7 @@
                   <a:schemeClr val="tx1"/>
                 </a:solidFill>
               </a:rPr>
-              <a:t>6 PL/SQL packages</a:t>
+              <a:t>10 PL/SQL packages</a:t>
             </a:r>
             <a:endParaRPr lang="en-US" sz="1500" dirty="0"/>
           </a:p>
@@ -13459,7 +17057,7 @@
                   <a:schemeClr val="tx1"/>
                 </a:solidFill>
               </a:rPr>
-              <a:t>14 triggers</a:t>
+              <a:t>26 triggers</a:t>
             </a:r>
             <a:endParaRPr lang="en-US" sz="1500" dirty="0"/>
           </a:p>
@@ -13477,7 +17075,7 @@
                   <a:schemeClr val="tx1"/>
                 </a:solidFill>
               </a:rPr>
-              <a:t>Audit log of every change</a:t>
+              <a:t>Flashback, VPD, blockchain</a:t>
             </a:r>
             <a:endParaRPr lang="en-US" sz="1500" dirty="0"/>
           </a:p>
@@ -15312,7 +18910,7 @@
                 <a:ea typeface="Cambria" pitchFamily="34" charset="-122"/>
                 <a:cs typeface="Cambria" pitchFamily="34" charset="-120"/>
               </a:rPr>
-              <a:t>44</a:t>
+              <a:t>64</a:t>
             </a:r>
             <a:endParaRPr lang="en-US" sz="6000" dirty="0"/>
           </a:p>
@@ -15414,7 +19012,7 @@
                 <a:ea typeface="Cambria" pitchFamily="34" charset="-122"/>
                 <a:cs typeface="Cambria" pitchFamily="34" charset="-120"/>
               </a:rPr>
-              <a:t>17</a:t>
+              <a:t>27</a:t>
             </a:r>
             <a:endParaRPr lang="en-US" sz="6000" dirty="0"/>
           </a:p>
@@ -15516,7 +19114,7 @@
                 <a:ea typeface="Cambria" pitchFamily="34" charset="-122"/>
                 <a:cs typeface="Cambria" pitchFamily="34" charset="-120"/>
               </a:rPr>
-              <a:t>6</a:t>
+              <a:t>10</a:t>
             </a:r>
             <a:endParaRPr lang="en-US" sz="6000" dirty="0"/>
           </a:p>
@@ -15618,7 +19216,7 @@
                 <a:ea typeface="Cambria" pitchFamily="34" charset="-122"/>
                 <a:cs typeface="Cambria" pitchFamily="34" charset="-120"/>
               </a:rPr>
-              <a:t>14</a:t>
+              <a:t>26</a:t>
             </a:r>
             <a:endParaRPr lang="en-US" sz="6000" dirty="0"/>
           </a:p>
@@ -15720,7 +19318,7 @@
                 <a:ea typeface="Cambria" pitchFamily="34" charset="-122"/>
                 <a:cs typeface="Cambria" pitchFamily="34" charset="-120"/>
               </a:rPr>
-              <a:t>102</a:t>
+              <a:t>136</a:t>
             </a:r>
             <a:endParaRPr lang="en-US" sz="6000" dirty="0"/>
           </a:p>
@@ -16005,7 +19603,7 @@
                 <a:ea typeface="Cambria" pitchFamily="34" charset="-122"/>
                 <a:cs typeface="Cambria" pitchFamily="34" charset="-120"/>
               </a:rPr>
-              <a:t>Nine areas, 44 tables</a:t>
+              <a:t>Nine areas, 44 core tables</a:t>
             </a:r>
             <a:endParaRPr lang="en-US" sz="3400" dirty="0"/>
           </a:p>
